--- a/projects/consent-vault-manager/pitch/consent-vault-manager-pitch.pptx
+++ b/projects/consent-vault-manager/pitch/consent-vault-manager-pitch.pptx
@@ -18,9 +18,10 @@
     <p:sldId id="266" r:id="rId12"/>
     <p:sldId id="267" r:id="rId13"/>
     <p:sldId id="268" r:id="rId14"/>
+    <p:sldId id="269" r:id="rId15"/>
   </p:sldIdLst>
   <p:notesMasterIdLst>
-    <p:notesMasterId r:id="rId15"/>
+    <p:notesMasterId r:id="rId16"/>
   </p:notesMasterIdLst>
   <p:sldSz cx="12192000" cy="6858000"/>
   <p:notesSz cx="6858000" cy="12192000"/>
@@ -890,6 +891,94 @@
             <a:fld id="{F7021451-1387-4CA6-816F-3879F97B5CBC}" type="slidenum">
               <a:rPr lang="en-US"/>
               <a:t>13</a:t>
+            </a:fld>
+            <a:endParaRPr lang="en-US"/>
+          </a:p>
+        </p:txBody>
+      </p:sp>
+    </p:spTree>
+    <p:extLst>
+      <p:ext uri="{BB962C8B-B14F-4D97-AF65-F5344CB8AC3E}">
+        <p14:creationId xmlns:p14="http://schemas.microsoft.com/office/powerpoint/2010/main" val="1024086991"/>
+      </p:ext>
+    </p:extLst>
+  </p:cSld>
+  <p:clrMapOvr>
+    <a:masterClrMapping/>
+  </p:clrMapOvr>
+</p:notes>
+</file>
+
+<file path=ppt/notesSlides/notesSlide14.xml><?xml version="1.0" encoding="utf-8"?>
+<p:notes xmlns:a="http://schemas.openxmlformats.org/drawingml/2006/main" xmlns:r="http://schemas.openxmlformats.org/officeDocument/2006/relationships" xmlns:p="http://schemas.openxmlformats.org/presentationml/2006/main">
+  <p:cSld>
+    <p:spTree>
+      <p:nvGrpSpPr>
+        <p:cNvPr id="1" name=""/>
+        <p:cNvGrpSpPr/>
+        <p:nvPr/>
+      </p:nvGrpSpPr>
+      <p:grpSpPr>
+        <a:xfrm>
+          <a:off x="0" y="0"/>
+          <a:ext cx="0" cy="0"/>
+          <a:chOff x="0" y="0"/>
+          <a:chExt cx="0" cy="0"/>
+        </a:xfrm>
+      </p:grpSpPr>
+      <p:sp>
+        <p:nvSpPr>
+          <p:cNvPr id="2" name="Slide Image Placeholder 1"/>
+          <p:cNvSpPr>
+            <a:spLocks noGrp="1" noRot="1" noChangeAspect="1"/>
+          </p:cNvSpPr>
+          <p:nvPr>
+            <p:ph type="sldImg"/>
+          </p:nvPr>
+        </p:nvSpPr>
+        <p:spPr/>
+      </p:sp>
+      <p:sp>
+        <p:nvSpPr>
+          <p:cNvPr id="3" name="Notes Placeholder 2"/>
+          <p:cNvSpPr>
+            <a:spLocks noGrp="1"/>
+          </p:cNvSpPr>
+          <p:nvPr>
+            <p:ph type="body" idx="1"/>
+          </p:nvPr>
+        </p:nvSpPr>
+        <p:spPr/>
+        <p:txBody>
+          <a:bodyPr/>
+          <a:lstStyle/>
+          <a:p>
+            <a:r>
+              <a:rPr lang="en-US" dirty="0"/>
+              <a:t/>
+            </a:r>
+            <a:endParaRPr lang="en-US" dirty="0"/>
+          </a:p>
+        </p:txBody>
+      </p:sp>
+      <p:sp>
+        <p:nvSpPr>
+          <p:cNvPr id="4" name="Slide Number Placeholder 3"/>
+          <p:cNvSpPr>
+            <a:spLocks noGrp="1"/>
+          </p:cNvSpPr>
+          <p:nvPr>
+            <p:ph type="sldNum" sz="quarter" idx="10"/>
+          </p:nvPr>
+        </p:nvSpPr>
+        <p:spPr/>
+        <p:txBody>
+          <a:bodyPr/>
+          <a:lstStyle/>
+          <a:p>
+            <a:fld id="{F7021451-1387-4CA6-816F-3879F97B5CBC}" type="slidenum">
+              <a:rPr lang="en-US"/>
+              <a:t>14</a:t>
             </a:fld>
             <a:endParaRPr lang="en-US"/>
           </a:p>
@@ -2441,6 +2530,992 @@
     <p:bg>
       <p:bgPr>
         <a:solidFill>
+          <a:srgbClr val="F7F9FB"/>
+        </a:solidFill>
+      </p:bgPr>
+    </p:bg>
+    <p:spTree>
+      <p:nvGrpSpPr>
+        <p:cNvPr id="1" name=""/>
+        <p:cNvGrpSpPr/>
+        <p:nvPr/>
+      </p:nvGrpSpPr>
+      <p:grpSpPr>
+        <a:xfrm>
+          <a:off x="0" y="0"/>
+          <a:ext cx="0" cy="0"/>
+          <a:chOff x="0" y="0"/>
+          <a:chExt cx="0" cy="0"/>
+        </a:xfrm>
+      </p:grpSpPr>
+      <p:sp>
+        <p:nvSpPr>
+          <p:cNvPr id="2" name="Text 0"/>
+          <p:cNvSpPr/>
+          <p:nvPr/>
+        </p:nvSpPr>
+        <p:spPr>
+          <a:xfrm>
+            <a:off x="11368735" y="6355080"/>
+            <a:ext cx="548640" cy="320040"/>
+          </a:xfrm>
+          <a:prstGeom prst="rect">
+            <a:avLst/>
+          </a:prstGeom>
+          <a:noFill/>
+          <a:ln/>
+        </p:spPr>
+        <p:txBody>
+          <a:bodyPr wrap="square" rtlCol="0" anchor="ctr"/>
+          <a:lstStyle/>
+          <a:p>
+            <a:pPr algn="r" indent="0" marL="0">
+              <a:buNone/>
+            </a:pPr>
+            <a:r>
+              <a:rPr lang="en-US" sz="1000" dirty="0">
+                <a:solidFill>
+                  <a:srgbClr val="9AA6B5"/>
+                </a:solidFill>
+                <a:latin typeface="Calibri" pitchFamily="34" charset="0"/>
+                <a:ea typeface="Calibri" pitchFamily="34" charset="-122"/>
+                <a:cs typeface="Calibri" pitchFamily="34" charset="-120"/>
+              </a:rPr>
+              <a:t>10</a:t>
+            </a:r>
+            <a:endParaRPr lang="en-US" sz="1000" dirty="0"/>
+          </a:p>
+        </p:txBody>
+      </p:sp>
+      <p:sp>
+        <p:nvSpPr>
+          <p:cNvPr id="3" name="Text 1"/>
+          <p:cNvSpPr/>
+          <p:nvPr/>
+        </p:nvSpPr>
+        <p:spPr>
+          <a:xfrm>
+            <a:off x="0" y="0"/>
+            <a:ext cx="5486400" cy="320040"/>
+          </a:xfrm>
+          <a:prstGeom prst="rect">
+            <a:avLst/>
+          </a:prstGeom>
+          <a:noFill/>
+          <a:ln/>
+        </p:spPr>
+        <p:txBody>
+          <a:bodyPr wrap="square" rtlCol="0" anchor="ctr"/>
+          <a:lstStyle/>
+          <a:p>
+            <a:pPr algn="l" indent="0" marL="0">
+              <a:buNone/>
+            </a:pPr>
+            <a:r>
+              <a:rPr lang="en-US" sz="1200" b="1" spc="200" kern="0" dirty="0">
+                <a:solidFill>
+                  <a:srgbClr val="1B8A94"/>
+                </a:solidFill>
+                <a:latin typeface="Calibri" pitchFamily="34" charset="0"/>
+                <a:ea typeface="Calibri" pitchFamily="34" charset="-122"/>
+                <a:cs typeface="Calibri" pitchFamily="34" charset="-120"/>
+              </a:rPr>
+              <a:t>ORG BOUNDARIES, NOT ONE ADMIN</a:t>
+            </a:r>
+            <a:endParaRPr lang="en-US" sz="1200" dirty="0"/>
+          </a:p>
+        </p:txBody>
+      </p:sp>
+      <p:sp>
+        <p:nvSpPr>
+          <p:cNvPr id="4" name="Text 2"/>
+          <p:cNvSpPr/>
+          <p:nvPr/>
+        </p:nvSpPr>
+        <p:spPr>
+          <a:xfrm>
+            <a:off x="777240" y="822960"/>
+            <a:ext cx="10332720" cy="685800"/>
+          </a:xfrm>
+          <a:prstGeom prst="rect">
+            <a:avLst/>
+          </a:prstGeom>
+          <a:noFill/>
+          <a:ln/>
+        </p:spPr>
+        <p:txBody>
+          <a:bodyPr wrap="square" rtlCol="0" anchor="ctr"/>
+          <a:lstStyle/>
+          <a:p>
+            <a:pPr indent="0" marL="0">
+              <a:buNone/>
+            </a:pPr>
+            <a:r>
+              <a:rPr lang="en-US" sz="3200" b="1" dirty="0">
+                <a:solidFill>
+                  <a:srgbClr val="16202B"/>
+                </a:solidFill>
+                <a:latin typeface="Cambria" pitchFamily="34" charset="0"/>
+                <a:ea typeface="Cambria" pitchFamily="34" charset="-122"/>
+                <a:cs typeface="Cambria" pitchFamily="34" charset="-120"/>
+              </a:rPr>
+              <a:t>Same code, genuinely separate tenants</a:t>
+            </a:r>
+            <a:endParaRPr lang="en-US" sz="3200" dirty="0"/>
+          </a:p>
+        </p:txBody>
+      </p:sp>
+      <p:sp>
+        <p:nvSpPr>
+          <p:cNvPr id="5" name="Text 3"/>
+          <p:cNvSpPr/>
+          <p:nvPr/>
+        </p:nvSpPr>
+        <p:spPr>
+          <a:xfrm>
+            <a:off x="777240" y="1481328"/>
+            <a:ext cx="10149840" cy="457200"/>
+          </a:xfrm>
+          <a:prstGeom prst="rect">
+            <a:avLst/>
+          </a:prstGeom>
+          <a:noFill/>
+          <a:ln/>
+        </p:spPr>
+        <p:txBody>
+          <a:bodyPr wrap="square" rtlCol="0" anchor="ctr"/>
+          <a:lstStyle/>
+          <a:p>
+            <a:pPr indent="0" marL="0">
+              <a:buNone/>
+            </a:pPr>
+            <a:r>
+              <a:rPr lang="en-US" sz="1250" dirty="0">
+                <a:solidFill>
+                  <a:srgbClr val="5B6B7C"/>
+                </a:solidFill>
+                <a:latin typeface="Calibri" pitchFamily="34" charset="0"/>
+                <a:ea typeface="Calibri" pitchFamily="34" charset="-122"/>
+                <a:cs typeface="Calibri" pitchFamily="34" charset="-120"/>
+              </a:rPr>
+              <a:t>fiduciaryId is derived from a parent entity, never supplied by a caller — mcp-server and the job workers needed zero code changes to stay correctly scoped.</a:t>
+            </a:r>
+            <a:endParaRPr lang="en-US" sz="1250" dirty="0"/>
+          </a:p>
+        </p:txBody>
+      </p:sp>
+      <p:sp>
+        <p:nvSpPr>
+          <p:cNvPr id="6" name="Shape 4"/>
+          <p:cNvSpPr/>
+          <p:nvPr/>
+        </p:nvSpPr>
+        <p:spPr>
+          <a:xfrm>
+            <a:off x="777240" y="2103120"/>
+            <a:ext cx="4709160" cy="822960"/>
+          </a:xfrm>
+          <a:prstGeom prst="roundRect">
+            <a:avLst>
+              <a:gd name="adj" fmla="val 10000"/>
+            </a:avLst>
+          </a:prstGeom>
+          <a:solidFill>
+            <a:srgbClr val="FFFFFF"/>
+          </a:solidFill>
+          <a:ln w="12700">
+            <a:solidFill>
+              <a:srgbClr val="E3E8EF"/>
+            </a:solidFill>
+            <a:prstDash val="solid"/>
+          </a:ln>
+          <a:effectLst>
+            <a:outerShdw sx="100000" sy="100000" kx="0" ky="0" algn="bl" rotWithShape="0" blurRad="101600" dist="38100" dir="5400000">
+              <a:srgbClr val="12233F">
+                <a:alpha val="18000"/>
+              </a:srgbClr>
+            </a:outerShdw>
+          </a:effectLst>
+        </p:spPr>
+      </p:sp>
+      <p:sp>
+        <p:nvSpPr>
+          <p:cNvPr id="7" name="Shape 5"/>
+          <p:cNvSpPr/>
+          <p:nvPr/>
+        </p:nvSpPr>
+        <p:spPr>
+          <a:xfrm>
+            <a:off x="978408" y="2267712"/>
+            <a:ext cx="493776" cy="493776"/>
+          </a:xfrm>
+          <a:prstGeom prst="ellipse">
+            <a:avLst/>
+          </a:prstGeom>
+          <a:solidFill>
+            <a:srgbClr val="12233F"/>
+          </a:solidFill>
+          <a:ln/>
+        </p:spPr>
+      </p:sp>
+      <p:pic>
+        <p:nvPicPr>
+          <p:cNvPr id="8" name="Image 0" descr="/tmp/claude-0/-home-user-Self-Project/0c48a94d-adf1-5cd3-ba0e-1e76ea2b114f/scratchpad/deck/icons/users.png">    </p:cNvPr>
+          <p:cNvPicPr>
+            <a:picLocks noChangeAspect="1"/>
+          </p:cNvPicPr>
+          <p:nvPr/>
+        </p:nvPicPr>
+        <p:blipFill>
+          <a:blip r:embed="rId1"/>
+          <a:stretch>
+            <a:fillRect/>
+          </a:stretch>
+        </p:blipFill>
+        <p:spPr>
+          <a:xfrm>
+            <a:off x="1089508" y="2378812"/>
+            <a:ext cx="271577" cy="271577"/>
+          </a:xfrm>
+          <a:prstGeom prst="rect">
+            <a:avLst/>
+          </a:prstGeom>
+        </p:spPr>
+      </p:pic>
+      <p:sp>
+        <p:nvSpPr>
+          <p:cNvPr id="9" name="Text 6"/>
+          <p:cNvSpPr/>
+          <p:nvPr/>
+        </p:nvSpPr>
+        <p:spPr>
+          <a:xfrm>
+            <a:off x="1600200" y="2212848"/>
+            <a:ext cx="3703320" cy="274320"/>
+          </a:xfrm>
+          <a:prstGeom prst="rect">
+            <a:avLst/>
+          </a:prstGeom>
+          <a:noFill/>
+          <a:ln/>
+        </p:spPr>
+        <p:txBody>
+          <a:bodyPr wrap="square" lIns="0" tIns="0" rIns="0" bIns="0" rtlCol="0" anchor="ctr"/>
+          <a:lstStyle/>
+          <a:p>
+            <a:pPr indent="0" marL="0">
+              <a:buNone/>
+            </a:pPr>
+            <a:r>
+              <a:rPr lang="en-US" sz="1250" b="1" dirty="0">
+                <a:solidFill>
+                  <a:srgbClr val="1B8A94"/>
+                </a:solidFill>
+                <a:latin typeface="Courier New" pitchFamily="34" charset="0"/>
+                <a:ea typeface="Courier New" pitchFamily="34" charset="-122"/>
+                <a:cs typeface="Courier New" pitchFamily="34" charset="-120"/>
+              </a:rPr>
+              <a:t>admin</a:t>
+            </a:r>
+            <a:endParaRPr lang="en-US" sz="1250" dirty="0"/>
+          </a:p>
+        </p:txBody>
+      </p:sp>
+      <p:sp>
+        <p:nvSpPr>
+          <p:cNvPr id="10" name="Text 7"/>
+          <p:cNvSpPr/>
+          <p:nvPr/>
+        </p:nvSpPr>
+        <p:spPr>
+          <a:xfrm>
+            <a:off x="1600200" y="2505456"/>
+            <a:ext cx="3703320" cy="347472"/>
+          </a:xfrm>
+          <a:prstGeom prst="rect">
+            <a:avLst/>
+          </a:prstGeom>
+          <a:noFill/>
+          <a:ln/>
+        </p:spPr>
+        <p:txBody>
+          <a:bodyPr wrap="square" lIns="0" tIns="0" rIns="0" bIns="0" rtlCol="0" anchor="ctr"/>
+          <a:lstStyle/>
+          <a:p>
+            <a:pPr indent="0" marL="0">
+              <a:buNone/>
+            </a:pPr>
+            <a:r>
+              <a:rPr lang="en-US" sz="1000" dirty="0">
+                <a:solidFill>
+                  <a:srgbClr val="5B6B7C"/>
+                </a:solidFill>
+                <a:latin typeface="Calibri" pitchFamily="34" charset="0"/>
+                <a:ea typeface="Calibri" pitchFamily="34" charset="-122"/>
+                <a:cs typeface="Calibri" pitchFamily="34" charset="-120"/>
+              </a:rPr>
+              <a:t>Everything a dpo can do, plus manage this fiduciary's own team and role assignments.</a:t>
+            </a:r>
+            <a:endParaRPr lang="en-US" sz="1000" dirty="0"/>
+          </a:p>
+        </p:txBody>
+      </p:sp>
+      <p:sp>
+        <p:nvSpPr>
+          <p:cNvPr id="11" name="Shape 8"/>
+          <p:cNvSpPr/>
+          <p:nvPr/>
+        </p:nvSpPr>
+        <p:spPr>
+          <a:xfrm>
+            <a:off x="777240" y="3044952"/>
+            <a:ext cx="4709160" cy="822960"/>
+          </a:xfrm>
+          <a:prstGeom prst="roundRect">
+            <a:avLst>
+              <a:gd name="adj" fmla="val 10000"/>
+            </a:avLst>
+          </a:prstGeom>
+          <a:solidFill>
+            <a:srgbClr val="FFFFFF"/>
+          </a:solidFill>
+          <a:ln w="12700">
+            <a:solidFill>
+              <a:srgbClr val="E3E8EF"/>
+            </a:solidFill>
+            <a:prstDash val="solid"/>
+          </a:ln>
+          <a:effectLst>
+            <a:outerShdw sx="100000" sy="100000" kx="0" ky="0" algn="bl" rotWithShape="0" blurRad="101600" dist="38100" dir="5400000">
+              <a:srgbClr val="12233F">
+                <a:alpha val="18000"/>
+              </a:srgbClr>
+            </a:outerShdw>
+          </a:effectLst>
+        </p:spPr>
+      </p:sp>
+      <p:sp>
+        <p:nvSpPr>
+          <p:cNvPr id="12" name="Shape 9"/>
+          <p:cNvSpPr/>
+          <p:nvPr/>
+        </p:nvSpPr>
+        <p:spPr>
+          <a:xfrm>
+            <a:off x="978408" y="3209544"/>
+            <a:ext cx="493776" cy="493776"/>
+          </a:xfrm>
+          <a:prstGeom prst="ellipse">
+            <a:avLst/>
+          </a:prstGeom>
+          <a:solidFill>
+            <a:srgbClr val="12233F"/>
+          </a:solidFill>
+          <a:ln/>
+        </p:spPr>
+      </p:sp>
+      <p:pic>
+        <p:nvPicPr>
+          <p:cNvPr id="13" name="Image 1" descr="/tmp/claude-0/-home-user-Self-Project/0c48a94d-adf1-5cd3-ba0e-1e76ea2b114f/scratchpad/deck/icons/gear.png">    </p:cNvPr>
+          <p:cNvPicPr>
+            <a:picLocks noChangeAspect="1"/>
+          </p:cNvPicPr>
+          <p:nvPr/>
+        </p:nvPicPr>
+        <p:blipFill>
+          <a:blip r:embed="rId2"/>
+          <a:stretch>
+            <a:fillRect/>
+          </a:stretch>
+        </p:blipFill>
+        <p:spPr>
+          <a:xfrm>
+            <a:off x="1089508" y="3320644"/>
+            <a:ext cx="271577" cy="271577"/>
+          </a:xfrm>
+          <a:prstGeom prst="rect">
+            <a:avLst/>
+          </a:prstGeom>
+        </p:spPr>
+      </p:pic>
+      <p:sp>
+        <p:nvSpPr>
+          <p:cNvPr id="14" name="Text 10"/>
+          <p:cNvSpPr/>
+          <p:nvPr/>
+        </p:nvSpPr>
+        <p:spPr>
+          <a:xfrm>
+            <a:off x="1600200" y="3154680"/>
+            <a:ext cx="3703320" cy="274320"/>
+          </a:xfrm>
+          <a:prstGeom prst="rect">
+            <a:avLst/>
+          </a:prstGeom>
+          <a:noFill/>
+          <a:ln/>
+        </p:spPr>
+        <p:txBody>
+          <a:bodyPr wrap="square" lIns="0" tIns="0" rIns="0" bIns="0" rtlCol="0" anchor="ctr"/>
+          <a:lstStyle/>
+          <a:p>
+            <a:pPr indent="0" marL="0">
+              <a:buNone/>
+            </a:pPr>
+            <a:r>
+              <a:rPr lang="en-US" sz="1250" b="1" dirty="0">
+                <a:solidFill>
+                  <a:srgbClr val="1B8A94"/>
+                </a:solidFill>
+                <a:latin typeface="Courier New" pitchFamily="34" charset="0"/>
+                <a:ea typeface="Courier New" pitchFamily="34" charset="-122"/>
+                <a:cs typeface="Courier New" pitchFamily="34" charset="-120"/>
+              </a:rPr>
+              <a:t>dpo</a:t>
+            </a:r>
+            <a:endParaRPr lang="en-US" sz="1250" dirty="0"/>
+          </a:p>
+        </p:txBody>
+      </p:sp>
+      <p:sp>
+        <p:nvSpPr>
+          <p:cNvPr id="15" name="Text 11"/>
+          <p:cNvSpPr/>
+          <p:nvPr/>
+        </p:nvSpPr>
+        <p:spPr>
+          <a:xfrm>
+            <a:off x="1600200" y="3447288"/>
+            <a:ext cx="3703320" cy="347472"/>
+          </a:xfrm>
+          <a:prstGeom prst="rect">
+            <a:avLst/>
+          </a:prstGeom>
+          <a:noFill/>
+          <a:ln/>
+        </p:spPr>
+        <p:txBody>
+          <a:bodyPr wrap="square" lIns="0" tIns="0" rIns="0" bIns="0" rtlCol="0" anchor="ctr"/>
+          <a:lstStyle/>
+          <a:p>
+            <a:pPr indent="0" marL="0">
+              <a:buNone/>
+            </a:pPr>
+            <a:r>
+              <a:rPr lang="en-US" sz="1000" dirty="0">
+                <a:solidFill>
+                  <a:srgbClr val="5B6B7C"/>
+                </a:solidFill>
+                <a:latin typeface="Calibri" pitchFamily="34" charset="0"/>
+                <a:ea typeface="Calibri" pitchFamily="34" charset="-122"/>
+                <a:cs typeface="Calibri" pitchFamily="34" charset="-120"/>
+              </a:rPr>
+              <a:t>Read and write consents, DSRs, and breaches — can't touch /users.</a:t>
+            </a:r>
+            <a:endParaRPr lang="en-US" sz="1000" dirty="0"/>
+          </a:p>
+        </p:txBody>
+      </p:sp>
+      <p:sp>
+        <p:nvSpPr>
+          <p:cNvPr id="16" name="Shape 12"/>
+          <p:cNvSpPr/>
+          <p:nvPr/>
+        </p:nvSpPr>
+        <p:spPr>
+          <a:xfrm>
+            <a:off x="777240" y="3986784"/>
+            <a:ext cx="4709160" cy="822960"/>
+          </a:xfrm>
+          <a:prstGeom prst="roundRect">
+            <a:avLst>
+              <a:gd name="adj" fmla="val 10000"/>
+            </a:avLst>
+          </a:prstGeom>
+          <a:solidFill>
+            <a:srgbClr val="FFFFFF"/>
+          </a:solidFill>
+          <a:ln w="12700">
+            <a:solidFill>
+              <a:srgbClr val="E3E8EF"/>
+            </a:solidFill>
+            <a:prstDash val="solid"/>
+          </a:ln>
+          <a:effectLst>
+            <a:outerShdw sx="100000" sy="100000" kx="0" ky="0" algn="bl" rotWithShape="0" blurRad="101600" dist="38100" dir="5400000">
+              <a:srgbClr val="12233F">
+                <a:alpha val="18000"/>
+              </a:srgbClr>
+            </a:outerShdw>
+          </a:effectLst>
+        </p:spPr>
+      </p:sp>
+      <p:sp>
+        <p:nvSpPr>
+          <p:cNvPr id="17" name="Shape 13"/>
+          <p:cNvSpPr/>
+          <p:nvPr/>
+        </p:nvSpPr>
+        <p:spPr>
+          <a:xfrm>
+            <a:off x="978408" y="4151376"/>
+            <a:ext cx="493776" cy="493776"/>
+          </a:xfrm>
+          <a:prstGeom prst="ellipse">
+            <a:avLst/>
+          </a:prstGeom>
+          <a:solidFill>
+            <a:srgbClr val="12233F"/>
+          </a:solidFill>
+          <a:ln/>
+        </p:spPr>
+      </p:sp>
+      <p:pic>
+        <p:nvPicPr>
+          <p:cNvPr id="18" name="Image 2" descr="/tmp/claude-0/-home-user-Self-Project/0c48a94d-adf1-5cd3-ba0e-1e76ea2b114f/scratchpad/deck/icons/eye.png">    </p:cNvPr>
+          <p:cNvPicPr>
+            <a:picLocks noChangeAspect="1"/>
+          </p:cNvPicPr>
+          <p:nvPr/>
+        </p:nvPicPr>
+        <p:blipFill>
+          <a:blip r:embed="rId3"/>
+          <a:stretch>
+            <a:fillRect/>
+          </a:stretch>
+        </p:blipFill>
+        <p:spPr>
+          <a:xfrm>
+            <a:off x="1089508" y="4262476"/>
+            <a:ext cx="271577" cy="271577"/>
+          </a:xfrm>
+          <a:prstGeom prst="rect">
+            <a:avLst/>
+          </a:prstGeom>
+        </p:spPr>
+      </p:pic>
+      <p:sp>
+        <p:nvSpPr>
+          <p:cNvPr id="19" name="Text 14"/>
+          <p:cNvSpPr/>
+          <p:nvPr/>
+        </p:nvSpPr>
+        <p:spPr>
+          <a:xfrm>
+            <a:off x="1600200" y="4096512"/>
+            <a:ext cx="3703320" cy="274320"/>
+          </a:xfrm>
+          <a:prstGeom prst="rect">
+            <a:avLst/>
+          </a:prstGeom>
+          <a:noFill/>
+          <a:ln/>
+        </p:spPr>
+        <p:txBody>
+          <a:bodyPr wrap="square" lIns="0" tIns="0" rIns="0" bIns="0" rtlCol="0" anchor="ctr"/>
+          <a:lstStyle/>
+          <a:p>
+            <a:pPr indent="0" marL="0">
+              <a:buNone/>
+            </a:pPr>
+            <a:r>
+              <a:rPr lang="en-US" sz="1250" b="1" dirty="0">
+                <a:solidFill>
+                  <a:srgbClr val="1B8A94"/>
+                </a:solidFill>
+                <a:latin typeface="Courier New" pitchFamily="34" charset="0"/>
+                <a:ea typeface="Courier New" pitchFamily="34" charset="-122"/>
+                <a:cs typeface="Courier New" pitchFamily="34" charset="-120"/>
+              </a:rPr>
+              <a:t>viewer</a:t>
+            </a:r>
+            <a:endParaRPr lang="en-US" sz="1250" dirty="0"/>
+          </a:p>
+        </p:txBody>
+      </p:sp>
+      <p:sp>
+        <p:nvSpPr>
+          <p:cNvPr id="20" name="Text 15"/>
+          <p:cNvSpPr/>
+          <p:nvPr/>
+        </p:nvSpPr>
+        <p:spPr>
+          <a:xfrm>
+            <a:off x="1600200" y="4389120"/>
+            <a:ext cx="3703320" cy="347472"/>
+          </a:xfrm>
+          <a:prstGeom prst="rect">
+            <a:avLst/>
+          </a:prstGeom>
+          <a:noFill/>
+          <a:ln/>
+        </p:spPr>
+        <p:txBody>
+          <a:bodyPr wrap="square" lIns="0" tIns="0" rIns="0" bIns="0" rtlCol="0" anchor="ctr"/>
+          <a:lstStyle/>
+          <a:p>
+            <a:pPr indent="0" marL="0">
+              <a:buNone/>
+            </a:pPr>
+            <a:r>
+              <a:rPr lang="en-US" sz="1000" dirty="0">
+                <a:solidFill>
+                  <a:srgbClr val="5B6B7C"/>
+                </a:solidFill>
+                <a:latin typeface="Calibri" pitchFamily="34" charset="0"/>
+                <a:ea typeface="Calibri" pitchFamily="34" charset="-122"/>
+                <a:cs typeface="Calibri" pitchFamily="34" charset="-120"/>
+              </a:rPr>
+              <a:t>Read-only everywhere. No writes, no team access.</a:t>
+            </a:r>
+            <a:endParaRPr lang="en-US" sz="1000" dirty="0"/>
+          </a:p>
+        </p:txBody>
+      </p:sp>
+      <p:sp>
+        <p:nvSpPr>
+          <p:cNvPr id="21" name="Shape 16"/>
+          <p:cNvSpPr/>
+          <p:nvPr/>
+        </p:nvSpPr>
+        <p:spPr>
+          <a:xfrm>
+            <a:off x="685800" y="4946904"/>
+            <a:ext cx="1920240" cy="1351901"/>
+          </a:xfrm>
+          <a:prstGeom prst="roundRect">
+            <a:avLst>
+              <a:gd name="adj" fmla="val 4058"/>
+            </a:avLst>
+          </a:prstGeom>
+          <a:solidFill>
+            <a:srgbClr val="FFFFFF"/>
+          </a:solidFill>
+          <a:ln w="12700">
+            <a:solidFill>
+              <a:srgbClr val="E3E8EF"/>
+            </a:solidFill>
+            <a:prstDash val="solid"/>
+          </a:ln>
+          <a:effectLst>
+            <a:outerShdw sx="100000" sy="100000" kx="0" ky="0" algn="bl" rotWithShape="0" blurRad="101600" dist="38100" dir="5400000">
+              <a:srgbClr val="12233F">
+                <a:alpha val="18000"/>
+              </a:srgbClr>
+            </a:outerShdw>
+          </a:effectLst>
+        </p:spPr>
+      </p:sp>
+      <p:pic>
+        <p:nvPicPr>
+          <p:cNvPr id="22" name="Image 3" descr="/tmp/claude-0/-home-user-Self-Project/0c48a94d-adf1-5cd3-ba0e-1e76ea2b114f/scratchpad/p8-01-login-crop.png">    </p:cNvPr>
+          <p:cNvPicPr>
+            <a:picLocks noChangeAspect="1"/>
+          </p:cNvPicPr>
+          <p:nvPr/>
+        </p:nvPicPr>
+        <p:blipFill>
+          <a:blip r:embed="rId4"/>
+          <a:stretch>
+            <a:fillRect/>
+          </a:stretch>
+        </p:blipFill>
+        <p:spPr>
+          <a:xfrm>
+            <a:off x="777240" y="5038344"/>
+            <a:ext cx="1737360" cy="1169021"/>
+          </a:xfrm>
+          <a:prstGeom prst="rect">
+            <a:avLst/>
+          </a:prstGeom>
+        </p:spPr>
+      </p:pic>
+      <p:sp>
+        <p:nvSpPr>
+          <p:cNvPr id="23" name="Text 17"/>
+          <p:cNvSpPr/>
+          <p:nvPr/>
+        </p:nvSpPr>
+        <p:spPr>
+          <a:xfrm>
+            <a:off x="2834640" y="4946904"/>
+            <a:ext cx="2651760" cy="1351901"/>
+          </a:xfrm>
+          <a:prstGeom prst="rect">
+            <a:avLst/>
+          </a:prstGeom>
+          <a:noFill/>
+          <a:ln/>
+        </p:spPr>
+        <p:txBody>
+          <a:bodyPr wrap="square" lIns="0" tIns="0" rIns="0" bIns="0" rtlCol="0" anchor="ctr"/>
+          <a:lstStyle/>
+          <a:p>
+            <a:pPr indent="0" marL="0">
+              <a:buNone/>
+            </a:pPr>
+            <a:r>
+              <a:rPr lang="en-US" sz="1000" i="1" dirty="0">
+                <a:solidFill>
+                  <a:srgbClr val="5B6B7C"/>
+                </a:solidFill>
+                <a:latin typeface="Calibri" pitchFamily="34" charset="0"/>
+                <a:ea typeface="Calibri" pitchFamily="34" charset="-122"/>
+                <a:cs typeface="Calibri" pitchFamily="34" charset="-120"/>
+              </a:rPr>
+              <a:t>Real accounts, bcrypt-verified — no shared admin env var.</a:t>
+            </a:r>
+            <a:endParaRPr lang="en-US" sz="1000" dirty="0"/>
+          </a:p>
+        </p:txBody>
+      </p:sp>
+      <p:sp>
+        <p:nvSpPr>
+          <p:cNvPr id="24" name="Shape 18"/>
+          <p:cNvSpPr/>
+          <p:nvPr/>
+        </p:nvSpPr>
+        <p:spPr>
+          <a:xfrm>
+            <a:off x="6016752" y="1993392"/>
+            <a:ext cx="5431536" cy="1710690"/>
+          </a:xfrm>
+          <a:prstGeom prst="roundRect">
+            <a:avLst>
+              <a:gd name="adj" fmla="val 3207"/>
+            </a:avLst>
+          </a:prstGeom>
+          <a:solidFill>
+            <a:srgbClr val="FFFFFF"/>
+          </a:solidFill>
+          <a:ln w="12700">
+            <a:solidFill>
+              <a:srgbClr val="E3E8EF"/>
+            </a:solidFill>
+            <a:prstDash val="solid"/>
+          </a:ln>
+          <a:effectLst>
+            <a:outerShdw sx="100000" sy="100000" kx="0" ky="0" algn="bl" rotWithShape="0" blurRad="101600" dist="38100" dir="5400000">
+              <a:srgbClr val="12233F">
+                <a:alpha val="18000"/>
+              </a:srgbClr>
+            </a:outerShdw>
+          </a:effectLst>
+        </p:spPr>
+      </p:sp>
+      <p:pic>
+        <p:nvPicPr>
+          <p:cNvPr id="25" name="Image 4" descr="/tmp/claude-0/-home-user-Self-Project/0c48a94d-adf1-5cd3-ba0e-1e76ea2b114f/scratchpad/p8-02-team-admin-crop.png">    </p:cNvPr>
+          <p:cNvPicPr>
+            <a:picLocks noChangeAspect="1"/>
+          </p:cNvPicPr>
+          <p:nvPr/>
+        </p:nvPicPr>
+        <p:blipFill>
+          <a:blip r:embed="rId5"/>
+          <a:stretch>
+            <a:fillRect/>
+          </a:stretch>
+        </p:blipFill>
+        <p:spPr>
+          <a:xfrm>
+            <a:off x="6126480" y="2103120"/>
+            <a:ext cx="5212080" cy="1491234"/>
+          </a:xfrm>
+          <a:prstGeom prst="rect">
+            <a:avLst/>
+          </a:prstGeom>
+        </p:spPr>
+      </p:pic>
+      <p:sp>
+        <p:nvSpPr>
+          <p:cNvPr id="26" name="Text 19"/>
+          <p:cNvSpPr/>
+          <p:nvPr/>
+        </p:nvSpPr>
+        <p:spPr>
+          <a:xfrm>
+            <a:off x="6126480" y="3722370"/>
+            <a:ext cx="5212080" cy="274320"/>
+          </a:xfrm>
+          <a:prstGeom prst="rect">
+            <a:avLst/>
+          </a:prstGeom>
+          <a:noFill/>
+          <a:ln/>
+        </p:spPr>
+        <p:txBody>
+          <a:bodyPr wrap="square" rtlCol="0" anchor="ctr"/>
+          <a:lstStyle/>
+          <a:p>
+            <a:pPr indent="0" marL="0">
+              <a:buNone/>
+            </a:pPr>
+            <a:r>
+              <a:rPr lang="en-US" sz="1100" b="1" dirty="0">
+                <a:solidFill>
+                  <a:srgbClr val="16202B"/>
+                </a:solidFill>
+                <a:latin typeface="Calibri" pitchFamily="34" charset="0"/>
+                <a:ea typeface="Calibri" pitchFamily="34" charset="-122"/>
+                <a:cs typeface="Calibri" pitchFamily="34" charset="-120"/>
+              </a:rPr>
+              <a:t>LexEdu's admin, managing LexEdu's own team</a:t>
+            </a:r>
+            <a:endParaRPr lang="en-US" sz="1100" dirty="0"/>
+          </a:p>
+        </p:txBody>
+      </p:sp>
+      <p:sp>
+        <p:nvSpPr>
+          <p:cNvPr id="27" name="Shape 20"/>
+          <p:cNvSpPr/>
+          <p:nvPr/>
+        </p:nvSpPr>
+        <p:spPr>
+          <a:xfrm>
+            <a:off x="6016752" y="4014978"/>
+            <a:ext cx="5431536" cy="1120712"/>
+          </a:xfrm>
+          <a:prstGeom prst="roundRect">
+            <a:avLst>
+              <a:gd name="adj" fmla="val 4895"/>
+            </a:avLst>
+          </a:prstGeom>
+          <a:solidFill>
+            <a:srgbClr val="FFFFFF"/>
+          </a:solidFill>
+          <a:ln w="12700">
+            <a:solidFill>
+              <a:srgbClr val="E3E8EF"/>
+            </a:solidFill>
+            <a:prstDash val="solid"/>
+          </a:ln>
+          <a:effectLst>
+            <a:outerShdw sx="100000" sy="100000" kx="0" ky="0" algn="bl" rotWithShape="0" blurRad="101600" dist="38100" dir="5400000">
+              <a:srgbClr val="12233F">
+                <a:alpha val="18000"/>
+              </a:srgbClr>
+            </a:outerShdw>
+          </a:effectLst>
+        </p:spPr>
+      </p:sp>
+      <p:pic>
+        <p:nvPicPr>
+          <p:cNvPr id="28" name="Image 5" descr="/tmp/claude-0/-home-user-Self-Project/0c48a94d-adf1-5cd3-ba0e-1e76ea2b114f/scratchpad/p8-03-northbridge-dpo-crop.png">    </p:cNvPr>
+          <p:cNvPicPr>
+            <a:picLocks noChangeAspect="1"/>
+          </p:cNvPicPr>
+          <p:nvPr/>
+        </p:nvPicPr>
+        <p:blipFill>
+          <a:blip r:embed="rId6"/>
+          <a:stretch>
+            <a:fillRect/>
+          </a:stretch>
+        </p:blipFill>
+        <p:spPr>
+          <a:xfrm>
+            <a:off x="6126480" y="4124706"/>
+            <a:ext cx="5212080" cy="901256"/>
+          </a:xfrm>
+          <a:prstGeom prst="rect">
+            <a:avLst/>
+          </a:prstGeom>
+        </p:spPr>
+      </p:pic>
+      <p:sp>
+        <p:nvSpPr>
+          <p:cNvPr id="29" name="Text 21"/>
+          <p:cNvSpPr/>
+          <p:nvPr/>
+        </p:nvSpPr>
+        <p:spPr>
+          <a:xfrm>
+            <a:off x="6126480" y="5153977"/>
+            <a:ext cx="5212080" cy="274320"/>
+          </a:xfrm>
+          <a:prstGeom prst="rect">
+            <a:avLst/>
+          </a:prstGeom>
+          <a:noFill/>
+          <a:ln/>
+        </p:spPr>
+        <p:txBody>
+          <a:bodyPr wrap="square" rtlCol="0" anchor="ctr"/>
+          <a:lstStyle/>
+          <a:p>
+            <a:pPr indent="0" marL="0">
+              <a:buNone/>
+            </a:pPr>
+            <a:r>
+              <a:rPr lang="en-US" sz="1100" b="1" dirty="0">
+                <a:solidFill>
+                  <a:srgbClr val="16202B"/>
+                </a:solidFill>
+                <a:latin typeface="Calibri" pitchFamily="34" charset="0"/>
+                <a:ea typeface="Calibri" pitchFamily="34" charset="-122"/>
+                <a:cs typeface="Calibri" pitchFamily="34" charset="-120"/>
+              </a:rPr>
+              <a:t>A different tenant, same login screen — only its own data</a:t>
+            </a:r>
+            <a:endParaRPr lang="en-US" sz="1100" dirty="0"/>
+          </a:p>
+        </p:txBody>
+      </p:sp>
+      <p:sp>
+        <p:nvSpPr>
+          <p:cNvPr id="30" name="Text 22"/>
+          <p:cNvSpPr/>
+          <p:nvPr/>
+        </p:nvSpPr>
+        <p:spPr>
+          <a:xfrm>
+            <a:off x="6126480" y="5446586"/>
+            <a:ext cx="5212080" cy="365760"/>
+          </a:xfrm>
+          <a:prstGeom prst="rect">
+            <a:avLst/>
+          </a:prstGeom>
+          <a:noFill/>
+          <a:ln/>
+        </p:spPr>
+        <p:txBody>
+          <a:bodyPr wrap="square" lIns="0" tIns="0" rIns="0" bIns="0" rtlCol="0" anchor="ctr"/>
+          <a:lstStyle/>
+          <a:p>
+            <a:pPr indent="0" marL="0">
+              <a:buNone/>
+            </a:pPr>
+            <a:r>
+              <a:rPr lang="en-US" sz="950" i="1" dirty="0">
+                <a:solidFill>
+                  <a:srgbClr val="5B6B7C"/>
+                </a:solidFill>
+                <a:latin typeface="Calibri" pitchFamily="34" charset="0"/>
+                <a:ea typeface="Calibri" pitchFamily="34" charset="-122"/>
+                <a:cs typeface="Calibri" pitchFamily="34" charset="-120"/>
+              </a:rPr>
+              <a:t>Fetching another tenant's record by id returns 404, not 403 — a session can't even confirm it exists.</a:t>
+            </a:r>
+            <a:endParaRPr lang="en-US" sz="950" dirty="0"/>
+          </a:p>
+        </p:txBody>
+      </p:sp>
+    </p:spTree>
+  </p:cSld>
+  <p:clrMapOvr>
+    <a:masterClrMapping/>
+  </p:clrMapOvr>
+</p:sld>
+</file>
+
+<file path=ppt/slides/slide11.xml><?xml version="1.0" encoding="utf-8"?>
+<p:sld xmlns:a="http://schemas.openxmlformats.org/drawingml/2006/main" xmlns:r="http://schemas.openxmlformats.org/officeDocument/2006/relationships" xmlns:p="http://schemas.openxmlformats.org/presentationml/2006/main">
+  <p:cSld name="Slide 11">
+    <p:bg>
+      <p:bgPr>
+        <a:solidFill>
           <a:srgbClr val="12233F"/>
         </a:solidFill>
       </p:bgPr>
@@ -2492,7 +3567,7 @@
                 <a:ea typeface="Calibri" pitchFamily="34" charset="-122"/>
                 <a:cs typeface="Calibri" pitchFamily="34" charset="-120"/>
               </a:rPr>
-              <a:t>10</a:t>
+              <a:t>11</a:t>
             </a:r>
             <a:endParaRPr lang="en-US" sz="1000" dirty="0"/>
           </a:p>
@@ -2628,7 +3703,7 @@
               <a:buNone/>
             </a:pPr>
             <a:r>
-              <a:rPr lang="en-US" sz="3800" b="1" dirty="0">
+              <a:rPr lang="en-US" sz="3400" b="1" dirty="0">
                 <a:solidFill>
                   <a:srgbClr val="F2A93B"/>
                 </a:solidFill>
@@ -2636,9 +3711,9 @@
                 <a:ea typeface="Cambria" pitchFamily="34" charset="-122"/>
                 <a:cs typeface="Cambria" pitchFamily="34" charset="-120"/>
               </a:rPr>
-              <a:t>79/79</a:t>
-            </a:r>
-            <a:endParaRPr lang="en-US" sz="3800" dirty="0"/>
+              <a:t>108/108</a:t>
+            </a:r>
+            <a:endParaRPr lang="en-US" sz="3400" dirty="0"/>
           </a:p>
         </p:txBody>
       </p:sp>
@@ -2772,7 +3847,7 @@
               <a:buNone/>
             </a:pPr>
             <a:r>
-              <a:rPr lang="en-US" sz="3800" b="1" dirty="0">
+              <a:rPr lang="en-US" sz="3400" b="1" dirty="0">
                 <a:solidFill>
                   <a:srgbClr val="F2A93B"/>
                 </a:solidFill>
@@ -2782,7 +3857,7 @@
               </a:rPr>
               <a:t>8</a:t>
             </a:r>
-            <a:endParaRPr lang="en-US" sz="3800" dirty="0"/>
+            <a:endParaRPr lang="en-US" sz="3400" dirty="0"/>
           </a:p>
         </p:txBody>
       </p:sp>
@@ -2916,7 +3991,7 @@
               <a:buNone/>
             </a:pPr>
             <a:r>
-              <a:rPr lang="en-US" sz="3800" b="1" dirty="0">
+              <a:rPr lang="en-US" sz="3400" b="1" dirty="0">
                 <a:solidFill>
                   <a:srgbClr val="F2A93B"/>
                 </a:solidFill>
@@ -2924,9 +3999,9 @@
                 <a:ea typeface="Cambria" pitchFamily="34" charset="-122"/>
                 <a:cs typeface="Cambria" pitchFamily="34" charset="-120"/>
               </a:rPr>
-              <a:t>8</a:t>
-            </a:r>
-            <a:endParaRPr lang="en-US" sz="3800" dirty="0"/>
+              <a:t>9</a:t>
+            </a:r>
+            <a:endParaRPr lang="en-US" sz="3400" dirty="0"/>
           </a:p>
         </p:txBody>
       </p:sp>
@@ -3002,7 +4077,7 @@
                 <a:ea typeface="Calibri" pitchFamily="34" charset="-122"/>
                 <a:cs typeface="Calibri" pitchFamily="34" charset="-120"/>
               </a:rPr>
-              <a:t>mock store → full automation</a:t>
+              <a:t>mock store → multi-tenant, RBAC-gated</a:t>
             </a:r>
             <a:endParaRPr lang="en-US" sz="950" dirty="0"/>
           </a:p>
@@ -3060,7 +4135,7 @@
               <a:buNone/>
             </a:pPr>
             <a:r>
-              <a:rPr lang="en-US" sz="3800" b="1" dirty="0">
+              <a:rPr lang="en-US" sz="3400" b="1" dirty="0">
                 <a:solidFill>
                   <a:srgbClr val="F2A93B"/>
                 </a:solidFill>
@@ -3068,9 +4143,9 @@
                 <a:ea typeface="Cambria" pitchFamily="34" charset="-122"/>
                 <a:cs typeface="Cambria" pitchFamily="34" charset="-120"/>
               </a:rPr>
-              <a:t>21</a:t>
-            </a:r>
-            <a:endParaRPr lang="en-US" sz="3800" dirty="0"/>
+              <a:t>26</a:t>
+            </a:r>
+            <a:endParaRPr lang="en-US" sz="3400" dirty="0"/>
           </a:p>
         </p:txBody>
       </p:sp>
@@ -3160,8 +4235,8 @@
         </p:nvSpPr>
         <p:spPr>
           <a:xfrm>
-            <a:off x="822960" y="4297680"/>
-            <a:ext cx="9692640" cy="640080"/>
+            <a:off x="822960" y="4251960"/>
+            <a:ext cx="9692640" cy="548640"/>
           </a:xfrm>
           <a:prstGeom prst="rect">
             <a:avLst/>
@@ -3177,7 +4252,7 @@
               <a:buNone/>
             </a:pPr>
             <a:r>
-              <a:rPr lang="en-US" sz="1350" dirty="0">
+              <a:rPr lang="en-US" sz="1300" dirty="0">
                 <a:solidFill>
                   <a:srgbClr val="CFE0E8"/>
                 </a:solidFill>
@@ -3187,7 +4262,7 @@
               </a:rPr>
               <a:t>Verified live, not just typechecked: real Gmail drafts and real Calendar events were created and confirmed through Claude Code, and the audit ledger was re-verified intact after every write — across multiple full backend restarts.</a:t>
             </a:r>
-            <a:endParaRPr lang="en-US" sz="1350" dirty="0"/>
+            <a:endParaRPr lang="en-US" sz="1300" dirty="0"/>
           </a:p>
         </p:txBody>
       </p:sp>
@@ -3199,8 +4274,8 @@
         </p:nvSpPr>
         <p:spPr>
           <a:xfrm>
-            <a:off x="822960" y="5074920"/>
-            <a:ext cx="9692640" cy="685800"/>
+            <a:off x="822960" y="4892040"/>
+            <a:ext cx="9692640" cy="960120"/>
           </a:xfrm>
           <a:prstGeom prst="rect">
             <a:avLst/>
@@ -3216,7 +4291,7 @@
               <a:buNone/>
             </a:pPr>
             <a:r>
-              <a:rPr lang="en-US" sz="1150" i="1" dirty="0">
+              <a:rPr lang="en-US" sz="1100" i="1" dirty="0">
                 <a:solidFill>
                   <a:srgbClr val="9FB4CB"/>
                 </a:solidFill>
@@ -3224,9 +4299,9 @@
                 <a:ea typeface="Calibri" pitchFamily="34" charset="-122"/>
                 <a:cs typeface="Calibri" pitchFamily="34" charset="-120"/>
               </a:rPr>
-              <a:t>Hardened after building, not just at build time: a live-questioning pass caught the lawful-basis gap on this slide's neighbor, and a seed-data date-drift bug that silently broke DSR overdue counts as real time passed — both fixed, tested, and now permanently correct by construction.</a:t>
-            </a:r>
-            <a:endParaRPr lang="en-US" sz="1150" dirty="0"/>
+              <a:t>Hardened after building, not just at build time: a live-questioning pass caught the lawful-basis gap on this slide's neighbor, a seed-data date-drift bug in DSR overdue counts, and — in the multi-tenant rollout — a repository check that confirmed a consent's principal and purpose shared a fiduciary but not that either was the caller's own. A second, controller-level check closed that gap.</a:t>
+            </a:r>
+            <a:endParaRPr lang="en-US" sz="1100" dirty="0"/>
           </a:p>
         </p:txBody>
       </p:sp>
@@ -3238,7 +4313,7 @@
         </p:nvSpPr>
         <p:spPr>
           <a:xfrm>
-            <a:off x="822960" y="6263640"/>
+            <a:off x="822960" y="6309360"/>
             <a:ext cx="7315200" cy="274320"/>
           </a:xfrm>
           <a:prstGeom prst="rect">
@@ -3264,1403 +4339,6 @@
                 <a:cs typeface="Calibri" pitchFamily="34" charset="-120"/>
               </a:rPr>
               <a:t>Test counts and coverage as of the latest commit on the project's pull request.</a:t>
-            </a:r>
-            <a:endParaRPr lang="en-US" sz="950" dirty="0"/>
-          </a:p>
-        </p:txBody>
-      </p:sp>
-    </p:spTree>
-  </p:cSld>
-  <p:clrMapOvr>
-    <a:masterClrMapping/>
-  </p:clrMapOvr>
-</p:sld>
-</file>
-
-<file path=ppt/slides/slide11.xml><?xml version="1.0" encoding="utf-8"?>
-<p:sld xmlns:a="http://schemas.openxmlformats.org/drawingml/2006/main" xmlns:r="http://schemas.openxmlformats.org/officeDocument/2006/relationships" xmlns:p="http://schemas.openxmlformats.org/presentationml/2006/main">
-  <p:cSld name="Slide 11">
-    <p:bg>
-      <p:bgPr>
-        <a:solidFill>
-          <a:srgbClr val="F7F9FB"/>
-        </a:solidFill>
-      </p:bgPr>
-    </p:bg>
-    <p:spTree>
-      <p:nvGrpSpPr>
-        <p:cNvPr id="1" name=""/>
-        <p:cNvGrpSpPr/>
-        <p:nvPr/>
-      </p:nvGrpSpPr>
-      <p:grpSpPr>
-        <a:xfrm>
-          <a:off x="0" y="0"/>
-          <a:ext cx="0" cy="0"/>
-          <a:chOff x="0" y="0"/>
-          <a:chExt cx="0" cy="0"/>
-        </a:xfrm>
-      </p:grpSpPr>
-      <p:sp>
-        <p:nvSpPr>
-          <p:cNvPr id="2" name="Text 0"/>
-          <p:cNvSpPr/>
-          <p:nvPr/>
-        </p:nvSpPr>
-        <p:spPr>
-          <a:xfrm>
-            <a:off x="11368735" y="6355080"/>
-            <a:ext cx="548640" cy="320040"/>
-          </a:xfrm>
-          <a:prstGeom prst="rect">
-            <a:avLst/>
-          </a:prstGeom>
-          <a:noFill/>
-          <a:ln/>
-        </p:spPr>
-        <p:txBody>
-          <a:bodyPr wrap="square" rtlCol="0" anchor="ctr"/>
-          <a:lstStyle/>
-          <a:p>
-            <a:pPr algn="r" indent="0" marL="0">
-              <a:buNone/>
-            </a:pPr>
-            <a:r>
-              <a:rPr lang="en-US" sz="1000" dirty="0">
-                <a:solidFill>
-                  <a:srgbClr val="9AA6B5"/>
-                </a:solidFill>
-                <a:latin typeface="Calibri" pitchFamily="34" charset="0"/>
-                <a:ea typeface="Calibri" pitchFamily="34" charset="-122"/>
-                <a:cs typeface="Calibri" pitchFamily="34" charset="-120"/>
-              </a:rPr>
-              <a:t>11</a:t>
-            </a:r>
-            <a:endParaRPr lang="en-US" sz="1000" dirty="0"/>
-          </a:p>
-        </p:txBody>
-      </p:sp>
-      <p:sp>
-        <p:nvSpPr>
-          <p:cNvPr id="3" name="Text 1"/>
-          <p:cNvSpPr/>
-          <p:nvPr/>
-        </p:nvSpPr>
-        <p:spPr>
-          <a:xfrm>
-            <a:off x="0" y="0"/>
-            <a:ext cx="5486400" cy="320040"/>
-          </a:xfrm>
-          <a:prstGeom prst="rect">
-            <a:avLst/>
-          </a:prstGeom>
-          <a:noFill/>
-          <a:ln/>
-        </p:spPr>
-        <p:txBody>
-          <a:bodyPr wrap="square" rtlCol="0" anchor="ctr"/>
-          <a:lstStyle/>
-          <a:p>
-            <a:pPr algn="l" indent="0" marL="0">
-              <a:buNone/>
-            </a:pPr>
-            <a:r>
-              <a:rPr lang="en-US" sz="1200" b="1" spc="200" kern="0" dirty="0">
-                <a:solidFill>
-                  <a:srgbClr val="1B8A94"/>
-                </a:solidFill>
-                <a:latin typeface="Calibri" pitchFamily="34" charset="0"/>
-                <a:ea typeface="Calibri" pitchFamily="34" charset="-122"/>
-                <a:cs typeface="Calibri" pitchFamily="34" charset="-120"/>
-              </a:rPr>
-              <a:t>HOW IT'S BUILT</a:t>
-            </a:r>
-            <a:endParaRPr lang="en-US" sz="1200" dirty="0"/>
-          </a:p>
-        </p:txBody>
-      </p:sp>
-      <p:sp>
-        <p:nvSpPr>
-          <p:cNvPr id="4" name="Text 2"/>
-          <p:cNvSpPr/>
-          <p:nvPr/>
-        </p:nvSpPr>
-        <p:spPr>
-          <a:xfrm>
-            <a:off x="777240" y="822960"/>
-            <a:ext cx="10058400" cy="685800"/>
-          </a:xfrm>
-          <a:prstGeom prst="rect">
-            <a:avLst/>
-          </a:prstGeom>
-          <a:noFill/>
-          <a:ln/>
-        </p:spPr>
-        <p:txBody>
-          <a:bodyPr wrap="square" rtlCol="0" anchor="ctr"/>
-          <a:lstStyle/>
-          <a:p>
-            <a:pPr indent="0" marL="0">
-              <a:buNone/>
-            </a:pPr>
-            <a:r>
-              <a:rPr lang="en-US" sz="3200" b="1" dirty="0">
-                <a:solidFill>
-                  <a:srgbClr val="16202B"/>
-                </a:solidFill>
-                <a:latin typeface="Cambria" pitchFamily="34" charset="0"/>
-                <a:ea typeface="Cambria" pitchFamily="34" charset="-122"/>
-                <a:cs typeface="Cambria" pitchFamily="34" charset="-120"/>
-              </a:rPr>
-              <a:t>A production-shaped stack, not a toy</a:t>
-            </a:r>
-            <a:endParaRPr lang="en-US" sz="3200" dirty="0"/>
-          </a:p>
-        </p:txBody>
-      </p:sp>
-      <p:sp>
-        <p:nvSpPr>
-          <p:cNvPr id="5" name="Shape 3"/>
-          <p:cNvSpPr/>
-          <p:nvPr/>
-        </p:nvSpPr>
-        <p:spPr>
-          <a:xfrm>
-            <a:off x="777240" y="1737360"/>
-            <a:ext cx="2450592" cy="2103120"/>
-          </a:xfrm>
-          <a:prstGeom prst="roundRect">
-            <a:avLst>
-              <a:gd name="adj" fmla="val 3913"/>
-            </a:avLst>
-          </a:prstGeom>
-          <a:solidFill>
-            <a:srgbClr val="FFFFFF"/>
-          </a:solidFill>
-          <a:ln w="12700">
-            <a:solidFill>
-              <a:srgbClr val="E3E8EF"/>
-            </a:solidFill>
-            <a:prstDash val="solid"/>
-          </a:ln>
-          <a:effectLst>
-            <a:outerShdw sx="100000" sy="100000" kx="0" ky="0" algn="bl" rotWithShape="0" blurRad="101600" dist="38100" dir="5400000">
-              <a:srgbClr val="12233F">
-                <a:alpha val="18000"/>
-              </a:srgbClr>
-            </a:outerShdw>
-          </a:effectLst>
-        </p:spPr>
-      </p:sp>
-      <p:sp>
-        <p:nvSpPr>
-          <p:cNvPr id="6" name="Shape 4"/>
-          <p:cNvSpPr/>
-          <p:nvPr/>
-        </p:nvSpPr>
-        <p:spPr>
-          <a:xfrm>
-            <a:off x="1751076" y="1993392"/>
-            <a:ext cx="502920" cy="502920"/>
-          </a:xfrm>
-          <a:prstGeom prst="ellipse">
-            <a:avLst/>
-          </a:prstGeom>
-          <a:solidFill>
-            <a:srgbClr val="1B8A94"/>
-          </a:solidFill>
-          <a:ln/>
-        </p:spPr>
-      </p:sp>
-      <p:pic>
-        <p:nvPicPr>
-          <p:cNvPr id="7" name="Image 0" descr="/tmp/claude-0/-home-user-Self-Project/0c48a94d-adf1-5cd3-ba0e-1e76ea2b114f/scratchpad/deck/icons/cube.png">    </p:cNvPr>
-          <p:cNvPicPr>
-            <a:picLocks noChangeAspect="1"/>
-          </p:cNvPicPr>
-          <p:nvPr/>
-        </p:nvPicPr>
-        <p:blipFill>
-          <a:blip r:embed="rId1"/>
-          <a:stretch>
-            <a:fillRect/>
-          </a:stretch>
-        </p:blipFill>
-        <p:spPr>
-          <a:xfrm>
-            <a:off x="1864233" y="2106549"/>
-            <a:ext cx="276606" cy="276606"/>
-          </a:xfrm>
-          <a:prstGeom prst="rect">
-            <a:avLst/>
-          </a:prstGeom>
-        </p:spPr>
-      </p:pic>
-      <p:sp>
-        <p:nvSpPr>
-          <p:cNvPr id="8" name="Text 5"/>
-          <p:cNvSpPr/>
-          <p:nvPr/>
-        </p:nvSpPr>
-        <p:spPr>
-          <a:xfrm>
-            <a:off x="914400" y="2633472"/>
-            <a:ext cx="2176272" cy="457200"/>
-          </a:xfrm>
-          <a:prstGeom prst="rect">
-            <a:avLst/>
-          </a:prstGeom>
-          <a:noFill/>
-          <a:ln/>
-        </p:spPr>
-        <p:txBody>
-          <a:bodyPr wrap="square" lIns="0" tIns="0" rIns="0" bIns="0" rtlCol="0" anchor="ctr"/>
-          <a:lstStyle/>
-          <a:p>
-            <a:pPr algn="ctr" indent="0" marL="0">
-              <a:buNone/>
-            </a:pPr>
-            <a:r>
-              <a:rPr lang="en-US" sz="1250" b="1" dirty="0">
-                <a:solidFill>
-                  <a:srgbClr val="16202B"/>
-                </a:solidFill>
-                <a:latin typeface="Cambria" pitchFamily="34" charset="0"/>
-                <a:ea typeface="Cambria" pitchFamily="34" charset="-122"/>
-                <a:cs typeface="Cambria" pitchFamily="34" charset="-120"/>
-              </a:rPr>
-              <a:t>TypeScript</a:t>
-            </a:r>
-            <a:endParaRPr lang="en-US" sz="1250" dirty="0"/>
-          </a:p>
-        </p:txBody>
-      </p:sp>
-      <p:sp>
-        <p:nvSpPr>
-          <p:cNvPr id="9" name="Text 6"/>
-          <p:cNvSpPr/>
-          <p:nvPr/>
-        </p:nvSpPr>
-        <p:spPr>
-          <a:xfrm>
-            <a:off x="941832" y="3072384"/>
-            <a:ext cx="2121408" cy="640080"/>
-          </a:xfrm>
-          <a:prstGeom prst="rect">
-            <a:avLst/>
-          </a:prstGeom>
-          <a:noFill/>
-          <a:ln/>
-        </p:spPr>
-        <p:txBody>
-          <a:bodyPr wrap="square" lIns="0" tIns="0" rIns="0" bIns="0" rtlCol="0" anchor="ctr"/>
-          <a:lstStyle/>
-          <a:p>
-            <a:pPr algn="ctr" indent="0" marL="0">
-              <a:buNone/>
-            </a:pPr>
-            <a:r>
-              <a:rPr lang="en-US" sz="950" dirty="0">
-                <a:solidFill>
-                  <a:srgbClr val="5B6B7C"/>
-                </a:solidFill>
-                <a:latin typeface="Calibri" pitchFamily="34" charset="0"/>
-                <a:ea typeface="Calibri" pitchFamily="34" charset="-122"/>
-                <a:cs typeface="Calibri" pitchFamily="34" charset="-120"/>
-              </a:rPr>
-              <a:t>End to end — domain model, servers, workers, UI.</a:t>
-            </a:r>
-            <a:endParaRPr lang="en-US" sz="950" dirty="0"/>
-          </a:p>
-        </p:txBody>
-      </p:sp>
-      <p:sp>
-        <p:nvSpPr>
-          <p:cNvPr id="10" name="Shape 7"/>
-          <p:cNvSpPr/>
-          <p:nvPr/>
-        </p:nvSpPr>
-        <p:spPr>
-          <a:xfrm>
-            <a:off x="3429000" y="1737360"/>
-            <a:ext cx="2450592" cy="2103120"/>
-          </a:xfrm>
-          <a:prstGeom prst="roundRect">
-            <a:avLst>
-              <a:gd name="adj" fmla="val 3913"/>
-            </a:avLst>
-          </a:prstGeom>
-          <a:solidFill>
-            <a:srgbClr val="FFFFFF"/>
-          </a:solidFill>
-          <a:ln w="12700">
-            <a:solidFill>
-              <a:srgbClr val="E3E8EF"/>
-            </a:solidFill>
-            <a:prstDash val="solid"/>
-          </a:ln>
-          <a:effectLst>
-            <a:outerShdw sx="100000" sy="100000" kx="0" ky="0" algn="bl" rotWithShape="0" blurRad="101600" dist="38100" dir="5400000">
-              <a:srgbClr val="12233F">
-                <a:alpha val="18000"/>
-              </a:srgbClr>
-            </a:outerShdw>
-          </a:effectLst>
-        </p:spPr>
-      </p:sp>
-      <p:sp>
-        <p:nvSpPr>
-          <p:cNvPr id="11" name="Shape 8"/>
-          <p:cNvSpPr/>
-          <p:nvPr/>
-        </p:nvSpPr>
-        <p:spPr>
-          <a:xfrm>
-            <a:off x="4402836" y="1993392"/>
-            <a:ext cx="502920" cy="502920"/>
-          </a:xfrm>
-          <a:prstGeom prst="ellipse">
-            <a:avLst/>
-          </a:prstGeom>
-          <a:solidFill>
-            <a:srgbClr val="1B8A94"/>
-          </a:solidFill>
-          <a:ln/>
-        </p:spPr>
-      </p:sp>
-      <p:pic>
-        <p:nvPicPr>
-          <p:cNvPr id="12" name="Image 1" descr="/tmp/claude-0/-home-user-Self-Project/0c48a94d-adf1-5cd3-ba0e-1e76ea2b114f/scratchpad/deck/icons/database.png">    </p:cNvPr>
-          <p:cNvPicPr>
-            <a:picLocks noChangeAspect="1"/>
-          </p:cNvPicPr>
-          <p:nvPr/>
-        </p:nvPicPr>
-        <p:blipFill>
-          <a:blip r:embed="rId2"/>
-          <a:stretch>
-            <a:fillRect/>
-          </a:stretch>
-        </p:blipFill>
-        <p:spPr>
-          <a:xfrm>
-            <a:off x="4515993" y="2106549"/>
-            <a:ext cx="276606" cy="276606"/>
-          </a:xfrm>
-          <a:prstGeom prst="rect">
-            <a:avLst/>
-          </a:prstGeom>
-        </p:spPr>
-      </p:pic>
-      <p:sp>
-        <p:nvSpPr>
-          <p:cNvPr id="13" name="Text 9"/>
-          <p:cNvSpPr/>
-          <p:nvPr/>
-        </p:nvSpPr>
-        <p:spPr>
-          <a:xfrm>
-            <a:off x="3566160" y="2633472"/>
-            <a:ext cx="2176272" cy="457200"/>
-          </a:xfrm>
-          <a:prstGeom prst="rect">
-            <a:avLst/>
-          </a:prstGeom>
-          <a:noFill/>
-          <a:ln/>
-        </p:spPr>
-        <p:txBody>
-          <a:bodyPr wrap="square" lIns="0" tIns="0" rIns="0" bIns="0" rtlCol="0" anchor="ctr"/>
-          <a:lstStyle/>
-          <a:p>
-            <a:pPr algn="ctr" indent="0" marL="0">
-              <a:buNone/>
-            </a:pPr>
-            <a:r>
-              <a:rPr lang="en-US" sz="1250" b="1" dirty="0">
-                <a:solidFill>
-                  <a:srgbClr val="16202B"/>
-                </a:solidFill>
-                <a:latin typeface="Cambria" pitchFamily="34" charset="0"/>
-                <a:ea typeface="Cambria" pitchFamily="34" charset="-122"/>
-                <a:cs typeface="Cambria" pitchFamily="34" charset="-120"/>
-              </a:rPr>
-              <a:t>PostgreSQL + Prisma</a:t>
-            </a:r>
-            <a:endParaRPr lang="en-US" sz="1250" dirty="0"/>
-          </a:p>
-        </p:txBody>
-      </p:sp>
-      <p:sp>
-        <p:nvSpPr>
-          <p:cNvPr id="14" name="Text 10"/>
-          <p:cNvSpPr/>
-          <p:nvPr/>
-        </p:nvSpPr>
-        <p:spPr>
-          <a:xfrm>
-            <a:off x="3593592" y="3072384"/>
-            <a:ext cx="2121408" cy="640080"/>
-          </a:xfrm>
-          <a:prstGeom prst="rect">
-            <a:avLst/>
-          </a:prstGeom>
-          <a:noFill/>
-          <a:ln/>
-        </p:spPr>
-        <p:txBody>
-          <a:bodyPr wrap="square" lIns="0" tIns="0" rIns="0" bIns="0" rtlCol="0" anchor="ctr"/>
-          <a:lstStyle/>
-          <a:p>
-            <a:pPr algn="ctr" indent="0" marL="0">
-              <a:buNone/>
-            </a:pPr>
-            <a:r>
-              <a:rPr lang="en-US" sz="950" dirty="0">
-                <a:solidFill>
-                  <a:srgbClr val="5B6B7C"/>
-                </a:solidFill>
-                <a:latin typeface="Calibri" pitchFamily="34" charset="0"/>
-                <a:ea typeface="Calibri" pitchFamily="34" charset="-122"/>
-                <a:cs typeface="Calibri" pitchFamily="34" charset="-120"/>
-              </a:rPr>
-              <a:t>Durable state, migrated schema, real transactions.</a:t>
-            </a:r>
-            <a:endParaRPr lang="en-US" sz="950" dirty="0"/>
-          </a:p>
-        </p:txBody>
-      </p:sp>
-      <p:sp>
-        <p:nvSpPr>
-          <p:cNvPr id="15" name="Shape 11"/>
-          <p:cNvSpPr/>
-          <p:nvPr/>
-        </p:nvSpPr>
-        <p:spPr>
-          <a:xfrm>
-            <a:off x="6080760" y="1737360"/>
-            <a:ext cx="2450592" cy="2103120"/>
-          </a:xfrm>
-          <a:prstGeom prst="roundRect">
-            <a:avLst>
-              <a:gd name="adj" fmla="val 3913"/>
-            </a:avLst>
-          </a:prstGeom>
-          <a:solidFill>
-            <a:srgbClr val="FFFFFF"/>
-          </a:solidFill>
-          <a:ln w="12700">
-            <a:solidFill>
-              <a:srgbClr val="E3E8EF"/>
-            </a:solidFill>
-            <a:prstDash val="solid"/>
-          </a:ln>
-          <a:effectLst>
-            <a:outerShdw sx="100000" sy="100000" kx="0" ky="0" algn="bl" rotWithShape="0" blurRad="101600" dist="38100" dir="5400000">
-              <a:srgbClr val="12233F">
-                <a:alpha val="18000"/>
-              </a:srgbClr>
-            </a:outerShdw>
-          </a:effectLst>
-        </p:spPr>
-      </p:sp>
-      <p:sp>
-        <p:nvSpPr>
-          <p:cNvPr id="16" name="Shape 12"/>
-          <p:cNvSpPr/>
-          <p:nvPr/>
-        </p:nvSpPr>
-        <p:spPr>
-          <a:xfrm>
-            <a:off x="7054596" y="1993392"/>
-            <a:ext cx="502920" cy="502920"/>
-          </a:xfrm>
-          <a:prstGeom prst="ellipse">
-            <a:avLst/>
-          </a:prstGeom>
-          <a:solidFill>
-            <a:srgbClr val="1B8A94"/>
-          </a:solidFill>
-          <a:ln/>
-        </p:spPr>
-      </p:sp>
-      <p:pic>
-        <p:nvPicPr>
-          <p:cNvPr id="17" name="Image 2" descr="/tmp/claude-0/-home-user-Self-Project/0c48a94d-adf1-5cd3-ba0e-1e76ea2b114f/scratchpad/deck/icons/gear.png">    </p:cNvPr>
-          <p:cNvPicPr>
-            <a:picLocks noChangeAspect="1"/>
-          </p:cNvPicPr>
-          <p:nvPr/>
-        </p:nvPicPr>
-        <p:blipFill>
-          <a:blip r:embed="rId3"/>
-          <a:stretch>
-            <a:fillRect/>
-          </a:stretch>
-        </p:blipFill>
-        <p:spPr>
-          <a:xfrm>
-            <a:off x="7167753" y="2106549"/>
-            <a:ext cx="276606" cy="276606"/>
-          </a:xfrm>
-          <a:prstGeom prst="rect">
-            <a:avLst/>
-          </a:prstGeom>
-        </p:spPr>
-      </p:pic>
-      <p:sp>
-        <p:nvSpPr>
-          <p:cNvPr id="18" name="Text 13"/>
-          <p:cNvSpPr/>
-          <p:nvPr/>
-        </p:nvSpPr>
-        <p:spPr>
-          <a:xfrm>
-            <a:off x="6217920" y="2633472"/>
-            <a:ext cx="2176272" cy="457200"/>
-          </a:xfrm>
-          <a:prstGeom prst="rect">
-            <a:avLst/>
-          </a:prstGeom>
-          <a:noFill/>
-          <a:ln/>
-        </p:spPr>
-        <p:txBody>
-          <a:bodyPr wrap="square" lIns="0" tIns="0" rIns="0" bIns="0" rtlCol="0" anchor="ctr"/>
-          <a:lstStyle/>
-          <a:p>
-            <a:pPr algn="ctr" indent="0" marL="0">
-              <a:buNone/>
-            </a:pPr>
-            <a:r>
-              <a:rPr lang="en-US" sz="1250" b="1" dirty="0">
-                <a:solidFill>
-                  <a:srgbClr val="16202B"/>
-                </a:solidFill>
-                <a:latin typeface="Cambria" pitchFamily="34" charset="0"/>
-                <a:ea typeface="Cambria" pitchFamily="34" charset="-122"/>
-                <a:cs typeface="Cambria" pitchFamily="34" charset="-120"/>
-              </a:rPr>
-              <a:t>NestJS</a:t>
-            </a:r>
-            <a:endParaRPr lang="en-US" sz="1250" dirty="0"/>
-          </a:p>
-        </p:txBody>
-      </p:sp>
-      <p:sp>
-        <p:nvSpPr>
-          <p:cNvPr id="19" name="Text 14"/>
-          <p:cNvSpPr/>
-          <p:nvPr/>
-        </p:nvSpPr>
-        <p:spPr>
-          <a:xfrm>
-            <a:off x="6245352" y="3072384"/>
-            <a:ext cx="2121408" cy="640080"/>
-          </a:xfrm>
-          <a:prstGeom prst="rect">
-            <a:avLst/>
-          </a:prstGeom>
-          <a:noFill/>
-          <a:ln/>
-        </p:spPr>
-        <p:txBody>
-          <a:bodyPr wrap="square" lIns="0" tIns="0" rIns="0" bIns="0" rtlCol="0" anchor="ctr"/>
-          <a:lstStyle/>
-          <a:p>
-            <a:pPr algn="ctr" indent="0" marL="0">
-              <a:buNone/>
-            </a:pPr>
-            <a:r>
-              <a:rPr lang="en-US" sz="950" dirty="0">
-                <a:solidFill>
-                  <a:srgbClr val="5B6B7C"/>
-                </a:solidFill>
-                <a:latin typeface="Calibri" pitchFamily="34" charset="0"/>
-                <a:ea typeface="Calibri" pitchFamily="34" charset="-122"/>
-                <a:cs typeface="Calibri" pitchFamily="34" charset="-120"/>
-              </a:rPr>
-              <a:t>Session-authenticated REST API for the dashboard.</a:t>
-            </a:r>
-            <a:endParaRPr lang="en-US" sz="950" dirty="0"/>
-          </a:p>
-        </p:txBody>
-      </p:sp>
-      <p:sp>
-        <p:nvSpPr>
-          <p:cNvPr id="20" name="Shape 15"/>
-          <p:cNvSpPr/>
-          <p:nvPr/>
-        </p:nvSpPr>
-        <p:spPr>
-          <a:xfrm>
-            <a:off x="8732520" y="1737360"/>
-            <a:ext cx="2450592" cy="2103120"/>
-          </a:xfrm>
-          <a:prstGeom prst="roundRect">
-            <a:avLst>
-              <a:gd name="adj" fmla="val 3913"/>
-            </a:avLst>
-          </a:prstGeom>
-          <a:solidFill>
-            <a:srgbClr val="FFFFFF"/>
-          </a:solidFill>
-          <a:ln w="12700">
-            <a:solidFill>
-              <a:srgbClr val="E3E8EF"/>
-            </a:solidFill>
-            <a:prstDash val="solid"/>
-          </a:ln>
-          <a:effectLst>
-            <a:outerShdw sx="100000" sy="100000" kx="0" ky="0" algn="bl" rotWithShape="0" blurRad="101600" dist="38100" dir="5400000">
-              <a:srgbClr val="12233F">
-                <a:alpha val="18000"/>
-              </a:srgbClr>
-            </a:outerShdw>
-          </a:effectLst>
-        </p:spPr>
-      </p:sp>
-      <p:sp>
-        <p:nvSpPr>
-          <p:cNvPr id="21" name="Shape 16"/>
-          <p:cNvSpPr/>
-          <p:nvPr/>
-        </p:nvSpPr>
-        <p:spPr>
-          <a:xfrm>
-            <a:off x="9706356" y="1993392"/>
-            <a:ext cx="502920" cy="502920"/>
-          </a:xfrm>
-          <a:prstGeom prst="ellipse">
-            <a:avLst/>
-          </a:prstGeom>
-          <a:solidFill>
-            <a:srgbClr val="1B8A94"/>
-          </a:solidFill>
-          <a:ln/>
-        </p:spPr>
-      </p:sp>
-      <p:pic>
-        <p:nvPicPr>
-          <p:cNvPr id="22" name="Image 3" descr="/tmp/claude-0/-home-user-Self-Project/0c48a94d-adf1-5cd3-ba0e-1e76ea2b114f/scratchpad/deck/icons/eye.png">    </p:cNvPr>
-          <p:cNvPicPr>
-            <a:picLocks noChangeAspect="1"/>
-          </p:cNvPicPr>
-          <p:nvPr/>
-        </p:nvPicPr>
-        <p:blipFill>
-          <a:blip r:embed="rId4"/>
-          <a:stretch>
-            <a:fillRect/>
-          </a:stretch>
-        </p:blipFill>
-        <p:spPr>
-          <a:xfrm>
-            <a:off x="9819513" y="2106549"/>
-            <a:ext cx="276606" cy="276606"/>
-          </a:xfrm>
-          <a:prstGeom prst="rect">
-            <a:avLst/>
-          </a:prstGeom>
-        </p:spPr>
-      </p:pic>
-      <p:sp>
-        <p:nvSpPr>
-          <p:cNvPr id="23" name="Text 17"/>
-          <p:cNvSpPr/>
-          <p:nvPr/>
-        </p:nvSpPr>
-        <p:spPr>
-          <a:xfrm>
-            <a:off x="8869680" y="2633472"/>
-            <a:ext cx="2176272" cy="457200"/>
-          </a:xfrm>
-          <a:prstGeom prst="rect">
-            <a:avLst/>
-          </a:prstGeom>
-          <a:noFill/>
-          <a:ln/>
-        </p:spPr>
-        <p:txBody>
-          <a:bodyPr wrap="square" lIns="0" tIns="0" rIns="0" bIns="0" rtlCol="0" anchor="ctr"/>
-          <a:lstStyle/>
-          <a:p>
-            <a:pPr algn="ctr" indent="0" marL="0">
-              <a:buNone/>
-            </a:pPr>
-            <a:r>
-              <a:rPr lang="en-US" sz="1250" b="1" dirty="0">
-                <a:solidFill>
-                  <a:srgbClr val="16202B"/>
-                </a:solidFill>
-                <a:latin typeface="Cambria" pitchFamily="34" charset="0"/>
-                <a:ea typeface="Cambria" pitchFamily="34" charset="-122"/>
-                <a:cs typeface="Cambria" pitchFamily="34" charset="-120"/>
-              </a:rPr>
-              <a:t>React 19 + Vite</a:t>
-            </a:r>
-            <a:endParaRPr lang="en-US" sz="1250" dirty="0"/>
-          </a:p>
-        </p:txBody>
-      </p:sp>
-      <p:sp>
-        <p:nvSpPr>
-          <p:cNvPr id="24" name="Text 18"/>
-          <p:cNvSpPr/>
-          <p:nvPr/>
-        </p:nvSpPr>
-        <p:spPr>
-          <a:xfrm>
-            <a:off x="8897112" y="3072384"/>
-            <a:ext cx="2121408" cy="640080"/>
-          </a:xfrm>
-          <a:prstGeom prst="rect">
-            <a:avLst/>
-          </a:prstGeom>
-          <a:noFill/>
-          <a:ln/>
-        </p:spPr>
-        <p:txBody>
-          <a:bodyPr wrap="square" lIns="0" tIns="0" rIns="0" bIns="0" rtlCol="0" anchor="ctr"/>
-          <a:lstStyle/>
-          <a:p>
-            <a:pPr algn="ctr" indent="0" marL="0">
-              <a:buNone/>
-            </a:pPr>
-            <a:r>
-              <a:rPr lang="en-US" sz="950" dirty="0">
-                <a:solidFill>
-                  <a:srgbClr val="5B6B7C"/>
-                </a:solidFill>
-                <a:latin typeface="Calibri" pitchFamily="34" charset="0"/>
-                <a:ea typeface="Calibri" pitchFamily="34" charset="-122"/>
-                <a:cs typeface="Calibri" pitchFamily="34" charset="-120"/>
-              </a:rPr>
-              <a:t>TanStack Query for live-polling dashboard views.</a:t>
-            </a:r>
-            <a:endParaRPr lang="en-US" sz="950" dirty="0"/>
-          </a:p>
-        </p:txBody>
-      </p:sp>
-      <p:sp>
-        <p:nvSpPr>
-          <p:cNvPr id="25" name="Shape 19"/>
-          <p:cNvSpPr/>
-          <p:nvPr/>
-        </p:nvSpPr>
-        <p:spPr>
-          <a:xfrm>
-            <a:off x="777240" y="4114800"/>
-            <a:ext cx="2450592" cy="2103120"/>
-          </a:xfrm>
-          <a:prstGeom prst="roundRect">
-            <a:avLst>
-              <a:gd name="adj" fmla="val 3913"/>
-            </a:avLst>
-          </a:prstGeom>
-          <a:solidFill>
-            <a:srgbClr val="FFFFFF"/>
-          </a:solidFill>
-          <a:ln w="12700">
-            <a:solidFill>
-              <a:srgbClr val="E3E8EF"/>
-            </a:solidFill>
-            <a:prstDash val="solid"/>
-          </a:ln>
-          <a:effectLst>
-            <a:outerShdw sx="100000" sy="100000" kx="0" ky="0" algn="bl" rotWithShape="0" blurRad="101600" dist="38100" dir="5400000">
-              <a:srgbClr val="12233F">
-                <a:alpha val="18000"/>
-              </a:srgbClr>
-            </a:outerShdw>
-          </a:effectLst>
-        </p:spPr>
-      </p:sp>
-      <p:sp>
-        <p:nvSpPr>
-          <p:cNvPr id="26" name="Shape 20"/>
-          <p:cNvSpPr/>
-          <p:nvPr/>
-        </p:nvSpPr>
-        <p:spPr>
-          <a:xfrm>
-            <a:off x="1751076" y="4370832"/>
-            <a:ext cx="502920" cy="502920"/>
-          </a:xfrm>
-          <a:prstGeom prst="ellipse">
-            <a:avLst/>
-          </a:prstGeom>
-          <a:solidFill>
-            <a:srgbClr val="1B8A94"/>
-          </a:solidFill>
-          <a:ln/>
-        </p:spPr>
-      </p:sp>
-      <p:pic>
-        <p:nvPicPr>
-          <p:cNvPr id="27" name="Image 4" descr="/tmp/claude-0/-home-user-Self-Project/0c48a94d-adf1-5cd3-ba0e-1e76ea2b114f/scratchpad/deck/icons/cycle.png">    </p:cNvPr>
-          <p:cNvPicPr>
-            <a:picLocks noChangeAspect="1"/>
-          </p:cNvPicPr>
-          <p:nvPr/>
-        </p:nvPicPr>
-        <p:blipFill>
-          <a:blip r:embed="rId5"/>
-          <a:stretch>
-            <a:fillRect/>
-          </a:stretch>
-        </p:blipFill>
-        <p:spPr>
-          <a:xfrm>
-            <a:off x="1864233" y="4483989"/>
-            <a:ext cx="276606" cy="276606"/>
-          </a:xfrm>
-          <a:prstGeom prst="rect">
-            <a:avLst/>
-          </a:prstGeom>
-        </p:spPr>
-      </p:pic>
-      <p:sp>
-        <p:nvSpPr>
-          <p:cNvPr id="28" name="Text 21"/>
-          <p:cNvSpPr/>
-          <p:nvPr/>
-        </p:nvSpPr>
-        <p:spPr>
-          <a:xfrm>
-            <a:off x="914400" y="5010912"/>
-            <a:ext cx="2176272" cy="457200"/>
-          </a:xfrm>
-          <a:prstGeom prst="rect">
-            <a:avLst/>
-          </a:prstGeom>
-          <a:noFill/>
-          <a:ln/>
-        </p:spPr>
-        <p:txBody>
-          <a:bodyPr wrap="square" lIns="0" tIns="0" rIns="0" bIns="0" rtlCol="0" anchor="ctr"/>
-          <a:lstStyle/>
-          <a:p>
-            <a:pPr algn="ctr" indent="0" marL="0">
-              <a:buNone/>
-            </a:pPr>
-            <a:r>
-              <a:rPr lang="en-US" sz="1250" b="1" dirty="0">
-                <a:solidFill>
-                  <a:srgbClr val="16202B"/>
-                </a:solidFill>
-                <a:latin typeface="Cambria" pitchFamily="34" charset="0"/>
-                <a:ea typeface="Cambria" pitchFamily="34" charset="-122"/>
-                <a:cs typeface="Cambria" pitchFamily="34" charset="-120"/>
-              </a:rPr>
-              <a:t>BullMQ + Redis</a:t>
-            </a:r>
-            <a:endParaRPr lang="en-US" sz="1250" dirty="0"/>
-          </a:p>
-        </p:txBody>
-      </p:sp>
-      <p:sp>
-        <p:nvSpPr>
-          <p:cNvPr id="29" name="Text 22"/>
-          <p:cNvSpPr/>
-          <p:nvPr/>
-        </p:nvSpPr>
-        <p:spPr>
-          <a:xfrm>
-            <a:off x="941832" y="5449824"/>
-            <a:ext cx="2121408" cy="640080"/>
-          </a:xfrm>
-          <a:prstGeom prst="rect">
-            <a:avLst/>
-          </a:prstGeom>
-          <a:noFill/>
-          <a:ln/>
-        </p:spPr>
-        <p:txBody>
-          <a:bodyPr wrap="square" lIns="0" tIns="0" rIns="0" bIns="0" rtlCol="0" anchor="ctr"/>
-          <a:lstStyle/>
-          <a:p>
-            <a:pPr algn="ctr" indent="0" marL="0">
-              <a:buNone/>
-            </a:pPr>
-            <a:r>
-              <a:rPr lang="en-US" sz="950" dirty="0">
-                <a:solidFill>
-                  <a:srgbClr val="5B6B7C"/>
-                </a:solidFill>
-                <a:latin typeface="Calibri" pitchFamily="34" charset="0"/>
-                <a:ea typeface="Calibri" pitchFamily="34" charset="-122"/>
-                <a:cs typeface="Calibri" pitchFamily="34" charset="-120"/>
-              </a:rPr>
-              <a:t>Reliable job scheduling for every automation.</a:t>
-            </a:r>
-            <a:endParaRPr lang="en-US" sz="950" dirty="0"/>
-          </a:p>
-        </p:txBody>
-      </p:sp>
-      <p:sp>
-        <p:nvSpPr>
-          <p:cNvPr id="30" name="Shape 23"/>
-          <p:cNvSpPr/>
-          <p:nvPr/>
-        </p:nvSpPr>
-        <p:spPr>
-          <a:xfrm>
-            <a:off x="3429000" y="4114800"/>
-            <a:ext cx="2450592" cy="2103120"/>
-          </a:xfrm>
-          <a:prstGeom prst="roundRect">
-            <a:avLst>
-              <a:gd name="adj" fmla="val 3913"/>
-            </a:avLst>
-          </a:prstGeom>
-          <a:solidFill>
-            <a:srgbClr val="FFFFFF"/>
-          </a:solidFill>
-          <a:ln w="12700">
-            <a:solidFill>
-              <a:srgbClr val="E3E8EF"/>
-            </a:solidFill>
-            <a:prstDash val="solid"/>
-          </a:ln>
-          <a:effectLst>
-            <a:outerShdw sx="100000" sy="100000" kx="0" ky="0" algn="bl" rotWithShape="0" blurRad="101600" dist="38100" dir="5400000">
-              <a:srgbClr val="12233F">
-                <a:alpha val="18000"/>
-              </a:srgbClr>
-            </a:outerShdw>
-          </a:effectLst>
-        </p:spPr>
-      </p:sp>
-      <p:sp>
-        <p:nvSpPr>
-          <p:cNvPr id="31" name="Shape 24"/>
-          <p:cNvSpPr/>
-          <p:nvPr/>
-        </p:nvSpPr>
-        <p:spPr>
-          <a:xfrm>
-            <a:off x="4402836" y="4370832"/>
-            <a:ext cx="502920" cy="502920"/>
-          </a:xfrm>
-          <a:prstGeom prst="ellipse">
-            <a:avLst/>
-          </a:prstGeom>
-          <a:solidFill>
-            <a:srgbClr val="1B8A94"/>
-          </a:solidFill>
-          <a:ln/>
-        </p:spPr>
-      </p:sp>
-      <p:pic>
-        <p:nvPicPr>
-          <p:cNvPr id="32" name="Image 5" descr="/tmp/claude-0/-home-user-Self-Project/0c48a94d-adf1-5cd3-ba0e-1e76ea2b114f/scratchpad/deck/icons/robot.png">    </p:cNvPr>
-          <p:cNvPicPr>
-            <a:picLocks noChangeAspect="1"/>
-          </p:cNvPicPr>
-          <p:nvPr/>
-        </p:nvPicPr>
-        <p:blipFill>
-          <a:blip r:embed="rId6"/>
-          <a:stretch>
-            <a:fillRect/>
-          </a:stretch>
-        </p:blipFill>
-        <p:spPr>
-          <a:xfrm>
-            <a:off x="4515993" y="4483989"/>
-            <a:ext cx="276606" cy="276606"/>
-          </a:xfrm>
-          <a:prstGeom prst="rect">
-            <a:avLst/>
-          </a:prstGeom>
-        </p:spPr>
-      </p:pic>
-      <p:sp>
-        <p:nvSpPr>
-          <p:cNvPr id="33" name="Text 25"/>
-          <p:cNvSpPr/>
-          <p:nvPr/>
-        </p:nvSpPr>
-        <p:spPr>
-          <a:xfrm>
-            <a:off x="3566160" y="5010912"/>
-            <a:ext cx="2176272" cy="457200"/>
-          </a:xfrm>
-          <a:prstGeom prst="rect">
-            <a:avLst/>
-          </a:prstGeom>
-          <a:noFill/>
-          <a:ln/>
-        </p:spPr>
-        <p:txBody>
-          <a:bodyPr wrap="square" lIns="0" tIns="0" rIns="0" bIns="0" rtlCol="0" anchor="ctr"/>
-          <a:lstStyle/>
-          <a:p>
-            <a:pPr algn="ctr" indent="0" marL="0">
-              <a:buNone/>
-            </a:pPr>
-            <a:r>
-              <a:rPr lang="en-US" sz="1250" b="1" dirty="0">
-                <a:solidFill>
-                  <a:srgbClr val="16202B"/>
-                </a:solidFill>
-                <a:latin typeface="Cambria" pitchFamily="34" charset="0"/>
-                <a:ea typeface="Cambria" pitchFamily="34" charset="-122"/>
-                <a:cs typeface="Cambria" pitchFamily="34" charset="-120"/>
-              </a:rPr>
-              <a:t>Model Context Protocol</a:t>
-            </a:r>
-            <a:endParaRPr lang="en-US" sz="1250" dirty="0"/>
-          </a:p>
-        </p:txBody>
-      </p:sp>
-      <p:sp>
-        <p:nvSpPr>
-          <p:cNvPr id="34" name="Text 26"/>
-          <p:cNvSpPr/>
-          <p:nvPr/>
-        </p:nvSpPr>
-        <p:spPr>
-          <a:xfrm>
-            <a:off x="3593592" y="5449824"/>
-            <a:ext cx="2121408" cy="640080"/>
-          </a:xfrm>
-          <a:prstGeom prst="rect">
-            <a:avLst/>
-          </a:prstGeom>
-          <a:noFill/>
-          <a:ln/>
-        </p:spPr>
-        <p:txBody>
-          <a:bodyPr wrap="square" lIns="0" tIns="0" rIns="0" bIns="0" rtlCol="0" anchor="ctr"/>
-          <a:lstStyle/>
-          <a:p>
-            <a:pPr algn="ctr" indent="0" marL="0">
-              <a:buNone/>
-            </a:pPr>
-            <a:r>
-              <a:rPr lang="en-US" sz="950" dirty="0">
-                <a:solidFill>
-                  <a:srgbClr val="5B6B7C"/>
-                </a:solidFill>
-                <a:latin typeface="Calibri" pitchFamily="34" charset="0"/>
-                <a:ea typeface="Calibri" pitchFamily="34" charset="-122"/>
-                <a:cs typeface="Calibri" pitchFamily="34" charset="-120"/>
-              </a:rPr>
-              <a:t>Structured tool access for AI agents.</a:t>
-            </a:r>
-            <a:endParaRPr lang="en-US" sz="950" dirty="0"/>
-          </a:p>
-        </p:txBody>
-      </p:sp>
-      <p:sp>
-        <p:nvSpPr>
-          <p:cNvPr id="35" name="Shape 27"/>
-          <p:cNvSpPr/>
-          <p:nvPr/>
-        </p:nvSpPr>
-        <p:spPr>
-          <a:xfrm>
-            <a:off x="6080760" y="4114800"/>
-            <a:ext cx="2450592" cy="2103120"/>
-          </a:xfrm>
-          <a:prstGeom prst="roundRect">
-            <a:avLst>
-              <a:gd name="adj" fmla="val 3913"/>
-            </a:avLst>
-          </a:prstGeom>
-          <a:solidFill>
-            <a:srgbClr val="FFFFFF"/>
-          </a:solidFill>
-          <a:ln w="12700">
-            <a:solidFill>
-              <a:srgbClr val="E3E8EF"/>
-            </a:solidFill>
-            <a:prstDash val="solid"/>
-          </a:ln>
-          <a:effectLst>
-            <a:outerShdw sx="100000" sy="100000" kx="0" ky="0" algn="bl" rotWithShape="0" blurRad="101600" dist="38100" dir="5400000">
-              <a:srgbClr val="12233F">
-                <a:alpha val="18000"/>
-              </a:srgbClr>
-            </a:outerShdw>
-          </a:effectLst>
-        </p:spPr>
-      </p:sp>
-      <p:sp>
-        <p:nvSpPr>
-          <p:cNvPr id="36" name="Shape 28"/>
-          <p:cNvSpPr/>
-          <p:nvPr/>
-        </p:nvSpPr>
-        <p:spPr>
-          <a:xfrm>
-            <a:off x="7054596" y="4370832"/>
-            <a:ext cx="502920" cy="502920"/>
-          </a:xfrm>
-          <a:prstGeom prst="ellipse">
-            <a:avLst/>
-          </a:prstGeom>
-          <a:solidFill>
-            <a:srgbClr val="1B8A94"/>
-          </a:solidFill>
-          <a:ln/>
-        </p:spPr>
-      </p:sp>
-      <p:pic>
-        <p:nvPicPr>
-          <p:cNvPr id="37" name="Image 6" descr="/tmp/claude-0/-home-user-Self-Project/0c48a94d-adf1-5cd3-ba0e-1e76ea2b114f/scratchpad/deck/icons/pdf.png">    </p:cNvPr>
-          <p:cNvPicPr>
-            <a:picLocks noChangeAspect="1"/>
-          </p:cNvPicPr>
-          <p:nvPr/>
-        </p:nvPicPr>
-        <p:blipFill>
-          <a:blip r:embed="rId7"/>
-          <a:stretch>
-            <a:fillRect/>
-          </a:stretch>
-        </p:blipFill>
-        <p:spPr>
-          <a:xfrm>
-            <a:off x="7167753" y="4483989"/>
-            <a:ext cx="276606" cy="276606"/>
-          </a:xfrm>
-          <a:prstGeom prst="rect">
-            <a:avLst/>
-          </a:prstGeom>
-        </p:spPr>
-      </p:pic>
-      <p:sp>
-        <p:nvSpPr>
-          <p:cNvPr id="38" name="Text 29"/>
-          <p:cNvSpPr/>
-          <p:nvPr/>
-        </p:nvSpPr>
-        <p:spPr>
-          <a:xfrm>
-            <a:off x="6217920" y="5010912"/>
-            <a:ext cx="2176272" cy="457200"/>
-          </a:xfrm>
-          <a:prstGeom prst="rect">
-            <a:avLst/>
-          </a:prstGeom>
-          <a:noFill/>
-          <a:ln/>
-        </p:spPr>
-        <p:txBody>
-          <a:bodyPr wrap="square" lIns="0" tIns="0" rIns="0" bIns="0" rtlCol="0" anchor="ctr"/>
-          <a:lstStyle/>
-          <a:p>
-            <a:pPr algn="ctr" indent="0" marL="0">
-              <a:buNone/>
-            </a:pPr>
-            <a:r>
-              <a:rPr lang="en-US" sz="1250" b="1" dirty="0">
-                <a:solidFill>
-                  <a:srgbClr val="16202B"/>
-                </a:solidFill>
-                <a:latin typeface="Cambria" pitchFamily="34" charset="0"/>
-                <a:ea typeface="Cambria" pitchFamily="34" charset="-122"/>
-                <a:cs typeface="Cambria" pitchFamily="34" charset="-120"/>
-              </a:rPr>
-              <a:t>pdfmake</a:t>
-            </a:r>
-            <a:endParaRPr lang="en-US" sz="1250" dirty="0"/>
-          </a:p>
-        </p:txBody>
-      </p:sp>
-      <p:sp>
-        <p:nvSpPr>
-          <p:cNvPr id="39" name="Text 30"/>
-          <p:cNvSpPr/>
-          <p:nvPr/>
-        </p:nvSpPr>
-        <p:spPr>
-          <a:xfrm>
-            <a:off x="6245352" y="5449824"/>
-            <a:ext cx="2121408" cy="640080"/>
-          </a:xfrm>
-          <a:prstGeom prst="rect">
-            <a:avLst/>
-          </a:prstGeom>
-          <a:noFill/>
-          <a:ln/>
-        </p:spPr>
-        <p:txBody>
-          <a:bodyPr wrap="square" lIns="0" tIns="0" rIns="0" bIns="0" rtlCol="0" anchor="ctr"/>
-          <a:lstStyle/>
-          <a:p>
-            <a:pPr algn="ctr" indent="0" marL="0">
-              <a:buNone/>
-            </a:pPr>
-            <a:r>
-              <a:rPr lang="en-US" sz="950" dirty="0">
-                <a:solidFill>
-                  <a:srgbClr val="5B6B7C"/>
-                </a:solidFill>
-                <a:latin typeface="Calibri" pitchFamily="34" charset="0"/>
-                <a:ea typeface="Calibri" pitchFamily="34" charset="-122"/>
-                <a:cs typeface="Calibri" pitchFamily="34" charset="-120"/>
-              </a:rPr>
-              <a:t>Offline PDF generation for compliance reports.</a:t>
-            </a:r>
-            <a:endParaRPr lang="en-US" sz="950" dirty="0"/>
-          </a:p>
-        </p:txBody>
-      </p:sp>
-      <p:sp>
-        <p:nvSpPr>
-          <p:cNvPr id="40" name="Shape 31"/>
-          <p:cNvSpPr/>
-          <p:nvPr/>
-        </p:nvSpPr>
-        <p:spPr>
-          <a:xfrm>
-            <a:off x="8732520" y="4114800"/>
-            <a:ext cx="2450592" cy="2103120"/>
-          </a:xfrm>
-          <a:prstGeom prst="roundRect">
-            <a:avLst>
-              <a:gd name="adj" fmla="val 3913"/>
-            </a:avLst>
-          </a:prstGeom>
-          <a:solidFill>
-            <a:srgbClr val="FFFFFF"/>
-          </a:solidFill>
-          <a:ln w="12700">
-            <a:solidFill>
-              <a:srgbClr val="E3E8EF"/>
-            </a:solidFill>
-            <a:prstDash val="solid"/>
-          </a:ln>
-          <a:effectLst>
-            <a:outerShdw sx="100000" sy="100000" kx="0" ky="0" algn="bl" rotWithShape="0" blurRad="101600" dist="38100" dir="5400000">
-              <a:srgbClr val="12233F">
-                <a:alpha val="18000"/>
-              </a:srgbClr>
-            </a:outerShdw>
-          </a:effectLst>
-        </p:spPr>
-      </p:sp>
-      <p:sp>
-        <p:nvSpPr>
-          <p:cNvPr id="41" name="Shape 32"/>
-          <p:cNvSpPr/>
-          <p:nvPr/>
-        </p:nvSpPr>
-        <p:spPr>
-          <a:xfrm>
-            <a:off x="9706356" y="4370832"/>
-            <a:ext cx="502920" cy="502920"/>
-          </a:xfrm>
-          <a:prstGeom prst="ellipse">
-            <a:avLst/>
-          </a:prstGeom>
-          <a:solidFill>
-            <a:srgbClr val="1B8A94"/>
-          </a:solidFill>
-          <a:ln/>
-        </p:spPr>
-      </p:sp>
-      <p:pic>
-        <p:nvPicPr>
-          <p:cNvPr id="42" name="Image 7" descr="/tmp/claude-0/-home-user-Self-Project/0c48a94d-adf1-5cd3-ba0e-1e76ea2b114f/scratchpad/deck/icons/lock.png">    </p:cNvPr>
-          <p:cNvPicPr>
-            <a:picLocks noChangeAspect="1"/>
-          </p:cNvPicPr>
-          <p:nvPr/>
-        </p:nvPicPr>
-        <p:blipFill>
-          <a:blip r:embed="rId8"/>
-          <a:stretch>
-            <a:fillRect/>
-          </a:stretch>
-        </p:blipFill>
-        <p:spPr>
-          <a:xfrm>
-            <a:off x="9819513" y="4483989"/>
-            <a:ext cx="276606" cy="276606"/>
-          </a:xfrm>
-          <a:prstGeom prst="rect">
-            <a:avLst/>
-          </a:prstGeom>
-        </p:spPr>
-      </p:pic>
-      <p:sp>
-        <p:nvSpPr>
-          <p:cNvPr id="43" name="Text 33"/>
-          <p:cNvSpPr/>
-          <p:nvPr/>
-        </p:nvSpPr>
-        <p:spPr>
-          <a:xfrm>
-            <a:off x="8869680" y="5010912"/>
-            <a:ext cx="2176272" cy="457200"/>
-          </a:xfrm>
-          <a:prstGeom prst="rect">
-            <a:avLst/>
-          </a:prstGeom>
-          <a:noFill/>
-          <a:ln/>
-        </p:spPr>
-        <p:txBody>
-          <a:bodyPr wrap="square" lIns="0" tIns="0" rIns="0" bIns="0" rtlCol="0" anchor="ctr"/>
-          <a:lstStyle/>
-          <a:p>
-            <a:pPr algn="ctr" indent="0" marL="0">
-              <a:buNone/>
-            </a:pPr>
-            <a:r>
-              <a:rPr lang="en-US" sz="1250" b="1" dirty="0">
-                <a:solidFill>
-                  <a:srgbClr val="16202B"/>
-                </a:solidFill>
-                <a:latin typeface="Cambria" pitchFamily="34" charset="0"/>
-                <a:ea typeface="Cambria" pitchFamily="34" charset="-122"/>
-                <a:cs typeface="Cambria" pitchFamily="34" charset="-120"/>
-              </a:rPr>
-              <a:t>bcrypt + sessions</a:t>
-            </a:r>
-            <a:endParaRPr lang="en-US" sz="1250" dirty="0"/>
-          </a:p>
-        </p:txBody>
-      </p:sp>
-      <p:sp>
-        <p:nvSpPr>
-          <p:cNvPr id="44" name="Text 34"/>
-          <p:cNvSpPr/>
-          <p:nvPr/>
-        </p:nvSpPr>
-        <p:spPr>
-          <a:xfrm>
-            <a:off x="8897112" y="5449824"/>
-            <a:ext cx="2121408" cy="640080"/>
-          </a:xfrm>
-          <a:prstGeom prst="rect">
-            <a:avLst/>
-          </a:prstGeom>
-          <a:noFill/>
-          <a:ln/>
-        </p:spPr>
-        <p:txBody>
-          <a:bodyPr wrap="square" lIns="0" tIns="0" rIns="0" bIns="0" rtlCol="0" anchor="ctr"/>
-          <a:lstStyle/>
-          <a:p>
-            <a:pPr algn="ctr" indent="0" marL="0">
-              <a:buNone/>
-            </a:pPr>
-            <a:r>
-              <a:rPr lang="en-US" sz="950" dirty="0">
-                <a:solidFill>
-                  <a:srgbClr val="5B6B7C"/>
-                </a:solidFill>
-                <a:latin typeface="Calibri" pitchFamily="34" charset="0"/>
-                <a:ea typeface="Calibri" pitchFamily="34" charset="-122"/>
-                <a:cs typeface="Calibri" pitchFamily="34" charset="-120"/>
-              </a:rPr>
-              <a:t>Cookie-based auth guarding every dashboard route.</a:t>
             </a:r>
             <a:endParaRPr lang="en-US" sz="950" dirty="0"/>
           </a:p>
@@ -4770,7 +4448,7 @@
                 <a:ea typeface="Calibri" pitchFamily="34" charset="-122"/>
                 <a:cs typeface="Calibri" pitchFamily="34" charset="-120"/>
               </a:rPr>
-              <a:t>STATUS</a:t>
+              <a:t>HOW IT'S BUILT</a:t>
             </a:r>
             <a:endParaRPr lang="en-US" sz="1200" dirty="0"/>
           </a:p>
@@ -4785,7 +4463,7 @@
         <p:spPr>
           <a:xfrm>
             <a:off x="777240" y="822960"/>
-            <a:ext cx="10424160" cy="685800"/>
+            <a:ext cx="10058400" cy="685800"/>
           </a:xfrm>
           <a:prstGeom prst="rect">
             <a:avLst/>
@@ -4801,7 +4479,7 @@
               <a:buNone/>
             </a:pPr>
             <a:r>
-              <a:rPr lang="en-US" sz="2800" b="1" dirty="0">
+              <a:rPr lang="en-US" sz="3200" b="1" dirty="0">
                 <a:solidFill>
                   <a:srgbClr val="16202B"/>
                 </a:solidFill>
@@ -4809,9 +4487,9 @@
                 <a:ea typeface="Cambria" pitchFamily="34" charset="-122"/>
                 <a:cs typeface="Cambria" pitchFamily="34" charset="-120"/>
               </a:rPr>
-              <a:t>Eight phases shipped, each verified before the next began</a:t>
-            </a:r>
-            <a:endParaRPr lang="en-US" sz="2800" dirty="0"/>
+              <a:t>A production-shaped stack, not a toy</a:t>
+            </a:r>
+            <a:endParaRPr lang="en-US" sz="3200" dirty="0"/>
           </a:p>
         </p:txBody>
       </p:sp>
@@ -4823,19 +4501,30 @@
         </p:nvSpPr>
         <p:spPr>
           <a:xfrm>
-            <a:off x="1152144" y="2788920"/>
-            <a:ext cx="9765792" cy="0"/>
-          </a:xfrm>
-          <a:prstGeom prst="line">
-            <a:avLst/>
-          </a:prstGeom>
-          <a:noFill/>
-          <a:ln w="25400">
+            <a:off x="777240" y="1737360"/>
+            <a:ext cx="2450592" cy="2103120"/>
+          </a:xfrm>
+          <a:prstGeom prst="roundRect">
+            <a:avLst>
+              <a:gd name="adj" fmla="val 3913"/>
+            </a:avLst>
+          </a:prstGeom>
+          <a:solidFill>
+            <a:srgbClr val="FFFFFF"/>
+          </a:solidFill>
+          <a:ln w="12700">
             <a:solidFill>
               <a:srgbClr val="E3E8EF"/>
             </a:solidFill>
             <a:prstDash val="solid"/>
           </a:ln>
+          <a:effectLst>
+            <a:outerShdw sx="100000" sy="100000" kx="0" ky="0" algn="bl" rotWithShape="0" blurRad="101600" dist="38100" dir="5400000">
+              <a:srgbClr val="12233F">
+                <a:alpha val="18000"/>
+              </a:srgbClr>
+            </a:outerShdw>
+          </a:effectLst>
         </p:spPr>
       </p:sp>
       <p:sp>
@@ -4846,21 +4535,21 @@
         </p:nvSpPr>
         <p:spPr>
           <a:xfrm>
-            <a:off x="1005840" y="2642616"/>
-            <a:ext cx="292608" cy="292608"/>
+            <a:off x="1751076" y="1993392"/>
+            <a:ext cx="502920" cy="502920"/>
           </a:xfrm>
           <a:prstGeom prst="ellipse">
             <a:avLst/>
           </a:prstGeom>
           <a:solidFill>
-            <a:srgbClr val="1FAE7A"/>
+            <a:srgbClr val="1B8A94"/>
           </a:solidFill>
           <a:ln/>
         </p:spPr>
       </p:sp>
       <p:pic>
         <p:nvPicPr>
-          <p:cNvPr id="7" name="Image 0" descr="/tmp/claude-0/-home-user-Self-Project/0c48a94d-adf1-5cd3-ba0e-1e76ea2b114f/scratchpad/deck/icons/check.png">    </p:cNvPr>
+          <p:cNvPr id="7" name="Image 0" descr="/tmp/claude-0/-home-user-Self-Project/0c48a94d-adf1-5cd3-ba0e-1e76ea2b114f/scratchpad/deck/icons/cube.png">    </p:cNvPr>
           <p:cNvPicPr>
             <a:picLocks noChangeAspect="1"/>
           </p:cNvPicPr>
@@ -4874,8 +4563,8 @@
         </p:blipFill>
         <p:spPr>
           <a:xfrm>
-            <a:off x="1064362" y="2701138"/>
-            <a:ext cx="175565" cy="175565"/>
+            <a:off x="1864233" y="2106549"/>
+            <a:ext cx="276606" cy="276606"/>
           </a:xfrm>
           <a:prstGeom prst="rect">
             <a:avLst/>
@@ -4890,81 +4579,133 @@
         </p:nvSpPr>
         <p:spPr>
           <a:xfrm>
-            <a:off x="384048" y="2011680"/>
-            <a:ext cx="1536192" cy="548640"/>
-          </a:xfrm>
-          <a:prstGeom prst="rect">
-            <a:avLst/>
-          </a:prstGeom>
-          <a:noFill/>
-          <a:ln/>
-        </p:spPr>
-        <p:txBody>
-          <a:bodyPr wrap="square" lIns="0" tIns="0" rIns="0" bIns="0" rtlCol="0" anchor="b"/>
+            <a:off x="914400" y="2633472"/>
+            <a:ext cx="2176272" cy="457200"/>
+          </a:xfrm>
+          <a:prstGeom prst="rect">
+            <a:avLst/>
+          </a:prstGeom>
+          <a:noFill/>
+          <a:ln/>
+        </p:spPr>
+        <p:txBody>
+          <a:bodyPr wrap="square" lIns="0" tIns="0" rIns="0" bIns="0" rtlCol="0" anchor="ctr"/>
           <a:lstStyle/>
           <a:p>
             <a:pPr algn="ctr" indent="0" marL="0">
-              <a:lnSpc>
-                <a:spcPts val="1200"/>
-              </a:lnSpc>
-              <a:buNone/>
-            </a:pPr>
-            <a:r>
-              <a:rPr lang="en-US" sz="900" b="1" dirty="0">
-                <a:solidFill>
-                  <a:srgbClr val="1B8A94"/>
+              <a:buNone/>
+            </a:pPr>
+            <a:r>
+              <a:rPr lang="en-US" sz="1250" b="1" dirty="0">
+                <a:solidFill>
+                  <a:srgbClr val="16202B"/>
+                </a:solidFill>
+                <a:latin typeface="Cambria" pitchFamily="34" charset="0"/>
+                <a:ea typeface="Cambria" pitchFamily="34" charset="-122"/>
+                <a:cs typeface="Cambria" pitchFamily="34" charset="-120"/>
+              </a:rPr>
+              <a:t>TypeScript</a:t>
+            </a:r>
+            <a:endParaRPr lang="en-US" sz="1250" dirty="0"/>
+          </a:p>
+        </p:txBody>
+      </p:sp>
+      <p:sp>
+        <p:nvSpPr>
+          <p:cNvPr id="9" name="Text 6"/>
+          <p:cNvSpPr/>
+          <p:nvPr/>
+        </p:nvSpPr>
+        <p:spPr>
+          <a:xfrm>
+            <a:off x="941832" y="3072384"/>
+            <a:ext cx="2121408" cy="640080"/>
+          </a:xfrm>
+          <a:prstGeom prst="rect">
+            <a:avLst/>
+          </a:prstGeom>
+          <a:noFill/>
+          <a:ln/>
+        </p:spPr>
+        <p:txBody>
+          <a:bodyPr wrap="square" lIns="0" tIns="0" rIns="0" bIns="0" rtlCol="0" anchor="ctr"/>
+          <a:lstStyle/>
+          <a:p>
+            <a:pPr algn="ctr" indent="0" marL="0">
+              <a:buNone/>
+            </a:pPr>
+            <a:r>
+              <a:rPr lang="en-US" sz="950" dirty="0">
+                <a:solidFill>
+                  <a:srgbClr val="5B6B7C"/>
                 </a:solidFill>
                 <a:latin typeface="Calibri" pitchFamily="34" charset="0"/>
                 <a:ea typeface="Calibri" pitchFamily="34" charset="-122"/>
                 <a:cs typeface="Calibri" pitchFamily="34" charset="-120"/>
               </a:rPr>
-              <a:t>P0
-</a:t>
-            </a:r>
-            <a:pPr algn="ctr" indent="0" marL="0">
-              <a:lnSpc>
-                <a:spcPts val="1200"/>
-              </a:lnSpc>
-              <a:buNone/>
-            </a:pPr>
-            <a:r>
-              <a:rPr lang="en-US" sz="950" dirty="0">
-                <a:solidFill>
-                  <a:srgbClr val="16202B"/>
-                </a:solidFill>
-                <a:latin typeface="Calibri" pitchFamily="34" charset="0"/>
-                <a:ea typeface="Calibri" pitchFamily="34" charset="-122"/>
-                <a:cs typeface="Calibri" pitchFamily="34" charset="-120"/>
-              </a:rPr>
-              <a:t>Mock data layer</a:t>
-            </a:r>
-            <a:endParaRPr lang="en-US" sz="900" dirty="0"/>
-          </a:p>
-        </p:txBody>
-      </p:sp>
-      <p:sp>
-        <p:nvSpPr>
-          <p:cNvPr id="9" name="Shape 6"/>
-          <p:cNvSpPr/>
-          <p:nvPr/>
-        </p:nvSpPr>
-        <p:spPr>
-          <a:xfrm>
-            <a:off x="2400953" y="2642616"/>
-            <a:ext cx="292608" cy="292608"/>
+              <a:t>End to end — domain model, servers, workers, UI.</a:t>
+            </a:r>
+            <a:endParaRPr lang="en-US" sz="950" dirty="0"/>
+          </a:p>
+        </p:txBody>
+      </p:sp>
+      <p:sp>
+        <p:nvSpPr>
+          <p:cNvPr id="10" name="Shape 7"/>
+          <p:cNvSpPr/>
+          <p:nvPr/>
+        </p:nvSpPr>
+        <p:spPr>
+          <a:xfrm>
+            <a:off x="3429000" y="1737360"/>
+            <a:ext cx="2450592" cy="2103120"/>
+          </a:xfrm>
+          <a:prstGeom prst="roundRect">
+            <a:avLst>
+              <a:gd name="adj" fmla="val 3913"/>
+            </a:avLst>
+          </a:prstGeom>
+          <a:solidFill>
+            <a:srgbClr val="FFFFFF"/>
+          </a:solidFill>
+          <a:ln w="12700">
+            <a:solidFill>
+              <a:srgbClr val="E3E8EF"/>
+            </a:solidFill>
+            <a:prstDash val="solid"/>
+          </a:ln>
+          <a:effectLst>
+            <a:outerShdw sx="100000" sy="100000" kx="0" ky="0" algn="bl" rotWithShape="0" blurRad="101600" dist="38100" dir="5400000">
+              <a:srgbClr val="12233F">
+                <a:alpha val="18000"/>
+              </a:srgbClr>
+            </a:outerShdw>
+          </a:effectLst>
+        </p:spPr>
+      </p:sp>
+      <p:sp>
+        <p:nvSpPr>
+          <p:cNvPr id="11" name="Shape 8"/>
+          <p:cNvSpPr/>
+          <p:nvPr/>
+        </p:nvSpPr>
+        <p:spPr>
+          <a:xfrm>
+            <a:off x="4402836" y="1993392"/>
+            <a:ext cx="502920" cy="502920"/>
           </a:xfrm>
           <a:prstGeom prst="ellipse">
             <a:avLst/>
           </a:prstGeom>
           <a:solidFill>
-            <a:srgbClr val="1FAE7A"/>
+            <a:srgbClr val="1B8A94"/>
           </a:solidFill>
           <a:ln/>
         </p:spPr>
       </p:sp>
       <p:pic>
         <p:nvPicPr>
-          <p:cNvPr id="10" name="Image 1" descr="/tmp/claude-0/-home-user-Self-Project/0c48a94d-adf1-5cd3-ba0e-1e76ea2b114f/scratchpad/deck/icons/check.png">    </p:cNvPr>
+          <p:cNvPr id="12" name="Image 1" descr="/tmp/claude-0/-home-user-Self-Project/0c48a94d-adf1-5cd3-ba0e-1e76ea2b114f/scratchpad/deck/icons/database.png">    </p:cNvPr>
           <p:cNvPicPr>
             <a:picLocks noChangeAspect="1"/>
           </p:cNvPicPr>
@@ -4978,8 +4719,8 @@
         </p:blipFill>
         <p:spPr>
           <a:xfrm>
-            <a:off x="2459475" y="2701138"/>
-            <a:ext cx="175565" cy="175565"/>
+            <a:off x="4515993" y="2106549"/>
+            <a:ext cx="276606" cy="276606"/>
           </a:xfrm>
           <a:prstGeom prst="rect">
             <a:avLst/>
@@ -4988,87 +4729,139 @@
       </p:pic>
       <p:sp>
         <p:nvSpPr>
-          <p:cNvPr id="11" name="Text 7"/>
-          <p:cNvSpPr/>
-          <p:nvPr/>
-        </p:nvSpPr>
-        <p:spPr>
-          <a:xfrm>
-            <a:off x="1779161" y="3209544"/>
-            <a:ext cx="1536192" cy="548640"/>
-          </a:xfrm>
-          <a:prstGeom prst="rect">
-            <a:avLst/>
-          </a:prstGeom>
-          <a:noFill/>
-          <a:ln/>
-        </p:spPr>
-        <p:txBody>
-          <a:bodyPr wrap="square" lIns="0" tIns="0" rIns="0" bIns="0" rtlCol="0" anchor="t"/>
+          <p:cNvPr id="13" name="Text 9"/>
+          <p:cNvSpPr/>
+          <p:nvPr/>
+        </p:nvSpPr>
+        <p:spPr>
+          <a:xfrm>
+            <a:off x="3566160" y="2633472"/>
+            <a:ext cx="2176272" cy="457200"/>
+          </a:xfrm>
+          <a:prstGeom prst="rect">
+            <a:avLst/>
+          </a:prstGeom>
+          <a:noFill/>
+          <a:ln/>
+        </p:spPr>
+        <p:txBody>
+          <a:bodyPr wrap="square" lIns="0" tIns="0" rIns="0" bIns="0" rtlCol="0" anchor="ctr"/>
           <a:lstStyle/>
           <a:p>
             <a:pPr algn="ctr" indent="0" marL="0">
-              <a:lnSpc>
-                <a:spcPts val="1200"/>
-              </a:lnSpc>
-              <a:buNone/>
-            </a:pPr>
-            <a:r>
-              <a:rPr lang="en-US" sz="900" b="1" dirty="0">
-                <a:solidFill>
-                  <a:srgbClr val="1B8A94"/>
+              <a:buNone/>
+            </a:pPr>
+            <a:r>
+              <a:rPr lang="en-US" sz="1250" b="1" dirty="0">
+                <a:solidFill>
+                  <a:srgbClr val="16202B"/>
+                </a:solidFill>
+                <a:latin typeface="Cambria" pitchFamily="34" charset="0"/>
+                <a:ea typeface="Cambria" pitchFamily="34" charset="-122"/>
+                <a:cs typeface="Cambria" pitchFamily="34" charset="-120"/>
+              </a:rPr>
+              <a:t>PostgreSQL + Prisma</a:t>
+            </a:r>
+            <a:endParaRPr lang="en-US" sz="1250" dirty="0"/>
+          </a:p>
+        </p:txBody>
+      </p:sp>
+      <p:sp>
+        <p:nvSpPr>
+          <p:cNvPr id="14" name="Text 10"/>
+          <p:cNvSpPr/>
+          <p:nvPr/>
+        </p:nvSpPr>
+        <p:spPr>
+          <a:xfrm>
+            <a:off x="3593592" y="3072384"/>
+            <a:ext cx="2121408" cy="640080"/>
+          </a:xfrm>
+          <a:prstGeom prst="rect">
+            <a:avLst/>
+          </a:prstGeom>
+          <a:noFill/>
+          <a:ln/>
+        </p:spPr>
+        <p:txBody>
+          <a:bodyPr wrap="square" lIns="0" tIns="0" rIns="0" bIns="0" rtlCol="0" anchor="ctr"/>
+          <a:lstStyle/>
+          <a:p>
+            <a:pPr algn="ctr" indent="0" marL="0">
+              <a:buNone/>
+            </a:pPr>
+            <a:r>
+              <a:rPr lang="en-US" sz="950" dirty="0">
+                <a:solidFill>
+                  <a:srgbClr val="5B6B7C"/>
                 </a:solidFill>
                 <a:latin typeface="Calibri" pitchFamily="34" charset="0"/>
                 <a:ea typeface="Calibri" pitchFamily="34" charset="-122"/>
                 <a:cs typeface="Calibri" pitchFamily="34" charset="-120"/>
               </a:rPr>
-              <a:t>P1
-</a:t>
-            </a:r>
-            <a:pPr algn="ctr" indent="0" marL="0">
-              <a:lnSpc>
-                <a:spcPts val="1200"/>
-              </a:lnSpc>
-              <a:buNone/>
-            </a:pPr>
-            <a:r>
-              <a:rPr lang="en-US" sz="950" dirty="0">
-                <a:solidFill>
-                  <a:srgbClr val="16202B"/>
-                </a:solidFill>
-                <a:latin typeface="Calibri" pitchFamily="34" charset="0"/>
-                <a:ea typeface="Calibri" pitchFamily="34" charset="-122"/>
-                <a:cs typeface="Calibri" pitchFamily="34" charset="-120"/>
-              </a:rPr>
-              <a:t>MCP server</a:t>
-            </a:r>
-            <a:endParaRPr lang="en-US" sz="900" dirty="0"/>
-          </a:p>
-        </p:txBody>
-      </p:sp>
-      <p:sp>
-        <p:nvSpPr>
-          <p:cNvPr id="12" name="Shape 8"/>
-          <p:cNvSpPr/>
-          <p:nvPr/>
-        </p:nvSpPr>
-        <p:spPr>
-          <a:xfrm>
-            <a:off x="3796066" y="2642616"/>
-            <a:ext cx="292608" cy="292608"/>
+              <a:t>Durable state, migrated schema, real transactions.</a:t>
+            </a:r>
+            <a:endParaRPr lang="en-US" sz="950" dirty="0"/>
+          </a:p>
+        </p:txBody>
+      </p:sp>
+      <p:sp>
+        <p:nvSpPr>
+          <p:cNvPr id="15" name="Shape 11"/>
+          <p:cNvSpPr/>
+          <p:nvPr/>
+        </p:nvSpPr>
+        <p:spPr>
+          <a:xfrm>
+            <a:off x="6080760" y="1737360"/>
+            <a:ext cx="2450592" cy="2103120"/>
+          </a:xfrm>
+          <a:prstGeom prst="roundRect">
+            <a:avLst>
+              <a:gd name="adj" fmla="val 3913"/>
+            </a:avLst>
+          </a:prstGeom>
+          <a:solidFill>
+            <a:srgbClr val="FFFFFF"/>
+          </a:solidFill>
+          <a:ln w="12700">
+            <a:solidFill>
+              <a:srgbClr val="E3E8EF"/>
+            </a:solidFill>
+            <a:prstDash val="solid"/>
+          </a:ln>
+          <a:effectLst>
+            <a:outerShdw sx="100000" sy="100000" kx="0" ky="0" algn="bl" rotWithShape="0" blurRad="101600" dist="38100" dir="5400000">
+              <a:srgbClr val="12233F">
+                <a:alpha val="18000"/>
+              </a:srgbClr>
+            </a:outerShdw>
+          </a:effectLst>
+        </p:spPr>
+      </p:sp>
+      <p:sp>
+        <p:nvSpPr>
+          <p:cNvPr id="16" name="Shape 12"/>
+          <p:cNvSpPr/>
+          <p:nvPr/>
+        </p:nvSpPr>
+        <p:spPr>
+          <a:xfrm>
+            <a:off x="7054596" y="1993392"/>
+            <a:ext cx="502920" cy="502920"/>
           </a:xfrm>
           <a:prstGeom prst="ellipse">
             <a:avLst/>
           </a:prstGeom>
           <a:solidFill>
-            <a:srgbClr val="1FAE7A"/>
+            <a:srgbClr val="1B8A94"/>
           </a:solidFill>
           <a:ln/>
         </p:spPr>
       </p:sp>
       <p:pic>
         <p:nvPicPr>
-          <p:cNvPr id="13" name="Image 2" descr="/tmp/claude-0/-home-user-Self-Project/0c48a94d-adf1-5cd3-ba0e-1e76ea2b114f/scratchpad/deck/icons/check.png">    </p:cNvPr>
+          <p:cNvPr id="17" name="Image 2" descr="/tmp/claude-0/-home-user-Self-Project/0c48a94d-adf1-5cd3-ba0e-1e76ea2b114f/scratchpad/deck/icons/gear.png">    </p:cNvPr>
           <p:cNvPicPr>
             <a:picLocks noChangeAspect="1"/>
           </p:cNvPicPr>
@@ -5082,8 +4875,8 @@
         </p:blipFill>
         <p:spPr>
           <a:xfrm>
-            <a:off x="3854588" y="2701138"/>
-            <a:ext cx="175565" cy="175565"/>
+            <a:off x="7167753" y="2106549"/>
+            <a:ext cx="276606" cy="276606"/>
           </a:xfrm>
           <a:prstGeom prst="rect">
             <a:avLst/>
@@ -5092,87 +4885,139 @@
       </p:pic>
       <p:sp>
         <p:nvSpPr>
-          <p:cNvPr id="14" name="Text 9"/>
-          <p:cNvSpPr/>
-          <p:nvPr/>
-        </p:nvSpPr>
-        <p:spPr>
-          <a:xfrm>
-            <a:off x="3174274" y="2011680"/>
-            <a:ext cx="1536192" cy="548640"/>
-          </a:xfrm>
-          <a:prstGeom prst="rect">
-            <a:avLst/>
-          </a:prstGeom>
-          <a:noFill/>
-          <a:ln/>
-        </p:spPr>
-        <p:txBody>
-          <a:bodyPr wrap="square" lIns="0" tIns="0" rIns="0" bIns="0" rtlCol="0" anchor="b"/>
+          <p:cNvPr id="18" name="Text 13"/>
+          <p:cNvSpPr/>
+          <p:nvPr/>
+        </p:nvSpPr>
+        <p:spPr>
+          <a:xfrm>
+            <a:off x="6217920" y="2633472"/>
+            <a:ext cx="2176272" cy="457200"/>
+          </a:xfrm>
+          <a:prstGeom prst="rect">
+            <a:avLst/>
+          </a:prstGeom>
+          <a:noFill/>
+          <a:ln/>
+        </p:spPr>
+        <p:txBody>
+          <a:bodyPr wrap="square" lIns="0" tIns="0" rIns="0" bIns="0" rtlCol="0" anchor="ctr"/>
           <a:lstStyle/>
           <a:p>
             <a:pPr algn="ctr" indent="0" marL="0">
-              <a:lnSpc>
-                <a:spcPts val="1200"/>
-              </a:lnSpc>
-              <a:buNone/>
-            </a:pPr>
-            <a:r>
-              <a:rPr lang="en-US" sz="900" b="1" dirty="0">
-                <a:solidFill>
-                  <a:srgbClr val="1B8A94"/>
+              <a:buNone/>
+            </a:pPr>
+            <a:r>
+              <a:rPr lang="en-US" sz="1250" b="1" dirty="0">
+                <a:solidFill>
+                  <a:srgbClr val="16202B"/>
+                </a:solidFill>
+                <a:latin typeface="Cambria" pitchFamily="34" charset="0"/>
+                <a:ea typeface="Cambria" pitchFamily="34" charset="-122"/>
+                <a:cs typeface="Cambria" pitchFamily="34" charset="-120"/>
+              </a:rPr>
+              <a:t>NestJS</a:t>
+            </a:r>
+            <a:endParaRPr lang="en-US" sz="1250" dirty="0"/>
+          </a:p>
+        </p:txBody>
+      </p:sp>
+      <p:sp>
+        <p:nvSpPr>
+          <p:cNvPr id="19" name="Text 14"/>
+          <p:cNvSpPr/>
+          <p:nvPr/>
+        </p:nvSpPr>
+        <p:spPr>
+          <a:xfrm>
+            <a:off x="6245352" y="3072384"/>
+            <a:ext cx="2121408" cy="640080"/>
+          </a:xfrm>
+          <a:prstGeom prst="rect">
+            <a:avLst/>
+          </a:prstGeom>
+          <a:noFill/>
+          <a:ln/>
+        </p:spPr>
+        <p:txBody>
+          <a:bodyPr wrap="square" lIns="0" tIns="0" rIns="0" bIns="0" rtlCol="0" anchor="ctr"/>
+          <a:lstStyle/>
+          <a:p>
+            <a:pPr algn="ctr" indent="0" marL="0">
+              <a:buNone/>
+            </a:pPr>
+            <a:r>
+              <a:rPr lang="en-US" sz="950" dirty="0">
+                <a:solidFill>
+                  <a:srgbClr val="5B6B7C"/>
                 </a:solidFill>
                 <a:latin typeface="Calibri" pitchFamily="34" charset="0"/>
                 <a:ea typeface="Calibri" pitchFamily="34" charset="-122"/>
                 <a:cs typeface="Calibri" pitchFamily="34" charset="-120"/>
               </a:rPr>
-              <a:t>P2
-</a:t>
-            </a:r>
-            <a:pPr algn="ctr" indent="0" marL="0">
-              <a:lnSpc>
-                <a:spcPts val="1200"/>
-              </a:lnSpc>
-              <a:buNone/>
-            </a:pPr>
-            <a:r>
-              <a:rPr lang="en-US" sz="950" dirty="0">
-                <a:solidFill>
-                  <a:srgbClr val="16202B"/>
-                </a:solidFill>
-                <a:latin typeface="Calibri" pitchFamily="34" charset="0"/>
-                <a:ea typeface="Calibri" pitchFamily="34" charset="-122"/>
-                <a:cs typeface="Calibri" pitchFamily="34" charset="-120"/>
-              </a:rPr>
-              <a:t>Job workers</a:t>
-            </a:r>
-            <a:endParaRPr lang="en-US" sz="900" dirty="0"/>
-          </a:p>
-        </p:txBody>
-      </p:sp>
-      <p:sp>
-        <p:nvSpPr>
-          <p:cNvPr id="15" name="Shape 10"/>
-          <p:cNvSpPr/>
-          <p:nvPr/>
-        </p:nvSpPr>
-        <p:spPr>
-          <a:xfrm>
-            <a:off x="5191179" y="2642616"/>
-            <a:ext cx="292608" cy="292608"/>
+              <a:t>Session-authenticated REST API for the dashboard.</a:t>
+            </a:r>
+            <a:endParaRPr lang="en-US" sz="950" dirty="0"/>
+          </a:p>
+        </p:txBody>
+      </p:sp>
+      <p:sp>
+        <p:nvSpPr>
+          <p:cNvPr id="20" name="Shape 15"/>
+          <p:cNvSpPr/>
+          <p:nvPr/>
+        </p:nvSpPr>
+        <p:spPr>
+          <a:xfrm>
+            <a:off x="8732520" y="1737360"/>
+            <a:ext cx="2450592" cy="2103120"/>
+          </a:xfrm>
+          <a:prstGeom prst="roundRect">
+            <a:avLst>
+              <a:gd name="adj" fmla="val 3913"/>
+            </a:avLst>
+          </a:prstGeom>
+          <a:solidFill>
+            <a:srgbClr val="FFFFFF"/>
+          </a:solidFill>
+          <a:ln w="12700">
+            <a:solidFill>
+              <a:srgbClr val="E3E8EF"/>
+            </a:solidFill>
+            <a:prstDash val="solid"/>
+          </a:ln>
+          <a:effectLst>
+            <a:outerShdw sx="100000" sy="100000" kx="0" ky="0" algn="bl" rotWithShape="0" blurRad="101600" dist="38100" dir="5400000">
+              <a:srgbClr val="12233F">
+                <a:alpha val="18000"/>
+              </a:srgbClr>
+            </a:outerShdw>
+          </a:effectLst>
+        </p:spPr>
+      </p:sp>
+      <p:sp>
+        <p:nvSpPr>
+          <p:cNvPr id="21" name="Shape 16"/>
+          <p:cNvSpPr/>
+          <p:nvPr/>
+        </p:nvSpPr>
+        <p:spPr>
+          <a:xfrm>
+            <a:off x="9706356" y="1993392"/>
+            <a:ext cx="502920" cy="502920"/>
           </a:xfrm>
           <a:prstGeom prst="ellipse">
             <a:avLst/>
           </a:prstGeom>
           <a:solidFill>
-            <a:srgbClr val="1FAE7A"/>
+            <a:srgbClr val="1B8A94"/>
           </a:solidFill>
           <a:ln/>
         </p:spPr>
       </p:sp>
       <p:pic>
         <p:nvPicPr>
-          <p:cNvPr id="16" name="Image 3" descr="/tmp/claude-0/-home-user-Self-Project/0c48a94d-adf1-5cd3-ba0e-1e76ea2b114f/scratchpad/deck/icons/check.png">    </p:cNvPr>
+          <p:cNvPr id="22" name="Image 3" descr="/tmp/claude-0/-home-user-Self-Project/0c48a94d-adf1-5cd3-ba0e-1e76ea2b114f/scratchpad/deck/icons/eye.png">    </p:cNvPr>
           <p:cNvPicPr>
             <a:picLocks noChangeAspect="1"/>
           </p:cNvPicPr>
@@ -5186,8 +5031,8 @@
         </p:blipFill>
         <p:spPr>
           <a:xfrm>
-            <a:off x="5249701" y="2701138"/>
-            <a:ext cx="175565" cy="175565"/>
+            <a:off x="9819513" y="2106549"/>
+            <a:ext cx="276606" cy="276606"/>
           </a:xfrm>
           <a:prstGeom prst="rect">
             <a:avLst/>
@@ -5196,87 +5041,139 @@
       </p:pic>
       <p:sp>
         <p:nvSpPr>
-          <p:cNvPr id="17" name="Text 11"/>
-          <p:cNvSpPr/>
-          <p:nvPr/>
-        </p:nvSpPr>
-        <p:spPr>
-          <a:xfrm>
-            <a:off x="4569387" y="3209544"/>
-            <a:ext cx="1536192" cy="548640"/>
-          </a:xfrm>
-          <a:prstGeom prst="rect">
-            <a:avLst/>
-          </a:prstGeom>
-          <a:noFill/>
-          <a:ln/>
-        </p:spPr>
-        <p:txBody>
-          <a:bodyPr wrap="square" lIns="0" tIns="0" rIns="0" bIns="0" rtlCol="0" anchor="t"/>
+          <p:cNvPr id="23" name="Text 17"/>
+          <p:cNvSpPr/>
+          <p:nvPr/>
+        </p:nvSpPr>
+        <p:spPr>
+          <a:xfrm>
+            <a:off x="8869680" y="2633472"/>
+            <a:ext cx="2176272" cy="457200"/>
+          </a:xfrm>
+          <a:prstGeom prst="rect">
+            <a:avLst/>
+          </a:prstGeom>
+          <a:noFill/>
+          <a:ln/>
+        </p:spPr>
+        <p:txBody>
+          <a:bodyPr wrap="square" lIns="0" tIns="0" rIns="0" bIns="0" rtlCol="0" anchor="ctr"/>
           <a:lstStyle/>
           <a:p>
             <a:pPr algn="ctr" indent="0" marL="0">
-              <a:lnSpc>
-                <a:spcPts val="1200"/>
-              </a:lnSpc>
-              <a:buNone/>
-            </a:pPr>
-            <a:r>
-              <a:rPr lang="en-US" sz="900" b="1" dirty="0">
-                <a:solidFill>
-                  <a:srgbClr val="1B8A94"/>
+              <a:buNone/>
+            </a:pPr>
+            <a:r>
+              <a:rPr lang="en-US" sz="1250" b="1" dirty="0">
+                <a:solidFill>
+                  <a:srgbClr val="16202B"/>
+                </a:solidFill>
+                <a:latin typeface="Cambria" pitchFamily="34" charset="0"/>
+                <a:ea typeface="Cambria" pitchFamily="34" charset="-122"/>
+                <a:cs typeface="Cambria" pitchFamily="34" charset="-120"/>
+              </a:rPr>
+              <a:t>React 19 + Vite</a:t>
+            </a:r>
+            <a:endParaRPr lang="en-US" sz="1250" dirty="0"/>
+          </a:p>
+        </p:txBody>
+      </p:sp>
+      <p:sp>
+        <p:nvSpPr>
+          <p:cNvPr id="24" name="Text 18"/>
+          <p:cNvSpPr/>
+          <p:nvPr/>
+        </p:nvSpPr>
+        <p:spPr>
+          <a:xfrm>
+            <a:off x="8897112" y="3072384"/>
+            <a:ext cx="2121408" cy="640080"/>
+          </a:xfrm>
+          <a:prstGeom prst="rect">
+            <a:avLst/>
+          </a:prstGeom>
+          <a:noFill/>
+          <a:ln/>
+        </p:spPr>
+        <p:txBody>
+          <a:bodyPr wrap="square" lIns="0" tIns="0" rIns="0" bIns="0" rtlCol="0" anchor="ctr"/>
+          <a:lstStyle/>
+          <a:p>
+            <a:pPr algn="ctr" indent="0" marL="0">
+              <a:buNone/>
+            </a:pPr>
+            <a:r>
+              <a:rPr lang="en-US" sz="950" dirty="0">
+                <a:solidFill>
+                  <a:srgbClr val="5B6B7C"/>
                 </a:solidFill>
                 <a:latin typeface="Calibri" pitchFamily="34" charset="0"/>
                 <a:ea typeface="Calibri" pitchFamily="34" charset="-122"/>
                 <a:cs typeface="Calibri" pitchFamily="34" charset="-120"/>
               </a:rPr>
-              <a:t>P3
-</a:t>
-            </a:r>
-            <a:pPr algn="ctr" indent="0" marL="0">
-              <a:lnSpc>
-                <a:spcPts val="1200"/>
-              </a:lnSpc>
-              <a:buNone/>
-            </a:pPr>
-            <a:r>
-              <a:rPr lang="en-US" sz="950" dirty="0">
-                <a:solidFill>
-                  <a:srgbClr val="16202B"/>
-                </a:solidFill>
-                <a:latin typeface="Calibri" pitchFamily="34" charset="0"/>
-                <a:ea typeface="Calibri" pitchFamily="34" charset="-122"/>
-                <a:cs typeface="Calibri" pitchFamily="34" charset="-120"/>
-              </a:rPr>
-              <a:t>Real notifications</a:t>
-            </a:r>
-            <a:endParaRPr lang="en-US" sz="900" dirty="0"/>
-          </a:p>
-        </p:txBody>
-      </p:sp>
-      <p:sp>
-        <p:nvSpPr>
-          <p:cNvPr id="18" name="Shape 12"/>
-          <p:cNvSpPr/>
-          <p:nvPr/>
-        </p:nvSpPr>
-        <p:spPr>
-          <a:xfrm>
-            <a:off x="6586293" y="2642616"/>
-            <a:ext cx="292608" cy="292608"/>
+              <a:t>TanStack Query for live-polling dashboard views.</a:t>
+            </a:r>
+            <a:endParaRPr lang="en-US" sz="950" dirty="0"/>
+          </a:p>
+        </p:txBody>
+      </p:sp>
+      <p:sp>
+        <p:nvSpPr>
+          <p:cNvPr id="25" name="Shape 19"/>
+          <p:cNvSpPr/>
+          <p:nvPr/>
+        </p:nvSpPr>
+        <p:spPr>
+          <a:xfrm>
+            <a:off x="777240" y="4114800"/>
+            <a:ext cx="2450592" cy="2103120"/>
+          </a:xfrm>
+          <a:prstGeom prst="roundRect">
+            <a:avLst>
+              <a:gd name="adj" fmla="val 3913"/>
+            </a:avLst>
+          </a:prstGeom>
+          <a:solidFill>
+            <a:srgbClr val="FFFFFF"/>
+          </a:solidFill>
+          <a:ln w="12700">
+            <a:solidFill>
+              <a:srgbClr val="E3E8EF"/>
+            </a:solidFill>
+            <a:prstDash val="solid"/>
+          </a:ln>
+          <a:effectLst>
+            <a:outerShdw sx="100000" sy="100000" kx="0" ky="0" algn="bl" rotWithShape="0" blurRad="101600" dist="38100" dir="5400000">
+              <a:srgbClr val="12233F">
+                <a:alpha val="18000"/>
+              </a:srgbClr>
+            </a:outerShdw>
+          </a:effectLst>
+        </p:spPr>
+      </p:sp>
+      <p:sp>
+        <p:nvSpPr>
+          <p:cNvPr id="26" name="Shape 20"/>
+          <p:cNvSpPr/>
+          <p:nvPr/>
+        </p:nvSpPr>
+        <p:spPr>
+          <a:xfrm>
+            <a:off x="1751076" y="4370832"/>
+            <a:ext cx="502920" cy="502920"/>
           </a:xfrm>
           <a:prstGeom prst="ellipse">
             <a:avLst/>
           </a:prstGeom>
           <a:solidFill>
-            <a:srgbClr val="1FAE7A"/>
+            <a:srgbClr val="1B8A94"/>
           </a:solidFill>
           <a:ln/>
         </p:spPr>
       </p:sp>
       <p:pic>
         <p:nvPicPr>
-          <p:cNvPr id="19" name="Image 4" descr="/tmp/claude-0/-home-user-Self-Project/0c48a94d-adf1-5cd3-ba0e-1e76ea2b114f/scratchpad/deck/icons/check.png">    </p:cNvPr>
+          <p:cNvPr id="27" name="Image 4" descr="/tmp/claude-0/-home-user-Self-Project/0c48a94d-adf1-5cd3-ba0e-1e76ea2b114f/scratchpad/deck/icons/cycle.png">    </p:cNvPr>
           <p:cNvPicPr>
             <a:picLocks noChangeAspect="1"/>
           </p:cNvPicPr>
@@ -5290,8 +5187,8 @@
         </p:blipFill>
         <p:spPr>
           <a:xfrm>
-            <a:off x="6644814" y="2701138"/>
-            <a:ext cx="175565" cy="175565"/>
+            <a:off x="1864233" y="4483989"/>
+            <a:ext cx="276606" cy="276606"/>
           </a:xfrm>
           <a:prstGeom prst="rect">
             <a:avLst/>
@@ -5300,87 +5197,139 @@
       </p:pic>
       <p:sp>
         <p:nvSpPr>
-          <p:cNvPr id="20" name="Text 13"/>
-          <p:cNvSpPr/>
-          <p:nvPr/>
-        </p:nvSpPr>
-        <p:spPr>
-          <a:xfrm>
-            <a:off x="5964501" y="2011680"/>
-            <a:ext cx="1536192" cy="548640"/>
-          </a:xfrm>
-          <a:prstGeom prst="rect">
-            <a:avLst/>
-          </a:prstGeom>
-          <a:noFill/>
-          <a:ln/>
-        </p:spPr>
-        <p:txBody>
-          <a:bodyPr wrap="square" lIns="0" tIns="0" rIns="0" bIns="0" rtlCol="0" anchor="b"/>
+          <p:cNvPr id="28" name="Text 21"/>
+          <p:cNvSpPr/>
+          <p:nvPr/>
+        </p:nvSpPr>
+        <p:spPr>
+          <a:xfrm>
+            <a:off x="914400" y="5010912"/>
+            <a:ext cx="2176272" cy="457200"/>
+          </a:xfrm>
+          <a:prstGeom prst="rect">
+            <a:avLst/>
+          </a:prstGeom>
+          <a:noFill/>
+          <a:ln/>
+        </p:spPr>
+        <p:txBody>
+          <a:bodyPr wrap="square" lIns="0" tIns="0" rIns="0" bIns="0" rtlCol="0" anchor="ctr"/>
           <a:lstStyle/>
           <a:p>
             <a:pPr algn="ctr" indent="0" marL="0">
-              <a:lnSpc>
-                <a:spcPts val="1200"/>
-              </a:lnSpc>
-              <a:buNone/>
-            </a:pPr>
-            <a:r>
-              <a:rPr lang="en-US" sz="900" b="1" dirty="0">
-                <a:solidFill>
-                  <a:srgbClr val="1B8A94"/>
+              <a:buNone/>
+            </a:pPr>
+            <a:r>
+              <a:rPr lang="en-US" sz="1250" b="1" dirty="0">
+                <a:solidFill>
+                  <a:srgbClr val="16202B"/>
+                </a:solidFill>
+                <a:latin typeface="Cambria" pitchFamily="34" charset="0"/>
+                <a:ea typeface="Cambria" pitchFamily="34" charset="-122"/>
+                <a:cs typeface="Cambria" pitchFamily="34" charset="-120"/>
+              </a:rPr>
+              <a:t>BullMQ + Redis</a:t>
+            </a:r>
+            <a:endParaRPr lang="en-US" sz="1250" dirty="0"/>
+          </a:p>
+        </p:txBody>
+      </p:sp>
+      <p:sp>
+        <p:nvSpPr>
+          <p:cNvPr id="29" name="Text 22"/>
+          <p:cNvSpPr/>
+          <p:nvPr/>
+        </p:nvSpPr>
+        <p:spPr>
+          <a:xfrm>
+            <a:off x="941832" y="5449824"/>
+            <a:ext cx="2121408" cy="640080"/>
+          </a:xfrm>
+          <a:prstGeom prst="rect">
+            <a:avLst/>
+          </a:prstGeom>
+          <a:noFill/>
+          <a:ln/>
+        </p:spPr>
+        <p:txBody>
+          <a:bodyPr wrap="square" lIns="0" tIns="0" rIns="0" bIns="0" rtlCol="0" anchor="ctr"/>
+          <a:lstStyle/>
+          <a:p>
+            <a:pPr algn="ctr" indent="0" marL="0">
+              <a:buNone/>
+            </a:pPr>
+            <a:r>
+              <a:rPr lang="en-US" sz="950" dirty="0">
+                <a:solidFill>
+                  <a:srgbClr val="5B6B7C"/>
                 </a:solidFill>
                 <a:latin typeface="Calibri" pitchFamily="34" charset="0"/>
                 <a:ea typeface="Calibri" pitchFamily="34" charset="-122"/>
                 <a:cs typeface="Calibri" pitchFamily="34" charset="-120"/>
               </a:rPr>
-              <a:t>P4
-</a:t>
-            </a:r>
-            <a:pPr algn="ctr" indent="0" marL="0">
-              <a:lnSpc>
-                <a:spcPts val="1200"/>
-              </a:lnSpc>
-              <a:buNone/>
-            </a:pPr>
-            <a:r>
-              <a:rPr lang="en-US" sz="950" dirty="0">
-                <a:solidFill>
-                  <a:srgbClr val="16202B"/>
-                </a:solidFill>
-                <a:latin typeface="Calibri" pitchFamily="34" charset="0"/>
-                <a:ea typeface="Calibri" pitchFamily="34" charset="-122"/>
-                <a:cs typeface="Calibri" pitchFamily="34" charset="-120"/>
-              </a:rPr>
-              <a:t>Postgres backend</a:t>
-            </a:r>
-            <a:endParaRPr lang="en-US" sz="900" dirty="0"/>
-          </a:p>
-        </p:txBody>
-      </p:sp>
-      <p:sp>
-        <p:nvSpPr>
-          <p:cNvPr id="21" name="Shape 14"/>
-          <p:cNvSpPr/>
-          <p:nvPr/>
-        </p:nvSpPr>
-        <p:spPr>
-          <a:xfrm>
-            <a:off x="7981406" y="2642616"/>
-            <a:ext cx="292608" cy="292608"/>
+              <a:t>Reliable job scheduling for every automation.</a:t>
+            </a:r>
+            <a:endParaRPr lang="en-US" sz="950" dirty="0"/>
+          </a:p>
+        </p:txBody>
+      </p:sp>
+      <p:sp>
+        <p:nvSpPr>
+          <p:cNvPr id="30" name="Shape 23"/>
+          <p:cNvSpPr/>
+          <p:nvPr/>
+        </p:nvSpPr>
+        <p:spPr>
+          <a:xfrm>
+            <a:off x="3429000" y="4114800"/>
+            <a:ext cx="2450592" cy="2103120"/>
+          </a:xfrm>
+          <a:prstGeom prst="roundRect">
+            <a:avLst>
+              <a:gd name="adj" fmla="val 3913"/>
+            </a:avLst>
+          </a:prstGeom>
+          <a:solidFill>
+            <a:srgbClr val="FFFFFF"/>
+          </a:solidFill>
+          <a:ln w="12700">
+            <a:solidFill>
+              <a:srgbClr val="E3E8EF"/>
+            </a:solidFill>
+            <a:prstDash val="solid"/>
+          </a:ln>
+          <a:effectLst>
+            <a:outerShdw sx="100000" sy="100000" kx="0" ky="0" algn="bl" rotWithShape="0" blurRad="101600" dist="38100" dir="5400000">
+              <a:srgbClr val="12233F">
+                <a:alpha val="18000"/>
+              </a:srgbClr>
+            </a:outerShdw>
+          </a:effectLst>
+        </p:spPr>
+      </p:sp>
+      <p:sp>
+        <p:nvSpPr>
+          <p:cNvPr id="31" name="Shape 24"/>
+          <p:cNvSpPr/>
+          <p:nvPr/>
+        </p:nvSpPr>
+        <p:spPr>
+          <a:xfrm>
+            <a:off x="4402836" y="4370832"/>
+            <a:ext cx="502920" cy="502920"/>
           </a:xfrm>
           <a:prstGeom prst="ellipse">
             <a:avLst/>
           </a:prstGeom>
           <a:solidFill>
-            <a:srgbClr val="1FAE7A"/>
+            <a:srgbClr val="1B8A94"/>
           </a:solidFill>
           <a:ln/>
         </p:spPr>
       </p:sp>
       <p:pic>
         <p:nvPicPr>
-          <p:cNvPr id="22" name="Image 5" descr="/tmp/claude-0/-home-user-Self-Project/0c48a94d-adf1-5cd3-ba0e-1e76ea2b114f/scratchpad/deck/icons/check.png">    </p:cNvPr>
+          <p:cNvPr id="32" name="Image 5" descr="/tmp/claude-0/-home-user-Self-Project/0c48a94d-adf1-5cd3-ba0e-1e76ea2b114f/scratchpad/deck/icons/robot.png">    </p:cNvPr>
           <p:cNvPicPr>
             <a:picLocks noChangeAspect="1"/>
           </p:cNvPicPr>
@@ -5394,8 +5343,8 @@
         </p:blipFill>
         <p:spPr>
           <a:xfrm>
-            <a:off x="8039927" y="2701138"/>
-            <a:ext cx="175565" cy="175565"/>
+            <a:off x="4515993" y="4483989"/>
+            <a:ext cx="276606" cy="276606"/>
           </a:xfrm>
           <a:prstGeom prst="rect">
             <a:avLst/>
@@ -5404,87 +5353,139 @@
       </p:pic>
       <p:sp>
         <p:nvSpPr>
-          <p:cNvPr id="23" name="Text 15"/>
-          <p:cNvSpPr/>
-          <p:nvPr/>
-        </p:nvSpPr>
-        <p:spPr>
-          <a:xfrm>
-            <a:off x="7359614" y="3209544"/>
-            <a:ext cx="1536192" cy="548640"/>
-          </a:xfrm>
-          <a:prstGeom prst="rect">
-            <a:avLst/>
-          </a:prstGeom>
-          <a:noFill/>
-          <a:ln/>
-        </p:spPr>
-        <p:txBody>
-          <a:bodyPr wrap="square" lIns="0" tIns="0" rIns="0" bIns="0" rtlCol="0" anchor="t"/>
+          <p:cNvPr id="33" name="Text 25"/>
+          <p:cNvSpPr/>
+          <p:nvPr/>
+        </p:nvSpPr>
+        <p:spPr>
+          <a:xfrm>
+            <a:off x="3566160" y="5010912"/>
+            <a:ext cx="2176272" cy="457200"/>
+          </a:xfrm>
+          <a:prstGeom prst="rect">
+            <a:avLst/>
+          </a:prstGeom>
+          <a:noFill/>
+          <a:ln/>
+        </p:spPr>
+        <p:txBody>
+          <a:bodyPr wrap="square" lIns="0" tIns="0" rIns="0" bIns="0" rtlCol="0" anchor="ctr"/>
           <a:lstStyle/>
           <a:p>
             <a:pPr algn="ctr" indent="0" marL="0">
-              <a:lnSpc>
-                <a:spcPts val="1200"/>
-              </a:lnSpc>
-              <a:buNone/>
-            </a:pPr>
-            <a:r>
-              <a:rPr lang="en-US" sz="900" b="1" dirty="0">
-                <a:solidFill>
-                  <a:srgbClr val="1B8A94"/>
+              <a:buNone/>
+            </a:pPr>
+            <a:r>
+              <a:rPr lang="en-US" sz="1250" b="1" dirty="0">
+                <a:solidFill>
+                  <a:srgbClr val="16202B"/>
+                </a:solidFill>
+                <a:latin typeface="Cambria" pitchFamily="34" charset="0"/>
+                <a:ea typeface="Cambria" pitchFamily="34" charset="-122"/>
+                <a:cs typeface="Cambria" pitchFamily="34" charset="-120"/>
+              </a:rPr>
+              <a:t>Model Context Protocol</a:t>
+            </a:r>
+            <a:endParaRPr lang="en-US" sz="1250" dirty="0"/>
+          </a:p>
+        </p:txBody>
+      </p:sp>
+      <p:sp>
+        <p:nvSpPr>
+          <p:cNvPr id="34" name="Text 26"/>
+          <p:cNvSpPr/>
+          <p:nvPr/>
+        </p:nvSpPr>
+        <p:spPr>
+          <a:xfrm>
+            <a:off x="3593592" y="5449824"/>
+            <a:ext cx="2121408" cy="640080"/>
+          </a:xfrm>
+          <a:prstGeom prst="rect">
+            <a:avLst/>
+          </a:prstGeom>
+          <a:noFill/>
+          <a:ln/>
+        </p:spPr>
+        <p:txBody>
+          <a:bodyPr wrap="square" lIns="0" tIns="0" rIns="0" bIns="0" rtlCol="0" anchor="ctr"/>
+          <a:lstStyle/>
+          <a:p>
+            <a:pPr algn="ctr" indent="0" marL="0">
+              <a:buNone/>
+            </a:pPr>
+            <a:r>
+              <a:rPr lang="en-US" sz="950" dirty="0">
+                <a:solidFill>
+                  <a:srgbClr val="5B6B7C"/>
                 </a:solidFill>
                 <a:latin typeface="Calibri" pitchFamily="34" charset="0"/>
                 <a:ea typeface="Calibri" pitchFamily="34" charset="-122"/>
                 <a:cs typeface="Calibri" pitchFamily="34" charset="-120"/>
               </a:rPr>
-              <a:t>P5
-</a:t>
-            </a:r>
-            <a:pPr algn="ctr" indent="0" marL="0">
-              <a:lnSpc>
-                <a:spcPts val="1200"/>
-              </a:lnSpc>
-              <a:buNone/>
-            </a:pPr>
-            <a:r>
-              <a:rPr lang="en-US" sz="950" dirty="0">
-                <a:solidFill>
-                  <a:srgbClr val="16202B"/>
-                </a:solidFill>
-                <a:latin typeface="Calibri" pitchFamily="34" charset="0"/>
-                <a:ea typeface="Calibri" pitchFamily="34" charset="-122"/>
-                <a:cs typeface="Calibri" pitchFamily="34" charset="-120"/>
-              </a:rPr>
-              <a:t>Hash-chain ledger</a:t>
-            </a:r>
-            <a:endParaRPr lang="en-US" sz="900" dirty="0"/>
-          </a:p>
-        </p:txBody>
-      </p:sp>
-      <p:sp>
-        <p:nvSpPr>
-          <p:cNvPr id="24" name="Shape 16"/>
-          <p:cNvSpPr/>
-          <p:nvPr/>
-        </p:nvSpPr>
-        <p:spPr>
-          <a:xfrm>
-            <a:off x="9376519" y="2642616"/>
-            <a:ext cx="292608" cy="292608"/>
+              <a:t>Structured tool access for AI agents.</a:t>
+            </a:r>
+            <a:endParaRPr lang="en-US" sz="950" dirty="0"/>
+          </a:p>
+        </p:txBody>
+      </p:sp>
+      <p:sp>
+        <p:nvSpPr>
+          <p:cNvPr id="35" name="Shape 27"/>
+          <p:cNvSpPr/>
+          <p:nvPr/>
+        </p:nvSpPr>
+        <p:spPr>
+          <a:xfrm>
+            <a:off x="6080760" y="4114800"/>
+            <a:ext cx="2450592" cy="2103120"/>
+          </a:xfrm>
+          <a:prstGeom prst="roundRect">
+            <a:avLst>
+              <a:gd name="adj" fmla="val 3913"/>
+            </a:avLst>
+          </a:prstGeom>
+          <a:solidFill>
+            <a:srgbClr val="FFFFFF"/>
+          </a:solidFill>
+          <a:ln w="12700">
+            <a:solidFill>
+              <a:srgbClr val="E3E8EF"/>
+            </a:solidFill>
+            <a:prstDash val="solid"/>
+          </a:ln>
+          <a:effectLst>
+            <a:outerShdw sx="100000" sy="100000" kx="0" ky="0" algn="bl" rotWithShape="0" blurRad="101600" dist="38100" dir="5400000">
+              <a:srgbClr val="12233F">
+                <a:alpha val="18000"/>
+              </a:srgbClr>
+            </a:outerShdw>
+          </a:effectLst>
+        </p:spPr>
+      </p:sp>
+      <p:sp>
+        <p:nvSpPr>
+          <p:cNvPr id="36" name="Shape 28"/>
+          <p:cNvSpPr/>
+          <p:nvPr/>
+        </p:nvSpPr>
+        <p:spPr>
+          <a:xfrm>
+            <a:off x="7054596" y="4370832"/>
+            <a:ext cx="502920" cy="502920"/>
           </a:xfrm>
           <a:prstGeom prst="ellipse">
             <a:avLst/>
           </a:prstGeom>
           <a:solidFill>
-            <a:srgbClr val="1FAE7A"/>
+            <a:srgbClr val="1B8A94"/>
           </a:solidFill>
           <a:ln/>
         </p:spPr>
       </p:sp>
       <p:pic>
         <p:nvPicPr>
-          <p:cNvPr id="25" name="Image 6" descr="/tmp/claude-0/-home-user-Self-Project/0c48a94d-adf1-5cd3-ba0e-1e76ea2b114f/scratchpad/deck/icons/check.png">    </p:cNvPr>
+          <p:cNvPr id="37" name="Image 6" descr="/tmp/claude-0/-home-user-Self-Project/0c48a94d-adf1-5cd3-ba0e-1e76ea2b114f/scratchpad/deck/icons/pdf.png">    </p:cNvPr>
           <p:cNvPicPr>
             <a:picLocks noChangeAspect="1"/>
           </p:cNvPicPr>
@@ -5498,8 +5499,8 @@
         </p:blipFill>
         <p:spPr>
           <a:xfrm>
-            <a:off x="9435040" y="2701138"/>
-            <a:ext cx="175565" cy="175565"/>
+            <a:off x="7167753" y="4483989"/>
+            <a:ext cx="276606" cy="276606"/>
           </a:xfrm>
           <a:prstGeom prst="rect">
             <a:avLst/>
@@ -5508,87 +5509,139 @@
       </p:pic>
       <p:sp>
         <p:nvSpPr>
-          <p:cNvPr id="26" name="Text 17"/>
-          <p:cNvSpPr/>
-          <p:nvPr/>
-        </p:nvSpPr>
-        <p:spPr>
-          <a:xfrm>
-            <a:off x="8754727" y="2011680"/>
-            <a:ext cx="1536192" cy="548640"/>
-          </a:xfrm>
-          <a:prstGeom prst="rect">
-            <a:avLst/>
-          </a:prstGeom>
-          <a:noFill/>
-          <a:ln/>
-        </p:spPr>
-        <p:txBody>
-          <a:bodyPr wrap="square" lIns="0" tIns="0" rIns="0" bIns="0" rtlCol="0" anchor="b"/>
+          <p:cNvPr id="38" name="Text 29"/>
+          <p:cNvSpPr/>
+          <p:nvPr/>
+        </p:nvSpPr>
+        <p:spPr>
+          <a:xfrm>
+            <a:off x="6217920" y="5010912"/>
+            <a:ext cx="2176272" cy="457200"/>
+          </a:xfrm>
+          <a:prstGeom prst="rect">
+            <a:avLst/>
+          </a:prstGeom>
+          <a:noFill/>
+          <a:ln/>
+        </p:spPr>
+        <p:txBody>
+          <a:bodyPr wrap="square" lIns="0" tIns="0" rIns="0" bIns="0" rtlCol="0" anchor="ctr"/>
           <a:lstStyle/>
           <a:p>
             <a:pPr algn="ctr" indent="0" marL="0">
-              <a:lnSpc>
-                <a:spcPts val="1200"/>
-              </a:lnSpc>
-              <a:buNone/>
-            </a:pPr>
-            <a:r>
-              <a:rPr lang="en-US" sz="900" b="1" dirty="0">
-                <a:solidFill>
-                  <a:srgbClr val="1B8A94"/>
+              <a:buNone/>
+            </a:pPr>
+            <a:r>
+              <a:rPr lang="en-US" sz="1250" b="1" dirty="0">
+                <a:solidFill>
+                  <a:srgbClr val="16202B"/>
+                </a:solidFill>
+                <a:latin typeface="Cambria" pitchFamily="34" charset="0"/>
+                <a:ea typeface="Cambria" pitchFamily="34" charset="-122"/>
+                <a:cs typeface="Cambria" pitchFamily="34" charset="-120"/>
+              </a:rPr>
+              <a:t>pdfmake</a:t>
+            </a:r>
+            <a:endParaRPr lang="en-US" sz="1250" dirty="0"/>
+          </a:p>
+        </p:txBody>
+      </p:sp>
+      <p:sp>
+        <p:nvSpPr>
+          <p:cNvPr id="39" name="Text 30"/>
+          <p:cNvSpPr/>
+          <p:nvPr/>
+        </p:nvSpPr>
+        <p:spPr>
+          <a:xfrm>
+            <a:off x="6245352" y="5449824"/>
+            <a:ext cx="2121408" cy="640080"/>
+          </a:xfrm>
+          <a:prstGeom prst="rect">
+            <a:avLst/>
+          </a:prstGeom>
+          <a:noFill/>
+          <a:ln/>
+        </p:spPr>
+        <p:txBody>
+          <a:bodyPr wrap="square" lIns="0" tIns="0" rIns="0" bIns="0" rtlCol="0" anchor="ctr"/>
+          <a:lstStyle/>
+          <a:p>
+            <a:pPr algn="ctr" indent="0" marL="0">
+              <a:buNone/>
+            </a:pPr>
+            <a:r>
+              <a:rPr lang="en-US" sz="950" dirty="0">
+                <a:solidFill>
+                  <a:srgbClr val="5B6B7C"/>
                 </a:solidFill>
                 <a:latin typeface="Calibri" pitchFamily="34" charset="0"/>
                 <a:ea typeface="Calibri" pitchFamily="34" charset="-122"/>
                 <a:cs typeface="Calibri" pitchFamily="34" charset="-120"/>
               </a:rPr>
-              <a:t>P6
-</a:t>
-            </a:r>
-            <a:pPr algn="ctr" indent="0" marL="0">
-              <a:lnSpc>
-                <a:spcPts val="1200"/>
-              </a:lnSpc>
-              <a:buNone/>
-            </a:pPr>
-            <a:r>
-              <a:rPr lang="en-US" sz="950" dirty="0">
-                <a:solidFill>
-                  <a:srgbClr val="16202B"/>
-                </a:solidFill>
-                <a:latin typeface="Calibri" pitchFamily="34" charset="0"/>
-                <a:ea typeface="Calibri" pitchFamily="34" charset="-122"/>
-                <a:cs typeface="Calibri" pitchFamily="34" charset="-120"/>
-              </a:rPr>
-              <a:t>Auth + dashboard</a:t>
-            </a:r>
-            <a:endParaRPr lang="en-US" sz="900" dirty="0"/>
-          </a:p>
-        </p:txBody>
-      </p:sp>
-      <p:sp>
-        <p:nvSpPr>
-          <p:cNvPr id="27" name="Shape 18"/>
-          <p:cNvSpPr/>
-          <p:nvPr/>
-        </p:nvSpPr>
-        <p:spPr>
-          <a:xfrm>
-            <a:off x="10771632" y="2642616"/>
-            <a:ext cx="292608" cy="292608"/>
+              <a:t>Offline PDF generation for compliance reports.</a:t>
+            </a:r>
+            <a:endParaRPr lang="en-US" sz="950" dirty="0"/>
+          </a:p>
+        </p:txBody>
+      </p:sp>
+      <p:sp>
+        <p:nvSpPr>
+          <p:cNvPr id="40" name="Shape 31"/>
+          <p:cNvSpPr/>
+          <p:nvPr/>
+        </p:nvSpPr>
+        <p:spPr>
+          <a:xfrm>
+            <a:off x="8732520" y="4114800"/>
+            <a:ext cx="2450592" cy="2103120"/>
+          </a:xfrm>
+          <a:prstGeom prst="roundRect">
+            <a:avLst>
+              <a:gd name="adj" fmla="val 3913"/>
+            </a:avLst>
+          </a:prstGeom>
+          <a:solidFill>
+            <a:srgbClr val="FFFFFF"/>
+          </a:solidFill>
+          <a:ln w="12700">
+            <a:solidFill>
+              <a:srgbClr val="E3E8EF"/>
+            </a:solidFill>
+            <a:prstDash val="solid"/>
+          </a:ln>
+          <a:effectLst>
+            <a:outerShdw sx="100000" sy="100000" kx="0" ky="0" algn="bl" rotWithShape="0" blurRad="101600" dist="38100" dir="5400000">
+              <a:srgbClr val="12233F">
+                <a:alpha val="18000"/>
+              </a:srgbClr>
+            </a:outerShdw>
+          </a:effectLst>
+        </p:spPr>
+      </p:sp>
+      <p:sp>
+        <p:nvSpPr>
+          <p:cNvPr id="41" name="Shape 32"/>
+          <p:cNvSpPr/>
+          <p:nvPr/>
+        </p:nvSpPr>
+        <p:spPr>
+          <a:xfrm>
+            <a:off x="9706356" y="4370832"/>
+            <a:ext cx="502920" cy="502920"/>
           </a:xfrm>
           <a:prstGeom prst="ellipse">
             <a:avLst/>
           </a:prstGeom>
           <a:solidFill>
-            <a:srgbClr val="1FAE7A"/>
+            <a:srgbClr val="1B8A94"/>
           </a:solidFill>
           <a:ln/>
         </p:spPr>
       </p:sp>
       <p:pic>
         <p:nvPicPr>
-          <p:cNvPr id="28" name="Image 7" descr="/tmp/claude-0/-home-user-Self-Project/0c48a94d-adf1-5cd3-ba0e-1e76ea2b114f/scratchpad/deck/icons/check.png">    </p:cNvPr>
+          <p:cNvPr id="42" name="Image 7" descr="/tmp/claude-0/-home-user-Self-Project/0c48a94d-adf1-5cd3-ba0e-1e76ea2b114f/scratchpad/deck/icons/lock.png">    </p:cNvPr>
           <p:cNvPicPr>
             <a:picLocks noChangeAspect="1"/>
           </p:cNvPicPr>
@@ -5602,8 +5655,8 @@
         </p:blipFill>
         <p:spPr>
           <a:xfrm>
-            <a:off x="10830154" y="2701138"/>
-            <a:ext cx="175565" cy="175565"/>
+            <a:off x="9819513" y="4483989"/>
+            <a:ext cx="276606" cy="276606"/>
           </a:xfrm>
           <a:prstGeom prst="rect">
             <a:avLst/>
@@ -5612,466 +5665,79 @@
       </p:pic>
       <p:sp>
         <p:nvSpPr>
-          <p:cNvPr id="29" name="Text 19"/>
-          <p:cNvSpPr/>
-          <p:nvPr/>
-        </p:nvSpPr>
-        <p:spPr>
-          <a:xfrm>
-            <a:off x="10149840" y="3209544"/>
-            <a:ext cx="1536192" cy="548640"/>
-          </a:xfrm>
-          <a:prstGeom prst="rect">
-            <a:avLst/>
-          </a:prstGeom>
-          <a:noFill/>
-          <a:ln/>
-        </p:spPr>
-        <p:txBody>
-          <a:bodyPr wrap="square" lIns="0" tIns="0" rIns="0" bIns="0" rtlCol="0" anchor="t"/>
+          <p:cNvPr id="43" name="Text 33"/>
+          <p:cNvSpPr/>
+          <p:nvPr/>
+        </p:nvSpPr>
+        <p:spPr>
+          <a:xfrm>
+            <a:off x="8869680" y="5010912"/>
+            <a:ext cx="2176272" cy="457200"/>
+          </a:xfrm>
+          <a:prstGeom prst="rect">
+            <a:avLst/>
+          </a:prstGeom>
+          <a:noFill/>
+          <a:ln/>
+        </p:spPr>
+        <p:txBody>
+          <a:bodyPr wrap="square" lIns="0" tIns="0" rIns="0" bIns="0" rtlCol="0" anchor="ctr"/>
           <a:lstStyle/>
           <a:p>
             <a:pPr algn="ctr" indent="0" marL="0">
-              <a:lnSpc>
-                <a:spcPts val="1200"/>
-              </a:lnSpc>
-              <a:buNone/>
-            </a:pPr>
-            <a:r>
-              <a:rPr lang="en-US" sz="900" b="1" dirty="0">
-                <a:solidFill>
-                  <a:srgbClr val="1B8A94"/>
+              <a:buNone/>
+            </a:pPr>
+            <a:r>
+              <a:rPr lang="en-US" sz="1250" b="1" dirty="0">
+                <a:solidFill>
+                  <a:srgbClr val="16202B"/>
+                </a:solidFill>
+                <a:latin typeface="Cambria" pitchFamily="34" charset="0"/>
+                <a:ea typeface="Cambria" pitchFamily="34" charset="-122"/>
+                <a:cs typeface="Cambria" pitchFamily="34" charset="-120"/>
+              </a:rPr>
+              <a:t>bcrypt + RBAC</a:t>
+            </a:r>
+            <a:endParaRPr lang="en-US" sz="1250" dirty="0"/>
+          </a:p>
+        </p:txBody>
+      </p:sp>
+      <p:sp>
+        <p:nvSpPr>
+          <p:cNvPr id="44" name="Text 34"/>
+          <p:cNvSpPr/>
+          <p:nvPr/>
+        </p:nvSpPr>
+        <p:spPr>
+          <a:xfrm>
+            <a:off x="8897112" y="5449824"/>
+            <a:ext cx="2121408" cy="640080"/>
+          </a:xfrm>
+          <a:prstGeom prst="rect">
+            <a:avLst/>
+          </a:prstGeom>
+          <a:noFill/>
+          <a:ln/>
+        </p:spPr>
+        <p:txBody>
+          <a:bodyPr wrap="square" lIns="0" tIns="0" rIns="0" bIns="0" rtlCol="0" anchor="ctr"/>
+          <a:lstStyle/>
+          <a:p>
+            <a:pPr algn="ctr" indent="0" marL="0">
+              <a:buNone/>
+            </a:pPr>
+            <a:r>
+              <a:rPr lang="en-US" sz="950" dirty="0">
+                <a:solidFill>
+                  <a:srgbClr val="5B6B7C"/>
                 </a:solidFill>
                 <a:latin typeface="Calibri" pitchFamily="34" charset="0"/>
                 <a:ea typeface="Calibri" pitchFamily="34" charset="-122"/>
                 <a:cs typeface="Calibri" pitchFamily="34" charset="-120"/>
               </a:rPr>
-              <a:t>P7
-</a:t>
-            </a:r>
-            <a:pPr algn="ctr" indent="0" marL="0">
-              <a:lnSpc>
-                <a:spcPts val="1200"/>
-              </a:lnSpc>
-              <a:buNone/>
-            </a:pPr>
-            <a:r>
-              <a:rPr lang="en-US" sz="950" dirty="0">
-                <a:solidFill>
-                  <a:srgbClr val="16202B"/>
-                </a:solidFill>
-                <a:latin typeface="Calibri" pitchFamily="34" charset="0"/>
-                <a:ea typeface="Calibri" pitchFamily="34" charset="-122"/>
-                <a:cs typeface="Calibri" pitchFamily="34" charset="-120"/>
-              </a:rPr>
-              <a:t>Full automation</a:t>
-            </a:r>
-            <a:endParaRPr lang="en-US" sz="900" dirty="0"/>
-          </a:p>
-        </p:txBody>
-      </p:sp>
-      <p:sp>
-        <p:nvSpPr>
-          <p:cNvPr id="30" name="Text 20"/>
-          <p:cNvSpPr/>
-          <p:nvPr/>
-        </p:nvSpPr>
-        <p:spPr>
-          <a:xfrm>
-            <a:off x="777240" y="4160520"/>
-            <a:ext cx="5486400" cy="365760"/>
-          </a:xfrm>
-          <a:prstGeom prst="rect">
-            <a:avLst/>
-          </a:prstGeom>
-          <a:noFill/>
-          <a:ln/>
-        </p:spPr>
-        <p:txBody>
-          <a:bodyPr wrap="square" rtlCol="0" anchor="ctr"/>
-          <a:lstStyle/>
-          <a:p>
-            <a:pPr indent="0" marL="0">
-              <a:buNone/>
-            </a:pPr>
-            <a:r>
-              <a:rPr lang="en-US" sz="1800" b="1" dirty="0">
-                <a:solidFill>
-                  <a:srgbClr val="16202B"/>
-                </a:solidFill>
-                <a:latin typeface="Cambria" pitchFamily="34" charset="0"/>
-                <a:ea typeface="Cambria" pitchFamily="34" charset="-122"/>
-                <a:cs typeface="Cambria" pitchFamily="34" charset="-120"/>
-              </a:rPr>
-              <a:t>What's next</a:t>
-            </a:r>
-            <a:endParaRPr lang="en-US" sz="1800" dirty="0"/>
-          </a:p>
-        </p:txBody>
-      </p:sp>
-      <p:sp>
-        <p:nvSpPr>
-          <p:cNvPr id="31" name="Shape 21"/>
-          <p:cNvSpPr/>
-          <p:nvPr/>
-        </p:nvSpPr>
-        <p:spPr>
-          <a:xfrm>
-            <a:off x="777240" y="4663440"/>
-            <a:ext cx="457200" cy="457200"/>
-          </a:xfrm>
-          <a:prstGeom prst="ellipse">
-            <a:avLst/>
-          </a:prstGeom>
-          <a:solidFill>
-            <a:srgbClr val="12233F"/>
-          </a:solidFill>
-          <a:ln/>
-        </p:spPr>
-      </p:sp>
-      <p:pic>
-        <p:nvPicPr>
-          <p:cNvPr id="32" name="Image 8" descr="/tmp/claude-0/-home-user-Self-Project/0c48a94d-adf1-5cd3-ba0e-1e76ea2b114f/scratchpad/deck/icons/users.png">    </p:cNvPr>
-          <p:cNvPicPr>
-            <a:picLocks noChangeAspect="1"/>
-          </p:cNvPicPr>
-          <p:nvPr/>
-        </p:nvPicPr>
-        <p:blipFill>
-          <a:blip r:embed="rId9"/>
-          <a:stretch>
-            <a:fillRect/>
-          </a:stretch>
-        </p:blipFill>
-        <p:spPr>
-          <a:xfrm>
-            <a:off x="880110" y="4766310"/>
-            <a:ext cx="251460" cy="251460"/>
-          </a:xfrm>
-          <a:prstGeom prst="rect">
-            <a:avLst/>
-          </a:prstGeom>
-        </p:spPr>
-      </p:pic>
-      <p:sp>
-        <p:nvSpPr>
-          <p:cNvPr id="33" name="Text 22"/>
-          <p:cNvSpPr/>
-          <p:nvPr/>
-        </p:nvSpPr>
-        <p:spPr>
-          <a:xfrm>
-            <a:off x="1399032" y="4645152"/>
-            <a:ext cx="2743200" cy="457200"/>
-          </a:xfrm>
-          <a:prstGeom prst="rect">
-            <a:avLst/>
-          </a:prstGeom>
-          <a:noFill/>
-          <a:ln/>
-        </p:spPr>
-        <p:txBody>
-          <a:bodyPr wrap="square" lIns="0" tIns="0" rIns="0" bIns="0" rtlCol="0" anchor="ctr"/>
-          <a:lstStyle/>
-          <a:p>
-            <a:pPr indent="0" marL="0">
-              <a:buNone/>
-            </a:pPr>
-            <a:r>
-              <a:rPr lang="en-US" sz="1300" b="1" dirty="0">
-                <a:solidFill>
-                  <a:srgbClr val="16202B"/>
-                </a:solidFill>
-                <a:latin typeface="Cambria" pitchFamily="34" charset="0"/>
-                <a:ea typeface="Cambria" pitchFamily="34" charset="-122"/>
-                <a:cs typeface="Cambria" pitchFamily="34" charset="-120"/>
-              </a:rPr>
-              <a:t>Multi-tenant + RBAC</a:t>
-            </a:r>
-            <a:endParaRPr lang="en-US" sz="1300" dirty="0"/>
-          </a:p>
-        </p:txBody>
-      </p:sp>
-      <p:sp>
-        <p:nvSpPr>
-          <p:cNvPr id="34" name="Text 23"/>
-          <p:cNvSpPr/>
-          <p:nvPr/>
-        </p:nvSpPr>
-        <p:spPr>
-          <a:xfrm>
-            <a:off x="777240" y="5230368"/>
-            <a:ext cx="3364992" cy="685800"/>
-          </a:xfrm>
-          <a:prstGeom prst="rect">
-            <a:avLst/>
-          </a:prstGeom>
-          <a:noFill/>
-          <a:ln/>
-        </p:spPr>
-        <p:txBody>
-          <a:bodyPr wrap="square" lIns="0" tIns="0" rIns="0" bIns="0" rtlCol="0" anchor="ctr"/>
-          <a:lstStyle/>
-          <a:p>
-            <a:pPr indent="0" marL="0">
-              <a:buNone/>
-            </a:pPr>
-            <a:r>
-              <a:rPr lang="en-US" sz="1050" dirty="0">
-                <a:solidFill>
-                  <a:srgbClr val="5B6B7C"/>
-                </a:solidFill>
-                <a:latin typeface="Calibri" pitchFamily="34" charset="0"/>
-                <a:ea typeface="Calibri" pitchFamily="34" charset="-122"/>
-                <a:cs typeface="Calibri" pitchFamily="34" charset="-120"/>
-              </a:rPr>
-              <a:t>One admin today — real deployments need org boundaries and roles.</a:t>
-            </a:r>
-            <a:endParaRPr lang="en-US" sz="1050" dirty="0"/>
-          </a:p>
-        </p:txBody>
-      </p:sp>
-      <p:sp>
-        <p:nvSpPr>
-          <p:cNvPr id="35" name="Shape 24"/>
-          <p:cNvSpPr/>
-          <p:nvPr/>
-        </p:nvSpPr>
-        <p:spPr>
-          <a:xfrm>
-            <a:off x="4462272" y="4663440"/>
-            <a:ext cx="457200" cy="457200"/>
-          </a:xfrm>
-          <a:prstGeom prst="ellipse">
-            <a:avLst/>
-          </a:prstGeom>
-          <a:solidFill>
-            <a:srgbClr val="12233F"/>
-          </a:solidFill>
-          <a:ln/>
-        </p:spPr>
-      </p:sp>
-      <p:pic>
-        <p:nvPicPr>
-          <p:cNvPr id="36" name="Image 9" descr="/tmp/claude-0/-home-user-Self-Project/0c48a94d-adf1-5cd3-ba0e-1e76ea2b114f/scratchpad/deck/icons/database.png">    </p:cNvPr>
-          <p:cNvPicPr>
-            <a:picLocks noChangeAspect="1"/>
-          </p:cNvPicPr>
-          <p:nvPr/>
-        </p:nvPicPr>
-        <p:blipFill>
-          <a:blip r:embed="rId10"/>
-          <a:stretch>
-            <a:fillRect/>
-          </a:stretch>
-        </p:blipFill>
-        <p:spPr>
-          <a:xfrm>
-            <a:off x="4565142" y="4766310"/>
-            <a:ext cx="251460" cy="251460"/>
-          </a:xfrm>
-          <a:prstGeom prst="rect">
-            <a:avLst/>
-          </a:prstGeom>
-        </p:spPr>
-      </p:pic>
-      <p:sp>
-        <p:nvSpPr>
-          <p:cNvPr id="37" name="Text 25"/>
-          <p:cNvSpPr/>
-          <p:nvPr/>
-        </p:nvSpPr>
-        <p:spPr>
-          <a:xfrm>
-            <a:off x="5084064" y="4645152"/>
-            <a:ext cx="2743200" cy="457200"/>
-          </a:xfrm>
-          <a:prstGeom prst="rect">
-            <a:avLst/>
-          </a:prstGeom>
-          <a:noFill/>
-          <a:ln/>
-        </p:spPr>
-        <p:txBody>
-          <a:bodyPr wrap="square" lIns="0" tIns="0" rIns="0" bIns="0" rtlCol="0" anchor="ctr"/>
-          <a:lstStyle/>
-          <a:p>
-            <a:pPr indent="0" marL="0">
-              <a:buNone/>
-            </a:pPr>
-            <a:r>
-              <a:rPr lang="en-US" sz="1300" b="1" dirty="0">
-                <a:solidFill>
-                  <a:srgbClr val="16202B"/>
-                </a:solidFill>
-                <a:latin typeface="Cambria" pitchFamily="34" charset="0"/>
-                <a:ea typeface="Cambria" pitchFamily="34" charset="-122"/>
-                <a:cs typeface="Cambria" pitchFamily="34" charset="-120"/>
-              </a:rPr>
-              <a:t>Production hardening</a:t>
-            </a:r>
-            <a:endParaRPr lang="en-US" sz="1300" dirty="0"/>
-          </a:p>
-        </p:txBody>
-      </p:sp>
-      <p:sp>
-        <p:nvSpPr>
-          <p:cNvPr id="38" name="Text 26"/>
-          <p:cNvSpPr/>
-          <p:nvPr/>
-        </p:nvSpPr>
-        <p:spPr>
-          <a:xfrm>
-            <a:off x="4462272" y="5230368"/>
-            <a:ext cx="3364992" cy="685800"/>
-          </a:xfrm>
-          <a:prstGeom prst="rect">
-            <a:avLst/>
-          </a:prstGeom>
-          <a:noFill/>
-          <a:ln/>
-        </p:spPr>
-        <p:txBody>
-          <a:bodyPr wrap="square" lIns="0" tIns="0" rIns="0" bIns="0" rtlCol="0" anchor="ctr"/>
-          <a:lstStyle/>
-          <a:p>
-            <a:pPr indent="0" marL="0">
-              <a:buNone/>
-            </a:pPr>
-            <a:r>
-              <a:rPr lang="en-US" sz="1050" dirty="0">
-                <a:solidFill>
-                  <a:srgbClr val="5B6B7C"/>
-                </a:solidFill>
-                <a:latin typeface="Calibri" pitchFamily="34" charset="0"/>
-                <a:ea typeface="Calibri" pitchFamily="34" charset="-122"/>
-                <a:cs typeface="Calibri" pitchFamily="34" charset="-120"/>
-              </a:rPr>
-              <a:t>Wrap mutations in transactions; move sessions off in-memory storage.</a:t>
-            </a:r>
-            <a:endParaRPr lang="en-US" sz="1050" dirty="0"/>
-          </a:p>
-        </p:txBody>
-      </p:sp>
-      <p:sp>
-        <p:nvSpPr>
-          <p:cNvPr id="39" name="Shape 27"/>
-          <p:cNvSpPr/>
-          <p:nvPr/>
-        </p:nvSpPr>
-        <p:spPr>
-          <a:xfrm>
-            <a:off x="8147304" y="4663440"/>
-            <a:ext cx="457200" cy="457200"/>
-          </a:xfrm>
-          <a:prstGeom prst="ellipse">
-            <a:avLst/>
-          </a:prstGeom>
-          <a:solidFill>
-            <a:srgbClr val="12233F"/>
-          </a:solidFill>
-          <a:ln/>
-        </p:spPr>
-      </p:sp>
-      <p:pic>
-        <p:nvPicPr>
-          <p:cNvPr id="40" name="Image 10" descr="/tmp/claude-0/-home-user-Self-Project/0c48a94d-adf1-5cd3-ba0e-1e76ea2b114f/scratchpad/deck/icons/flask.png">    </p:cNvPr>
-          <p:cNvPicPr>
-            <a:picLocks noChangeAspect="1"/>
-          </p:cNvPicPr>
-          <p:nvPr/>
-        </p:nvPicPr>
-        <p:blipFill>
-          <a:blip r:embed="rId11"/>
-          <a:stretch>
-            <a:fillRect/>
-          </a:stretch>
-        </p:blipFill>
-        <p:spPr>
-          <a:xfrm>
-            <a:off x="8250174" y="4766310"/>
-            <a:ext cx="251460" cy="251460"/>
-          </a:xfrm>
-          <a:prstGeom prst="rect">
-            <a:avLst/>
-          </a:prstGeom>
-        </p:spPr>
-      </p:pic>
-      <p:sp>
-        <p:nvSpPr>
-          <p:cNvPr id="41" name="Text 28"/>
-          <p:cNvSpPr/>
-          <p:nvPr/>
-        </p:nvSpPr>
-        <p:spPr>
-          <a:xfrm>
-            <a:off x="8769096" y="4645152"/>
-            <a:ext cx="2743200" cy="457200"/>
-          </a:xfrm>
-          <a:prstGeom prst="rect">
-            <a:avLst/>
-          </a:prstGeom>
-          <a:noFill/>
-          <a:ln/>
-        </p:spPr>
-        <p:txBody>
-          <a:bodyPr wrap="square" lIns="0" tIns="0" rIns="0" bIns="0" rtlCol="0" anchor="ctr"/>
-          <a:lstStyle/>
-          <a:p>
-            <a:pPr indent="0" marL="0">
-              <a:buNone/>
-            </a:pPr>
-            <a:r>
-              <a:rPr lang="en-US" sz="1300" b="1" dirty="0">
-                <a:solidFill>
-                  <a:srgbClr val="16202B"/>
-                </a:solidFill>
-                <a:latin typeface="Cambria" pitchFamily="34" charset="0"/>
-                <a:ea typeface="Cambria" pitchFamily="34" charset="-122"/>
-                <a:cs typeface="Cambria" pitchFamily="34" charset="-120"/>
-              </a:rPr>
-              <a:t>Broader archival targets</a:t>
-            </a:r>
-            <a:endParaRPr lang="en-US" sz="1300" dirty="0"/>
-          </a:p>
-        </p:txBody>
-      </p:sp>
-      <p:sp>
-        <p:nvSpPr>
-          <p:cNvPr id="42" name="Text 29"/>
-          <p:cNvSpPr/>
-          <p:nvPr/>
-        </p:nvSpPr>
-        <p:spPr>
-          <a:xfrm>
-            <a:off x="8147304" y="5230368"/>
-            <a:ext cx="3364992" cy="685800"/>
-          </a:xfrm>
-          <a:prstGeom prst="rect">
-            <a:avLst/>
-          </a:prstGeom>
-          <a:noFill/>
-          <a:ln/>
-        </p:spPr>
-        <p:txBody>
-          <a:bodyPr wrap="square" lIns="0" tIns="0" rIns="0" bIns="0" rtlCol="0" anchor="ctr"/>
-          <a:lstStyle/>
-          <a:p>
-            <a:pPr indent="0" marL="0">
-              <a:buNone/>
-            </a:pPr>
-            <a:r>
-              <a:rPr lang="en-US" sz="1050" dirty="0">
-                <a:solidFill>
-                  <a:srgbClr val="5B6B7C"/>
-                </a:solidFill>
-                <a:latin typeface="Calibri" pitchFamily="34" charset="0"/>
-                <a:ea typeface="Calibri" pitchFamily="34" charset="-122"/>
-                <a:cs typeface="Calibri" pitchFamily="34" charset="-120"/>
-              </a:rPr>
-              <a:t>Local-disk report archival today; cloud storage once the connector's ready.</a:t>
-            </a:r>
-            <a:endParaRPr lang="en-US" sz="1050" dirty="0"/>
+              <a:t>Cookie sessions, three roles, every route org-scoped by fiduciary.</a:t>
+            </a:r>
+            <a:endParaRPr lang="en-US" sz="950" dirty="0"/>
           </a:p>
         </p:txBody>
       </p:sp>
@@ -6086,6 +5752,1397 @@
 <file path=ppt/slides/slide13.xml><?xml version="1.0" encoding="utf-8"?>
 <p:sld xmlns:a="http://schemas.openxmlformats.org/drawingml/2006/main" xmlns:r="http://schemas.openxmlformats.org/officeDocument/2006/relationships" xmlns:p="http://schemas.openxmlformats.org/presentationml/2006/main">
   <p:cSld name="Slide 13">
+    <p:bg>
+      <p:bgPr>
+        <a:solidFill>
+          <a:srgbClr val="F7F9FB"/>
+        </a:solidFill>
+      </p:bgPr>
+    </p:bg>
+    <p:spTree>
+      <p:nvGrpSpPr>
+        <p:cNvPr id="1" name=""/>
+        <p:cNvGrpSpPr/>
+        <p:nvPr/>
+      </p:nvGrpSpPr>
+      <p:grpSpPr>
+        <a:xfrm>
+          <a:off x="0" y="0"/>
+          <a:ext cx="0" cy="0"/>
+          <a:chOff x="0" y="0"/>
+          <a:chExt cx="0" cy="0"/>
+        </a:xfrm>
+      </p:grpSpPr>
+      <p:sp>
+        <p:nvSpPr>
+          <p:cNvPr id="2" name="Text 0"/>
+          <p:cNvSpPr/>
+          <p:nvPr/>
+        </p:nvSpPr>
+        <p:spPr>
+          <a:xfrm>
+            <a:off x="11368735" y="6355080"/>
+            <a:ext cx="548640" cy="320040"/>
+          </a:xfrm>
+          <a:prstGeom prst="rect">
+            <a:avLst/>
+          </a:prstGeom>
+          <a:noFill/>
+          <a:ln/>
+        </p:spPr>
+        <p:txBody>
+          <a:bodyPr wrap="square" rtlCol="0" anchor="ctr"/>
+          <a:lstStyle/>
+          <a:p>
+            <a:pPr algn="r" indent="0" marL="0">
+              <a:buNone/>
+            </a:pPr>
+            <a:r>
+              <a:rPr lang="en-US" sz="1000" dirty="0">
+                <a:solidFill>
+                  <a:srgbClr val="9AA6B5"/>
+                </a:solidFill>
+                <a:latin typeface="Calibri" pitchFamily="34" charset="0"/>
+                <a:ea typeface="Calibri" pitchFamily="34" charset="-122"/>
+                <a:cs typeface="Calibri" pitchFamily="34" charset="-120"/>
+              </a:rPr>
+              <a:t>13</a:t>
+            </a:r>
+            <a:endParaRPr lang="en-US" sz="1000" dirty="0"/>
+          </a:p>
+        </p:txBody>
+      </p:sp>
+      <p:sp>
+        <p:nvSpPr>
+          <p:cNvPr id="3" name="Text 1"/>
+          <p:cNvSpPr/>
+          <p:nvPr/>
+        </p:nvSpPr>
+        <p:spPr>
+          <a:xfrm>
+            <a:off x="0" y="0"/>
+            <a:ext cx="5486400" cy="320040"/>
+          </a:xfrm>
+          <a:prstGeom prst="rect">
+            <a:avLst/>
+          </a:prstGeom>
+          <a:noFill/>
+          <a:ln/>
+        </p:spPr>
+        <p:txBody>
+          <a:bodyPr wrap="square" rtlCol="0" anchor="ctr"/>
+          <a:lstStyle/>
+          <a:p>
+            <a:pPr algn="l" indent="0" marL="0">
+              <a:buNone/>
+            </a:pPr>
+            <a:r>
+              <a:rPr lang="en-US" sz="1200" b="1" spc="200" kern="0" dirty="0">
+                <a:solidFill>
+                  <a:srgbClr val="1B8A94"/>
+                </a:solidFill>
+                <a:latin typeface="Calibri" pitchFamily="34" charset="0"/>
+                <a:ea typeface="Calibri" pitchFamily="34" charset="-122"/>
+                <a:cs typeface="Calibri" pitchFamily="34" charset="-120"/>
+              </a:rPr>
+              <a:t>STATUS</a:t>
+            </a:r>
+            <a:endParaRPr lang="en-US" sz="1200" dirty="0"/>
+          </a:p>
+        </p:txBody>
+      </p:sp>
+      <p:sp>
+        <p:nvSpPr>
+          <p:cNvPr id="4" name="Text 2"/>
+          <p:cNvSpPr/>
+          <p:nvPr/>
+        </p:nvSpPr>
+        <p:spPr>
+          <a:xfrm>
+            <a:off x="777240" y="822960"/>
+            <a:ext cx="10424160" cy="685800"/>
+          </a:xfrm>
+          <a:prstGeom prst="rect">
+            <a:avLst/>
+          </a:prstGeom>
+          <a:noFill/>
+          <a:ln/>
+        </p:spPr>
+        <p:txBody>
+          <a:bodyPr wrap="square" rtlCol="0" anchor="ctr"/>
+          <a:lstStyle/>
+          <a:p>
+            <a:pPr indent="0" marL="0">
+              <a:buNone/>
+            </a:pPr>
+            <a:r>
+              <a:rPr lang="en-US" sz="2800" b="1" dirty="0">
+                <a:solidFill>
+                  <a:srgbClr val="16202B"/>
+                </a:solidFill>
+                <a:latin typeface="Cambria" pitchFamily="34" charset="0"/>
+                <a:ea typeface="Cambria" pitchFamily="34" charset="-122"/>
+                <a:cs typeface="Cambria" pitchFamily="34" charset="-120"/>
+              </a:rPr>
+              <a:t>Nine phases shipped, each verified before the next began</a:t>
+            </a:r>
+            <a:endParaRPr lang="en-US" sz="2800" dirty="0"/>
+          </a:p>
+        </p:txBody>
+      </p:sp>
+      <p:sp>
+        <p:nvSpPr>
+          <p:cNvPr id="5" name="Shape 3"/>
+          <p:cNvSpPr/>
+          <p:nvPr/>
+        </p:nvSpPr>
+        <p:spPr>
+          <a:xfrm>
+            <a:off x="1051560" y="2788920"/>
+            <a:ext cx="10058400" cy="0"/>
+          </a:xfrm>
+          <a:prstGeom prst="line">
+            <a:avLst/>
+          </a:prstGeom>
+          <a:noFill/>
+          <a:ln w="25400">
+            <a:solidFill>
+              <a:srgbClr val="E3E8EF"/>
+            </a:solidFill>
+            <a:prstDash val="solid"/>
+          </a:ln>
+        </p:spPr>
+      </p:sp>
+      <p:sp>
+        <p:nvSpPr>
+          <p:cNvPr id="6" name="Shape 4"/>
+          <p:cNvSpPr/>
+          <p:nvPr/>
+        </p:nvSpPr>
+        <p:spPr>
+          <a:xfrm>
+            <a:off x="914400" y="2651760"/>
+            <a:ext cx="274320" cy="274320"/>
+          </a:xfrm>
+          <a:prstGeom prst="ellipse">
+            <a:avLst/>
+          </a:prstGeom>
+          <a:solidFill>
+            <a:srgbClr val="1FAE7A"/>
+          </a:solidFill>
+          <a:ln/>
+        </p:spPr>
+      </p:sp>
+      <p:pic>
+        <p:nvPicPr>
+          <p:cNvPr id="7" name="Image 0" descr="/tmp/claude-0/-home-user-Self-Project/0c48a94d-adf1-5cd3-ba0e-1e76ea2b114f/scratchpad/deck/icons/check.png">    </p:cNvPr>
+          <p:cNvPicPr>
+            <a:picLocks noChangeAspect="1"/>
+          </p:cNvPicPr>
+          <p:nvPr/>
+        </p:nvPicPr>
+        <p:blipFill>
+          <a:blip r:embed="rId1"/>
+          <a:stretch>
+            <a:fillRect/>
+          </a:stretch>
+        </p:blipFill>
+        <p:spPr>
+          <a:xfrm>
+            <a:off x="969264" y="2706624"/>
+            <a:ext cx="164592" cy="164592"/>
+          </a:xfrm>
+          <a:prstGeom prst="rect">
+            <a:avLst/>
+          </a:prstGeom>
+        </p:spPr>
+      </p:pic>
+      <p:sp>
+        <p:nvSpPr>
+          <p:cNvPr id="8" name="Text 5"/>
+          <p:cNvSpPr/>
+          <p:nvPr/>
+        </p:nvSpPr>
+        <p:spPr>
+          <a:xfrm>
+            <a:off x="365760" y="2011680"/>
+            <a:ext cx="1371600" cy="548640"/>
+          </a:xfrm>
+          <a:prstGeom prst="rect">
+            <a:avLst/>
+          </a:prstGeom>
+          <a:noFill/>
+          <a:ln/>
+        </p:spPr>
+        <p:txBody>
+          <a:bodyPr wrap="square" lIns="0" tIns="0" rIns="0" bIns="0" rtlCol="0" anchor="b"/>
+          <a:lstStyle/>
+          <a:p>
+            <a:pPr algn="ctr" indent="0" marL="0">
+              <a:lnSpc>
+                <a:spcPts val="1100"/>
+              </a:lnSpc>
+              <a:buNone/>
+            </a:pPr>
+            <a:r>
+              <a:rPr lang="en-US" sz="850" b="1" dirty="0">
+                <a:solidFill>
+                  <a:srgbClr val="1B8A94"/>
+                </a:solidFill>
+                <a:latin typeface="Calibri" pitchFamily="34" charset="0"/>
+                <a:ea typeface="Calibri" pitchFamily="34" charset="-122"/>
+                <a:cs typeface="Calibri" pitchFamily="34" charset="-120"/>
+              </a:rPr>
+              <a:t>P0
+</a:t>
+            </a:r>
+            <a:pPr algn="ctr" indent="0" marL="0">
+              <a:lnSpc>
+                <a:spcPts val="1100"/>
+              </a:lnSpc>
+              <a:buNone/>
+            </a:pPr>
+            <a:r>
+              <a:rPr lang="en-US" sz="850" dirty="0">
+                <a:solidFill>
+                  <a:srgbClr val="16202B"/>
+                </a:solidFill>
+                <a:latin typeface="Calibri" pitchFamily="34" charset="0"/>
+                <a:ea typeface="Calibri" pitchFamily="34" charset="-122"/>
+                <a:cs typeface="Calibri" pitchFamily="34" charset="-120"/>
+              </a:rPr>
+              <a:t>Mock data layer</a:t>
+            </a:r>
+            <a:endParaRPr lang="en-US" sz="850" dirty="0"/>
+          </a:p>
+        </p:txBody>
+      </p:sp>
+      <p:sp>
+        <p:nvSpPr>
+          <p:cNvPr id="9" name="Shape 6"/>
+          <p:cNvSpPr/>
+          <p:nvPr/>
+        </p:nvSpPr>
+        <p:spPr>
+          <a:xfrm>
+            <a:off x="2171700" y="2651760"/>
+            <a:ext cx="274320" cy="274320"/>
+          </a:xfrm>
+          <a:prstGeom prst="ellipse">
+            <a:avLst/>
+          </a:prstGeom>
+          <a:solidFill>
+            <a:srgbClr val="1FAE7A"/>
+          </a:solidFill>
+          <a:ln/>
+        </p:spPr>
+      </p:sp>
+      <p:pic>
+        <p:nvPicPr>
+          <p:cNvPr id="10" name="Image 1" descr="/tmp/claude-0/-home-user-Self-Project/0c48a94d-adf1-5cd3-ba0e-1e76ea2b114f/scratchpad/deck/icons/check.png">    </p:cNvPr>
+          <p:cNvPicPr>
+            <a:picLocks noChangeAspect="1"/>
+          </p:cNvPicPr>
+          <p:nvPr/>
+        </p:nvPicPr>
+        <p:blipFill>
+          <a:blip r:embed="rId2"/>
+          <a:stretch>
+            <a:fillRect/>
+          </a:stretch>
+        </p:blipFill>
+        <p:spPr>
+          <a:xfrm>
+            <a:off x="2226564" y="2706624"/>
+            <a:ext cx="164592" cy="164592"/>
+          </a:xfrm>
+          <a:prstGeom prst="rect">
+            <a:avLst/>
+          </a:prstGeom>
+        </p:spPr>
+      </p:pic>
+      <p:sp>
+        <p:nvSpPr>
+          <p:cNvPr id="11" name="Text 7"/>
+          <p:cNvSpPr/>
+          <p:nvPr/>
+        </p:nvSpPr>
+        <p:spPr>
+          <a:xfrm>
+            <a:off x="1623060" y="3191256"/>
+            <a:ext cx="1371600" cy="548640"/>
+          </a:xfrm>
+          <a:prstGeom prst="rect">
+            <a:avLst/>
+          </a:prstGeom>
+          <a:noFill/>
+          <a:ln/>
+        </p:spPr>
+        <p:txBody>
+          <a:bodyPr wrap="square" lIns="0" tIns="0" rIns="0" bIns="0" rtlCol="0" anchor="t"/>
+          <a:lstStyle/>
+          <a:p>
+            <a:pPr algn="ctr" indent="0" marL="0">
+              <a:lnSpc>
+                <a:spcPts val="1100"/>
+              </a:lnSpc>
+              <a:buNone/>
+            </a:pPr>
+            <a:r>
+              <a:rPr lang="en-US" sz="850" b="1" dirty="0">
+                <a:solidFill>
+                  <a:srgbClr val="1B8A94"/>
+                </a:solidFill>
+                <a:latin typeface="Calibri" pitchFamily="34" charset="0"/>
+                <a:ea typeface="Calibri" pitchFamily="34" charset="-122"/>
+                <a:cs typeface="Calibri" pitchFamily="34" charset="-120"/>
+              </a:rPr>
+              <a:t>P1
+</a:t>
+            </a:r>
+            <a:pPr algn="ctr" indent="0" marL="0">
+              <a:lnSpc>
+                <a:spcPts val="1100"/>
+              </a:lnSpc>
+              <a:buNone/>
+            </a:pPr>
+            <a:r>
+              <a:rPr lang="en-US" sz="850" dirty="0">
+                <a:solidFill>
+                  <a:srgbClr val="16202B"/>
+                </a:solidFill>
+                <a:latin typeface="Calibri" pitchFamily="34" charset="0"/>
+                <a:ea typeface="Calibri" pitchFamily="34" charset="-122"/>
+                <a:cs typeface="Calibri" pitchFamily="34" charset="-120"/>
+              </a:rPr>
+              <a:t>MCP server</a:t>
+            </a:r>
+            <a:endParaRPr lang="en-US" sz="850" dirty="0"/>
+          </a:p>
+        </p:txBody>
+      </p:sp>
+      <p:sp>
+        <p:nvSpPr>
+          <p:cNvPr id="12" name="Shape 8"/>
+          <p:cNvSpPr/>
+          <p:nvPr/>
+        </p:nvSpPr>
+        <p:spPr>
+          <a:xfrm>
+            <a:off x="3429000" y="2651760"/>
+            <a:ext cx="274320" cy="274320"/>
+          </a:xfrm>
+          <a:prstGeom prst="ellipse">
+            <a:avLst/>
+          </a:prstGeom>
+          <a:solidFill>
+            <a:srgbClr val="1FAE7A"/>
+          </a:solidFill>
+          <a:ln/>
+        </p:spPr>
+      </p:sp>
+      <p:pic>
+        <p:nvPicPr>
+          <p:cNvPr id="13" name="Image 2" descr="/tmp/claude-0/-home-user-Self-Project/0c48a94d-adf1-5cd3-ba0e-1e76ea2b114f/scratchpad/deck/icons/check.png">    </p:cNvPr>
+          <p:cNvPicPr>
+            <a:picLocks noChangeAspect="1"/>
+          </p:cNvPicPr>
+          <p:nvPr/>
+        </p:nvPicPr>
+        <p:blipFill>
+          <a:blip r:embed="rId3"/>
+          <a:stretch>
+            <a:fillRect/>
+          </a:stretch>
+        </p:blipFill>
+        <p:spPr>
+          <a:xfrm>
+            <a:off x="3483864" y="2706624"/>
+            <a:ext cx="164592" cy="164592"/>
+          </a:xfrm>
+          <a:prstGeom prst="rect">
+            <a:avLst/>
+          </a:prstGeom>
+        </p:spPr>
+      </p:pic>
+      <p:sp>
+        <p:nvSpPr>
+          <p:cNvPr id="14" name="Text 9"/>
+          <p:cNvSpPr/>
+          <p:nvPr/>
+        </p:nvSpPr>
+        <p:spPr>
+          <a:xfrm>
+            <a:off x="2880360" y="2011680"/>
+            <a:ext cx="1371600" cy="548640"/>
+          </a:xfrm>
+          <a:prstGeom prst="rect">
+            <a:avLst/>
+          </a:prstGeom>
+          <a:noFill/>
+          <a:ln/>
+        </p:spPr>
+        <p:txBody>
+          <a:bodyPr wrap="square" lIns="0" tIns="0" rIns="0" bIns="0" rtlCol="0" anchor="b"/>
+          <a:lstStyle/>
+          <a:p>
+            <a:pPr algn="ctr" indent="0" marL="0">
+              <a:lnSpc>
+                <a:spcPts val="1100"/>
+              </a:lnSpc>
+              <a:buNone/>
+            </a:pPr>
+            <a:r>
+              <a:rPr lang="en-US" sz="850" b="1" dirty="0">
+                <a:solidFill>
+                  <a:srgbClr val="1B8A94"/>
+                </a:solidFill>
+                <a:latin typeface="Calibri" pitchFamily="34" charset="0"/>
+                <a:ea typeface="Calibri" pitchFamily="34" charset="-122"/>
+                <a:cs typeface="Calibri" pitchFamily="34" charset="-120"/>
+              </a:rPr>
+              <a:t>P2
+</a:t>
+            </a:r>
+            <a:pPr algn="ctr" indent="0" marL="0">
+              <a:lnSpc>
+                <a:spcPts val="1100"/>
+              </a:lnSpc>
+              <a:buNone/>
+            </a:pPr>
+            <a:r>
+              <a:rPr lang="en-US" sz="850" dirty="0">
+                <a:solidFill>
+                  <a:srgbClr val="16202B"/>
+                </a:solidFill>
+                <a:latin typeface="Calibri" pitchFamily="34" charset="0"/>
+                <a:ea typeface="Calibri" pitchFamily="34" charset="-122"/>
+                <a:cs typeface="Calibri" pitchFamily="34" charset="-120"/>
+              </a:rPr>
+              <a:t>Job workers</a:t>
+            </a:r>
+            <a:endParaRPr lang="en-US" sz="850" dirty="0"/>
+          </a:p>
+        </p:txBody>
+      </p:sp>
+      <p:sp>
+        <p:nvSpPr>
+          <p:cNvPr id="15" name="Shape 10"/>
+          <p:cNvSpPr/>
+          <p:nvPr/>
+        </p:nvSpPr>
+        <p:spPr>
+          <a:xfrm>
+            <a:off x="4686300" y="2651760"/>
+            <a:ext cx="274320" cy="274320"/>
+          </a:xfrm>
+          <a:prstGeom prst="ellipse">
+            <a:avLst/>
+          </a:prstGeom>
+          <a:solidFill>
+            <a:srgbClr val="1FAE7A"/>
+          </a:solidFill>
+          <a:ln/>
+        </p:spPr>
+      </p:sp>
+      <p:pic>
+        <p:nvPicPr>
+          <p:cNvPr id="16" name="Image 3" descr="/tmp/claude-0/-home-user-Self-Project/0c48a94d-adf1-5cd3-ba0e-1e76ea2b114f/scratchpad/deck/icons/check.png">    </p:cNvPr>
+          <p:cNvPicPr>
+            <a:picLocks noChangeAspect="1"/>
+          </p:cNvPicPr>
+          <p:nvPr/>
+        </p:nvPicPr>
+        <p:blipFill>
+          <a:blip r:embed="rId4"/>
+          <a:stretch>
+            <a:fillRect/>
+          </a:stretch>
+        </p:blipFill>
+        <p:spPr>
+          <a:xfrm>
+            <a:off x="4741164" y="2706624"/>
+            <a:ext cx="164592" cy="164592"/>
+          </a:xfrm>
+          <a:prstGeom prst="rect">
+            <a:avLst/>
+          </a:prstGeom>
+        </p:spPr>
+      </p:pic>
+      <p:sp>
+        <p:nvSpPr>
+          <p:cNvPr id="17" name="Text 11"/>
+          <p:cNvSpPr/>
+          <p:nvPr/>
+        </p:nvSpPr>
+        <p:spPr>
+          <a:xfrm>
+            <a:off x="4137660" y="3191256"/>
+            <a:ext cx="1371600" cy="548640"/>
+          </a:xfrm>
+          <a:prstGeom prst="rect">
+            <a:avLst/>
+          </a:prstGeom>
+          <a:noFill/>
+          <a:ln/>
+        </p:spPr>
+        <p:txBody>
+          <a:bodyPr wrap="square" lIns="0" tIns="0" rIns="0" bIns="0" rtlCol="0" anchor="t"/>
+          <a:lstStyle/>
+          <a:p>
+            <a:pPr algn="ctr" indent="0" marL="0">
+              <a:lnSpc>
+                <a:spcPts val="1100"/>
+              </a:lnSpc>
+              <a:buNone/>
+            </a:pPr>
+            <a:r>
+              <a:rPr lang="en-US" sz="850" b="1" dirty="0">
+                <a:solidFill>
+                  <a:srgbClr val="1B8A94"/>
+                </a:solidFill>
+                <a:latin typeface="Calibri" pitchFamily="34" charset="0"/>
+                <a:ea typeface="Calibri" pitchFamily="34" charset="-122"/>
+                <a:cs typeface="Calibri" pitchFamily="34" charset="-120"/>
+              </a:rPr>
+              <a:t>P3
+</a:t>
+            </a:r>
+            <a:pPr algn="ctr" indent="0" marL="0">
+              <a:lnSpc>
+                <a:spcPts val="1100"/>
+              </a:lnSpc>
+              <a:buNone/>
+            </a:pPr>
+            <a:r>
+              <a:rPr lang="en-US" sz="850" dirty="0">
+                <a:solidFill>
+                  <a:srgbClr val="16202B"/>
+                </a:solidFill>
+                <a:latin typeface="Calibri" pitchFamily="34" charset="0"/>
+                <a:ea typeface="Calibri" pitchFamily="34" charset="-122"/>
+                <a:cs typeface="Calibri" pitchFamily="34" charset="-120"/>
+              </a:rPr>
+              <a:t>Real notifications</a:t>
+            </a:r>
+            <a:endParaRPr lang="en-US" sz="850" dirty="0"/>
+          </a:p>
+        </p:txBody>
+      </p:sp>
+      <p:sp>
+        <p:nvSpPr>
+          <p:cNvPr id="18" name="Shape 12"/>
+          <p:cNvSpPr/>
+          <p:nvPr/>
+        </p:nvSpPr>
+        <p:spPr>
+          <a:xfrm>
+            <a:off x="5943600" y="2651760"/>
+            <a:ext cx="274320" cy="274320"/>
+          </a:xfrm>
+          <a:prstGeom prst="ellipse">
+            <a:avLst/>
+          </a:prstGeom>
+          <a:solidFill>
+            <a:srgbClr val="1FAE7A"/>
+          </a:solidFill>
+          <a:ln/>
+        </p:spPr>
+      </p:sp>
+      <p:pic>
+        <p:nvPicPr>
+          <p:cNvPr id="19" name="Image 4" descr="/tmp/claude-0/-home-user-Self-Project/0c48a94d-adf1-5cd3-ba0e-1e76ea2b114f/scratchpad/deck/icons/check.png">    </p:cNvPr>
+          <p:cNvPicPr>
+            <a:picLocks noChangeAspect="1"/>
+          </p:cNvPicPr>
+          <p:nvPr/>
+        </p:nvPicPr>
+        <p:blipFill>
+          <a:blip r:embed="rId5"/>
+          <a:stretch>
+            <a:fillRect/>
+          </a:stretch>
+        </p:blipFill>
+        <p:spPr>
+          <a:xfrm>
+            <a:off x="5998464" y="2706624"/>
+            <a:ext cx="164592" cy="164592"/>
+          </a:xfrm>
+          <a:prstGeom prst="rect">
+            <a:avLst/>
+          </a:prstGeom>
+        </p:spPr>
+      </p:pic>
+      <p:sp>
+        <p:nvSpPr>
+          <p:cNvPr id="20" name="Text 13"/>
+          <p:cNvSpPr/>
+          <p:nvPr/>
+        </p:nvSpPr>
+        <p:spPr>
+          <a:xfrm>
+            <a:off x="5394960" y="2011680"/>
+            <a:ext cx="1371600" cy="548640"/>
+          </a:xfrm>
+          <a:prstGeom prst="rect">
+            <a:avLst/>
+          </a:prstGeom>
+          <a:noFill/>
+          <a:ln/>
+        </p:spPr>
+        <p:txBody>
+          <a:bodyPr wrap="square" lIns="0" tIns="0" rIns="0" bIns="0" rtlCol="0" anchor="b"/>
+          <a:lstStyle/>
+          <a:p>
+            <a:pPr algn="ctr" indent="0" marL="0">
+              <a:lnSpc>
+                <a:spcPts val="1100"/>
+              </a:lnSpc>
+              <a:buNone/>
+            </a:pPr>
+            <a:r>
+              <a:rPr lang="en-US" sz="850" b="1" dirty="0">
+                <a:solidFill>
+                  <a:srgbClr val="1B8A94"/>
+                </a:solidFill>
+                <a:latin typeface="Calibri" pitchFamily="34" charset="0"/>
+                <a:ea typeface="Calibri" pitchFamily="34" charset="-122"/>
+                <a:cs typeface="Calibri" pitchFamily="34" charset="-120"/>
+              </a:rPr>
+              <a:t>P4
+</a:t>
+            </a:r>
+            <a:pPr algn="ctr" indent="0" marL="0">
+              <a:lnSpc>
+                <a:spcPts val="1100"/>
+              </a:lnSpc>
+              <a:buNone/>
+            </a:pPr>
+            <a:r>
+              <a:rPr lang="en-US" sz="850" dirty="0">
+                <a:solidFill>
+                  <a:srgbClr val="16202B"/>
+                </a:solidFill>
+                <a:latin typeface="Calibri" pitchFamily="34" charset="0"/>
+                <a:ea typeface="Calibri" pitchFamily="34" charset="-122"/>
+                <a:cs typeface="Calibri" pitchFamily="34" charset="-120"/>
+              </a:rPr>
+              <a:t>Postgres backend</a:t>
+            </a:r>
+            <a:endParaRPr lang="en-US" sz="850" dirty="0"/>
+          </a:p>
+        </p:txBody>
+      </p:sp>
+      <p:sp>
+        <p:nvSpPr>
+          <p:cNvPr id="21" name="Shape 14"/>
+          <p:cNvSpPr/>
+          <p:nvPr/>
+        </p:nvSpPr>
+        <p:spPr>
+          <a:xfrm>
+            <a:off x="7200900" y="2651760"/>
+            <a:ext cx="274320" cy="274320"/>
+          </a:xfrm>
+          <a:prstGeom prst="ellipse">
+            <a:avLst/>
+          </a:prstGeom>
+          <a:solidFill>
+            <a:srgbClr val="1FAE7A"/>
+          </a:solidFill>
+          <a:ln/>
+        </p:spPr>
+      </p:sp>
+      <p:pic>
+        <p:nvPicPr>
+          <p:cNvPr id="22" name="Image 5" descr="/tmp/claude-0/-home-user-Self-Project/0c48a94d-adf1-5cd3-ba0e-1e76ea2b114f/scratchpad/deck/icons/check.png">    </p:cNvPr>
+          <p:cNvPicPr>
+            <a:picLocks noChangeAspect="1"/>
+          </p:cNvPicPr>
+          <p:nvPr/>
+        </p:nvPicPr>
+        <p:blipFill>
+          <a:blip r:embed="rId6"/>
+          <a:stretch>
+            <a:fillRect/>
+          </a:stretch>
+        </p:blipFill>
+        <p:spPr>
+          <a:xfrm>
+            <a:off x="7255764" y="2706624"/>
+            <a:ext cx="164592" cy="164592"/>
+          </a:xfrm>
+          <a:prstGeom prst="rect">
+            <a:avLst/>
+          </a:prstGeom>
+        </p:spPr>
+      </p:pic>
+      <p:sp>
+        <p:nvSpPr>
+          <p:cNvPr id="23" name="Text 15"/>
+          <p:cNvSpPr/>
+          <p:nvPr/>
+        </p:nvSpPr>
+        <p:spPr>
+          <a:xfrm>
+            <a:off x="6652260" y="3191256"/>
+            <a:ext cx="1371600" cy="548640"/>
+          </a:xfrm>
+          <a:prstGeom prst="rect">
+            <a:avLst/>
+          </a:prstGeom>
+          <a:noFill/>
+          <a:ln/>
+        </p:spPr>
+        <p:txBody>
+          <a:bodyPr wrap="square" lIns="0" tIns="0" rIns="0" bIns="0" rtlCol="0" anchor="t"/>
+          <a:lstStyle/>
+          <a:p>
+            <a:pPr algn="ctr" indent="0" marL="0">
+              <a:lnSpc>
+                <a:spcPts val="1100"/>
+              </a:lnSpc>
+              <a:buNone/>
+            </a:pPr>
+            <a:r>
+              <a:rPr lang="en-US" sz="850" b="1" dirty="0">
+                <a:solidFill>
+                  <a:srgbClr val="1B8A94"/>
+                </a:solidFill>
+                <a:latin typeface="Calibri" pitchFamily="34" charset="0"/>
+                <a:ea typeface="Calibri" pitchFamily="34" charset="-122"/>
+                <a:cs typeface="Calibri" pitchFamily="34" charset="-120"/>
+              </a:rPr>
+              <a:t>P5
+</a:t>
+            </a:r>
+            <a:pPr algn="ctr" indent="0" marL="0">
+              <a:lnSpc>
+                <a:spcPts val="1100"/>
+              </a:lnSpc>
+              <a:buNone/>
+            </a:pPr>
+            <a:r>
+              <a:rPr lang="en-US" sz="850" dirty="0">
+                <a:solidFill>
+                  <a:srgbClr val="16202B"/>
+                </a:solidFill>
+                <a:latin typeface="Calibri" pitchFamily="34" charset="0"/>
+                <a:ea typeface="Calibri" pitchFamily="34" charset="-122"/>
+                <a:cs typeface="Calibri" pitchFamily="34" charset="-120"/>
+              </a:rPr>
+              <a:t>Hash-chain ledger</a:t>
+            </a:r>
+            <a:endParaRPr lang="en-US" sz="850" dirty="0"/>
+          </a:p>
+        </p:txBody>
+      </p:sp>
+      <p:sp>
+        <p:nvSpPr>
+          <p:cNvPr id="24" name="Shape 16"/>
+          <p:cNvSpPr/>
+          <p:nvPr/>
+        </p:nvSpPr>
+        <p:spPr>
+          <a:xfrm>
+            <a:off x="8458200" y="2651760"/>
+            <a:ext cx="274320" cy="274320"/>
+          </a:xfrm>
+          <a:prstGeom prst="ellipse">
+            <a:avLst/>
+          </a:prstGeom>
+          <a:solidFill>
+            <a:srgbClr val="1FAE7A"/>
+          </a:solidFill>
+          <a:ln/>
+        </p:spPr>
+      </p:sp>
+      <p:pic>
+        <p:nvPicPr>
+          <p:cNvPr id="25" name="Image 6" descr="/tmp/claude-0/-home-user-Self-Project/0c48a94d-adf1-5cd3-ba0e-1e76ea2b114f/scratchpad/deck/icons/check.png">    </p:cNvPr>
+          <p:cNvPicPr>
+            <a:picLocks noChangeAspect="1"/>
+          </p:cNvPicPr>
+          <p:nvPr/>
+        </p:nvPicPr>
+        <p:blipFill>
+          <a:blip r:embed="rId7"/>
+          <a:stretch>
+            <a:fillRect/>
+          </a:stretch>
+        </p:blipFill>
+        <p:spPr>
+          <a:xfrm>
+            <a:off x="8513064" y="2706624"/>
+            <a:ext cx="164592" cy="164592"/>
+          </a:xfrm>
+          <a:prstGeom prst="rect">
+            <a:avLst/>
+          </a:prstGeom>
+        </p:spPr>
+      </p:pic>
+      <p:sp>
+        <p:nvSpPr>
+          <p:cNvPr id="26" name="Text 17"/>
+          <p:cNvSpPr/>
+          <p:nvPr/>
+        </p:nvSpPr>
+        <p:spPr>
+          <a:xfrm>
+            <a:off x="7909560" y="2011680"/>
+            <a:ext cx="1371600" cy="548640"/>
+          </a:xfrm>
+          <a:prstGeom prst="rect">
+            <a:avLst/>
+          </a:prstGeom>
+          <a:noFill/>
+          <a:ln/>
+        </p:spPr>
+        <p:txBody>
+          <a:bodyPr wrap="square" lIns="0" tIns="0" rIns="0" bIns="0" rtlCol="0" anchor="b"/>
+          <a:lstStyle/>
+          <a:p>
+            <a:pPr algn="ctr" indent="0" marL="0">
+              <a:lnSpc>
+                <a:spcPts val="1100"/>
+              </a:lnSpc>
+              <a:buNone/>
+            </a:pPr>
+            <a:r>
+              <a:rPr lang="en-US" sz="850" b="1" dirty="0">
+                <a:solidFill>
+                  <a:srgbClr val="1B8A94"/>
+                </a:solidFill>
+                <a:latin typeface="Calibri" pitchFamily="34" charset="0"/>
+                <a:ea typeface="Calibri" pitchFamily="34" charset="-122"/>
+                <a:cs typeface="Calibri" pitchFamily="34" charset="-120"/>
+              </a:rPr>
+              <a:t>P6
+</a:t>
+            </a:r>
+            <a:pPr algn="ctr" indent="0" marL="0">
+              <a:lnSpc>
+                <a:spcPts val="1100"/>
+              </a:lnSpc>
+              <a:buNone/>
+            </a:pPr>
+            <a:r>
+              <a:rPr lang="en-US" sz="850" dirty="0">
+                <a:solidFill>
+                  <a:srgbClr val="16202B"/>
+                </a:solidFill>
+                <a:latin typeface="Calibri" pitchFamily="34" charset="0"/>
+                <a:ea typeface="Calibri" pitchFamily="34" charset="-122"/>
+                <a:cs typeface="Calibri" pitchFamily="34" charset="-120"/>
+              </a:rPr>
+              <a:t>Auth + dashboard</a:t>
+            </a:r>
+            <a:endParaRPr lang="en-US" sz="850" dirty="0"/>
+          </a:p>
+        </p:txBody>
+      </p:sp>
+      <p:sp>
+        <p:nvSpPr>
+          <p:cNvPr id="27" name="Shape 18"/>
+          <p:cNvSpPr/>
+          <p:nvPr/>
+        </p:nvSpPr>
+        <p:spPr>
+          <a:xfrm>
+            <a:off x="9715500" y="2651760"/>
+            <a:ext cx="274320" cy="274320"/>
+          </a:xfrm>
+          <a:prstGeom prst="ellipse">
+            <a:avLst/>
+          </a:prstGeom>
+          <a:solidFill>
+            <a:srgbClr val="1FAE7A"/>
+          </a:solidFill>
+          <a:ln/>
+        </p:spPr>
+      </p:sp>
+      <p:pic>
+        <p:nvPicPr>
+          <p:cNvPr id="28" name="Image 7" descr="/tmp/claude-0/-home-user-Self-Project/0c48a94d-adf1-5cd3-ba0e-1e76ea2b114f/scratchpad/deck/icons/check.png">    </p:cNvPr>
+          <p:cNvPicPr>
+            <a:picLocks noChangeAspect="1"/>
+          </p:cNvPicPr>
+          <p:nvPr/>
+        </p:nvPicPr>
+        <p:blipFill>
+          <a:blip r:embed="rId8"/>
+          <a:stretch>
+            <a:fillRect/>
+          </a:stretch>
+        </p:blipFill>
+        <p:spPr>
+          <a:xfrm>
+            <a:off x="9770364" y="2706624"/>
+            <a:ext cx="164592" cy="164592"/>
+          </a:xfrm>
+          <a:prstGeom prst="rect">
+            <a:avLst/>
+          </a:prstGeom>
+        </p:spPr>
+      </p:pic>
+      <p:sp>
+        <p:nvSpPr>
+          <p:cNvPr id="29" name="Text 19"/>
+          <p:cNvSpPr/>
+          <p:nvPr/>
+        </p:nvSpPr>
+        <p:spPr>
+          <a:xfrm>
+            <a:off x="9166860" y="3191256"/>
+            <a:ext cx="1371600" cy="548640"/>
+          </a:xfrm>
+          <a:prstGeom prst="rect">
+            <a:avLst/>
+          </a:prstGeom>
+          <a:noFill/>
+          <a:ln/>
+        </p:spPr>
+        <p:txBody>
+          <a:bodyPr wrap="square" lIns="0" tIns="0" rIns="0" bIns="0" rtlCol="0" anchor="t"/>
+          <a:lstStyle/>
+          <a:p>
+            <a:pPr algn="ctr" indent="0" marL="0">
+              <a:lnSpc>
+                <a:spcPts val="1100"/>
+              </a:lnSpc>
+              <a:buNone/>
+            </a:pPr>
+            <a:r>
+              <a:rPr lang="en-US" sz="850" b="1" dirty="0">
+                <a:solidFill>
+                  <a:srgbClr val="1B8A94"/>
+                </a:solidFill>
+                <a:latin typeface="Calibri" pitchFamily="34" charset="0"/>
+                <a:ea typeface="Calibri" pitchFamily="34" charset="-122"/>
+                <a:cs typeface="Calibri" pitchFamily="34" charset="-120"/>
+              </a:rPr>
+              <a:t>P7
+</a:t>
+            </a:r>
+            <a:pPr algn="ctr" indent="0" marL="0">
+              <a:lnSpc>
+                <a:spcPts val="1100"/>
+              </a:lnSpc>
+              <a:buNone/>
+            </a:pPr>
+            <a:r>
+              <a:rPr lang="en-US" sz="850" dirty="0">
+                <a:solidFill>
+                  <a:srgbClr val="16202B"/>
+                </a:solidFill>
+                <a:latin typeface="Calibri" pitchFamily="34" charset="0"/>
+                <a:ea typeface="Calibri" pitchFamily="34" charset="-122"/>
+                <a:cs typeface="Calibri" pitchFamily="34" charset="-120"/>
+              </a:rPr>
+              <a:t>Full automation</a:t>
+            </a:r>
+            <a:endParaRPr lang="en-US" sz="850" dirty="0"/>
+          </a:p>
+        </p:txBody>
+      </p:sp>
+      <p:sp>
+        <p:nvSpPr>
+          <p:cNvPr id="30" name="Shape 20"/>
+          <p:cNvSpPr/>
+          <p:nvPr/>
+        </p:nvSpPr>
+        <p:spPr>
+          <a:xfrm>
+            <a:off x="10972800" y="2651760"/>
+            <a:ext cx="274320" cy="274320"/>
+          </a:xfrm>
+          <a:prstGeom prst="ellipse">
+            <a:avLst/>
+          </a:prstGeom>
+          <a:solidFill>
+            <a:srgbClr val="1FAE7A"/>
+          </a:solidFill>
+          <a:ln/>
+        </p:spPr>
+      </p:sp>
+      <p:pic>
+        <p:nvPicPr>
+          <p:cNvPr id="31" name="Image 8" descr="/tmp/claude-0/-home-user-Self-Project/0c48a94d-adf1-5cd3-ba0e-1e76ea2b114f/scratchpad/deck/icons/check.png">    </p:cNvPr>
+          <p:cNvPicPr>
+            <a:picLocks noChangeAspect="1"/>
+          </p:cNvPicPr>
+          <p:nvPr/>
+        </p:nvPicPr>
+        <p:blipFill>
+          <a:blip r:embed="rId9"/>
+          <a:stretch>
+            <a:fillRect/>
+          </a:stretch>
+        </p:blipFill>
+        <p:spPr>
+          <a:xfrm>
+            <a:off x="11027664" y="2706624"/>
+            <a:ext cx="164592" cy="164592"/>
+          </a:xfrm>
+          <a:prstGeom prst="rect">
+            <a:avLst/>
+          </a:prstGeom>
+        </p:spPr>
+      </p:pic>
+      <p:sp>
+        <p:nvSpPr>
+          <p:cNvPr id="32" name="Text 21"/>
+          <p:cNvSpPr/>
+          <p:nvPr/>
+        </p:nvSpPr>
+        <p:spPr>
+          <a:xfrm>
+            <a:off x="10424160" y="2011680"/>
+            <a:ext cx="1371600" cy="548640"/>
+          </a:xfrm>
+          <a:prstGeom prst="rect">
+            <a:avLst/>
+          </a:prstGeom>
+          <a:noFill/>
+          <a:ln/>
+        </p:spPr>
+        <p:txBody>
+          <a:bodyPr wrap="square" lIns="0" tIns="0" rIns="0" bIns="0" rtlCol="0" anchor="b"/>
+          <a:lstStyle/>
+          <a:p>
+            <a:pPr algn="ctr" indent="0" marL="0">
+              <a:lnSpc>
+                <a:spcPts val="1100"/>
+              </a:lnSpc>
+              <a:buNone/>
+            </a:pPr>
+            <a:r>
+              <a:rPr lang="en-US" sz="850" b="1" dirty="0">
+                <a:solidFill>
+                  <a:srgbClr val="1B8A94"/>
+                </a:solidFill>
+                <a:latin typeface="Calibri" pitchFamily="34" charset="0"/>
+                <a:ea typeface="Calibri" pitchFamily="34" charset="-122"/>
+                <a:cs typeface="Calibri" pitchFamily="34" charset="-120"/>
+              </a:rPr>
+              <a:t>P8
+</a:t>
+            </a:r>
+            <a:pPr algn="ctr" indent="0" marL="0">
+              <a:lnSpc>
+                <a:spcPts val="1100"/>
+              </a:lnSpc>
+              <a:buNone/>
+            </a:pPr>
+            <a:r>
+              <a:rPr lang="en-US" sz="850" dirty="0">
+                <a:solidFill>
+                  <a:srgbClr val="16202B"/>
+                </a:solidFill>
+                <a:latin typeface="Calibri" pitchFamily="34" charset="0"/>
+                <a:ea typeface="Calibri" pitchFamily="34" charset="-122"/>
+                <a:cs typeface="Calibri" pitchFamily="34" charset="-120"/>
+              </a:rPr>
+              <a:t>Multi-tenant + RBAC</a:t>
+            </a:r>
+            <a:endParaRPr lang="en-US" sz="850" dirty="0"/>
+          </a:p>
+        </p:txBody>
+      </p:sp>
+      <p:sp>
+        <p:nvSpPr>
+          <p:cNvPr id="33" name="Text 22"/>
+          <p:cNvSpPr/>
+          <p:nvPr/>
+        </p:nvSpPr>
+        <p:spPr>
+          <a:xfrm>
+            <a:off x="777240" y="4297680"/>
+            <a:ext cx="5486400" cy="365760"/>
+          </a:xfrm>
+          <a:prstGeom prst="rect">
+            <a:avLst/>
+          </a:prstGeom>
+          <a:noFill/>
+          <a:ln/>
+        </p:spPr>
+        <p:txBody>
+          <a:bodyPr wrap="square" rtlCol="0" anchor="ctr"/>
+          <a:lstStyle/>
+          <a:p>
+            <a:pPr indent="0" marL="0">
+              <a:buNone/>
+            </a:pPr>
+            <a:r>
+              <a:rPr lang="en-US" sz="1800" b="1" dirty="0">
+                <a:solidFill>
+                  <a:srgbClr val="16202B"/>
+                </a:solidFill>
+                <a:latin typeface="Cambria" pitchFamily="34" charset="0"/>
+                <a:ea typeface="Cambria" pitchFamily="34" charset="-122"/>
+                <a:cs typeface="Cambria" pitchFamily="34" charset="-120"/>
+              </a:rPr>
+              <a:t>What's next</a:t>
+            </a:r>
+            <a:endParaRPr lang="en-US" sz="1800" dirty="0"/>
+          </a:p>
+        </p:txBody>
+      </p:sp>
+      <p:sp>
+        <p:nvSpPr>
+          <p:cNvPr id="34" name="Shape 23"/>
+          <p:cNvSpPr/>
+          <p:nvPr/>
+        </p:nvSpPr>
+        <p:spPr>
+          <a:xfrm>
+            <a:off x="777240" y="4800600"/>
+            <a:ext cx="457200" cy="457200"/>
+          </a:xfrm>
+          <a:prstGeom prst="ellipse">
+            <a:avLst/>
+          </a:prstGeom>
+          <a:solidFill>
+            <a:srgbClr val="12233F"/>
+          </a:solidFill>
+          <a:ln/>
+        </p:spPr>
+      </p:sp>
+      <p:pic>
+        <p:nvPicPr>
+          <p:cNvPr id="35" name="Image 9" descr="/tmp/claude-0/-home-user-Self-Project/0c48a94d-adf1-5cd3-ba0e-1e76ea2b114f/scratchpad/deck/icons/database.png">    </p:cNvPr>
+          <p:cNvPicPr>
+            <a:picLocks noChangeAspect="1"/>
+          </p:cNvPicPr>
+          <p:nvPr/>
+        </p:nvPicPr>
+        <p:blipFill>
+          <a:blip r:embed="rId10"/>
+          <a:stretch>
+            <a:fillRect/>
+          </a:stretch>
+        </p:blipFill>
+        <p:spPr>
+          <a:xfrm>
+            <a:off x="880110" y="4903470"/>
+            <a:ext cx="251460" cy="251460"/>
+          </a:xfrm>
+          <a:prstGeom prst="rect">
+            <a:avLst/>
+          </a:prstGeom>
+        </p:spPr>
+      </p:pic>
+      <p:sp>
+        <p:nvSpPr>
+          <p:cNvPr id="36" name="Text 24"/>
+          <p:cNvSpPr/>
+          <p:nvPr/>
+        </p:nvSpPr>
+        <p:spPr>
+          <a:xfrm>
+            <a:off x="1399032" y="4782312"/>
+            <a:ext cx="4270248" cy="457200"/>
+          </a:xfrm>
+          <a:prstGeom prst="rect">
+            <a:avLst/>
+          </a:prstGeom>
+          <a:noFill/>
+          <a:ln/>
+        </p:spPr>
+        <p:txBody>
+          <a:bodyPr wrap="square" lIns="0" tIns="0" rIns="0" bIns="0" rtlCol="0" anchor="ctr"/>
+          <a:lstStyle/>
+          <a:p>
+            <a:pPr indent="0" marL="0">
+              <a:buNone/>
+            </a:pPr>
+            <a:r>
+              <a:rPr lang="en-US" sz="1300" b="1" dirty="0">
+                <a:solidFill>
+                  <a:srgbClr val="16202B"/>
+                </a:solidFill>
+                <a:latin typeface="Cambria" pitchFamily="34" charset="0"/>
+                <a:ea typeface="Cambria" pitchFamily="34" charset="-122"/>
+                <a:cs typeface="Cambria" pitchFamily="34" charset="-120"/>
+              </a:rPr>
+              <a:t>Production hardening</a:t>
+            </a:r>
+            <a:endParaRPr lang="en-US" sz="1300" dirty="0"/>
+          </a:p>
+        </p:txBody>
+      </p:sp>
+      <p:sp>
+        <p:nvSpPr>
+          <p:cNvPr id="37" name="Text 25"/>
+          <p:cNvSpPr/>
+          <p:nvPr/>
+        </p:nvSpPr>
+        <p:spPr>
+          <a:xfrm>
+            <a:off x="777240" y="5367528"/>
+            <a:ext cx="4892040" cy="685800"/>
+          </a:xfrm>
+          <a:prstGeom prst="rect">
+            <a:avLst/>
+          </a:prstGeom>
+          <a:noFill/>
+          <a:ln/>
+        </p:spPr>
+        <p:txBody>
+          <a:bodyPr wrap="square" lIns="0" tIns="0" rIns="0" bIns="0" rtlCol="0" anchor="ctr"/>
+          <a:lstStyle/>
+          <a:p>
+            <a:pPr indent="0" marL="0">
+              <a:buNone/>
+            </a:pPr>
+            <a:r>
+              <a:rPr lang="en-US" sz="1050" dirty="0">
+                <a:solidFill>
+                  <a:srgbClr val="5B6B7C"/>
+                </a:solidFill>
+                <a:latin typeface="Calibri" pitchFamily="34" charset="0"/>
+                <a:ea typeface="Calibri" pitchFamily="34" charset="-122"/>
+                <a:cs typeface="Calibri" pitchFamily="34" charset="-120"/>
+              </a:rPr>
+              <a:t>Wrap mutations in transactions; move sessions off in-memory storage.</a:t>
+            </a:r>
+            <a:endParaRPr lang="en-US" sz="1050" dirty="0"/>
+          </a:p>
+        </p:txBody>
+      </p:sp>
+      <p:sp>
+        <p:nvSpPr>
+          <p:cNvPr id="38" name="Shape 26"/>
+          <p:cNvSpPr/>
+          <p:nvPr/>
+        </p:nvSpPr>
+        <p:spPr>
+          <a:xfrm>
+            <a:off x="6126480" y="4800600"/>
+            <a:ext cx="457200" cy="457200"/>
+          </a:xfrm>
+          <a:prstGeom prst="ellipse">
+            <a:avLst/>
+          </a:prstGeom>
+          <a:solidFill>
+            <a:srgbClr val="12233F"/>
+          </a:solidFill>
+          <a:ln/>
+        </p:spPr>
+      </p:sp>
+      <p:pic>
+        <p:nvPicPr>
+          <p:cNvPr id="39" name="Image 10" descr="/tmp/claude-0/-home-user-Self-Project/0c48a94d-adf1-5cd3-ba0e-1e76ea2b114f/scratchpad/deck/icons/flask.png">    </p:cNvPr>
+          <p:cNvPicPr>
+            <a:picLocks noChangeAspect="1"/>
+          </p:cNvPicPr>
+          <p:nvPr/>
+        </p:nvPicPr>
+        <p:blipFill>
+          <a:blip r:embed="rId11"/>
+          <a:stretch>
+            <a:fillRect/>
+          </a:stretch>
+        </p:blipFill>
+        <p:spPr>
+          <a:xfrm>
+            <a:off x="6229350" y="4903470"/>
+            <a:ext cx="251460" cy="251460"/>
+          </a:xfrm>
+          <a:prstGeom prst="rect">
+            <a:avLst/>
+          </a:prstGeom>
+        </p:spPr>
+      </p:pic>
+      <p:sp>
+        <p:nvSpPr>
+          <p:cNvPr id="40" name="Text 27"/>
+          <p:cNvSpPr/>
+          <p:nvPr/>
+        </p:nvSpPr>
+        <p:spPr>
+          <a:xfrm>
+            <a:off x="6748272" y="4782312"/>
+            <a:ext cx="4270248" cy="457200"/>
+          </a:xfrm>
+          <a:prstGeom prst="rect">
+            <a:avLst/>
+          </a:prstGeom>
+          <a:noFill/>
+          <a:ln/>
+        </p:spPr>
+        <p:txBody>
+          <a:bodyPr wrap="square" lIns="0" tIns="0" rIns="0" bIns="0" rtlCol="0" anchor="ctr"/>
+          <a:lstStyle/>
+          <a:p>
+            <a:pPr indent="0" marL="0">
+              <a:buNone/>
+            </a:pPr>
+            <a:r>
+              <a:rPr lang="en-US" sz="1300" b="1" dirty="0">
+                <a:solidFill>
+                  <a:srgbClr val="16202B"/>
+                </a:solidFill>
+                <a:latin typeface="Cambria" pitchFamily="34" charset="0"/>
+                <a:ea typeface="Cambria" pitchFamily="34" charset="-122"/>
+                <a:cs typeface="Cambria" pitchFamily="34" charset="-120"/>
+              </a:rPr>
+              <a:t>Broader archival targets</a:t>
+            </a:r>
+            <a:endParaRPr lang="en-US" sz="1300" dirty="0"/>
+          </a:p>
+        </p:txBody>
+      </p:sp>
+      <p:sp>
+        <p:nvSpPr>
+          <p:cNvPr id="41" name="Text 28"/>
+          <p:cNvSpPr/>
+          <p:nvPr/>
+        </p:nvSpPr>
+        <p:spPr>
+          <a:xfrm>
+            <a:off x="6126480" y="5367528"/>
+            <a:ext cx="4892040" cy="685800"/>
+          </a:xfrm>
+          <a:prstGeom prst="rect">
+            <a:avLst/>
+          </a:prstGeom>
+          <a:noFill/>
+          <a:ln/>
+        </p:spPr>
+        <p:txBody>
+          <a:bodyPr wrap="square" lIns="0" tIns="0" rIns="0" bIns="0" rtlCol="0" anchor="ctr"/>
+          <a:lstStyle/>
+          <a:p>
+            <a:pPr indent="0" marL="0">
+              <a:buNone/>
+            </a:pPr>
+            <a:r>
+              <a:rPr lang="en-US" sz="1050" dirty="0">
+                <a:solidFill>
+                  <a:srgbClr val="5B6B7C"/>
+                </a:solidFill>
+                <a:latin typeface="Calibri" pitchFamily="34" charset="0"/>
+                <a:ea typeface="Calibri" pitchFamily="34" charset="-122"/>
+                <a:cs typeface="Calibri" pitchFamily="34" charset="-120"/>
+              </a:rPr>
+              <a:t>Local-disk report archival today; cloud storage once the connector's ready.</a:t>
+            </a:r>
+            <a:endParaRPr lang="en-US" sz="1050" dirty="0"/>
+          </a:p>
+        </p:txBody>
+      </p:sp>
+    </p:spTree>
+  </p:cSld>
+  <p:clrMapOvr>
+    <a:masterClrMapping/>
+  </p:clrMapOvr>
+</p:sld>
+</file>
+
+<file path=ppt/slides/slide14.xml><?xml version="1.0" encoding="utf-8"?>
+<p:sld xmlns:a="http://schemas.openxmlformats.org/drawingml/2006/main" xmlns:r="http://schemas.openxmlformats.org/officeDocument/2006/relationships" xmlns:p="http://schemas.openxmlformats.org/presentationml/2006/main">
+  <p:cSld name="Slide 14">
     <p:bg>
       <p:bgPr>
         <a:solidFill>
